--- a/entrega/Apresentacao_Checkpoint_DevSecOps_Grupo4.pptx
+++ b/entrega/Apresentacao_Checkpoint_DevSecOps_Grupo4.pptx
@@ -2,38 +2,38 @@
 <file path=ppt/presentation.xml><?xml version="1.0" encoding="utf-8"?>
 <p:presentation xmlns:p="http://schemas.openxmlformats.org/presentationml/2006/main">
   <p:sldMasterIdLst>
-    <p:sldMasterId xmlns:r="http://schemas.openxmlformats.org/officeDocument/2006/relationships" id="2147483648" r:id="R15efc6983c4e4d61"/>
+    <p:sldMasterId xmlns:r="http://schemas.openxmlformats.org/officeDocument/2006/relationships" id="2147483648" r:id="R3258177dfa4644de"/>
   </p:sldMasterIdLst>
   <p:notesMasterIdLst>
-    <p:notesMasterId xmlns:r="http://schemas.openxmlformats.org/officeDocument/2006/relationships" r:id="Rb5fb84aecdcb43c0"/>
+    <p:notesMasterId xmlns:r="http://schemas.openxmlformats.org/officeDocument/2006/relationships" r:id="R28ee5eac31b841b0"/>
   </p:notesMasterIdLst>
   <p:sldIdLst>
-    <p:sldId xmlns:r="http://schemas.openxmlformats.org/officeDocument/2006/relationships" id="256" r:id="Ref66f6aa3df2423b"/>
-    <p:sldId xmlns:r="http://schemas.openxmlformats.org/officeDocument/2006/relationships" id="257" r:id="Rfa57c813e19e4337"/>
-    <p:sldId xmlns:r="http://schemas.openxmlformats.org/officeDocument/2006/relationships" id="258" r:id="R68b8f9b7bd22421d"/>
-    <p:sldId xmlns:r="http://schemas.openxmlformats.org/officeDocument/2006/relationships" id="259" r:id="R00fd0fd5c96f4b27"/>
-    <p:sldId xmlns:r="http://schemas.openxmlformats.org/officeDocument/2006/relationships" id="260" r:id="Rde61dde344714c96"/>
-    <p:sldId xmlns:r="http://schemas.openxmlformats.org/officeDocument/2006/relationships" id="261" r:id="Rb48a0af951b64baa"/>
-    <p:sldId xmlns:r="http://schemas.openxmlformats.org/officeDocument/2006/relationships" id="262" r:id="R7d09b940ab444db0"/>
-    <p:sldId xmlns:r="http://schemas.openxmlformats.org/officeDocument/2006/relationships" id="263" r:id="R34f0c19e7f29489e"/>
-    <p:sldId xmlns:r="http://schemas.openxmlformats.org/officeDocument/2006/relationships" id="264" r:id="R58a5027a786c472a"/>
-    <p:sldId xmlns:r="http://schemas.openxmlformats.org/officeDocument/2006/relationships" id="265" r:id="R89cd380faedd4812"/>
-    <p:sldId xmlns:r="http://schemas.openxmlformats.org/officeDocument/2006/relationships" id="266" r:id="Refc14287c11445dd"/>
-    <p:sldId xmlns:r="http://schemas.openxmlformats.org/officeDocument/2006/relationships" id="267" r:id="R73dfd28bde6d4b6c"/>
-    <p:sldId xmlns:r="http://schemas.openxmlformats.org/officeDocument/2006/relationships" id="268" r:id="Rd47451921df34dfa"/>
-    <p:sldId xmlns:r="http://schemas.openxmlformats.org/officeDocument/2006/relationships" id="269" r:id="Ra4410e077cec4b79"/>
-    <p:sldId xmlns:r="http://schemas.openxmlformats.org/officeDocument/2006/relationships" id="270" r:id="R74ee5100b3af4ce1"/>
-    <p:sldId xmlns:r="http://schemas.openxmlformats.org/officeDocument/2006/relationships" id="271" r:id="Rb1c520c7ed154501"/>
-    <p:sldId xmlns:r="http://schemas.openxmlformats.org/officeDocument/2006/relationships" id="272" r:id="R1d293dad268b4399"/>
-    <p:sldId xmlns:r="http://schemas.openxmlformats.org/officeDocument/2006/relationships" id="273" r:id="R74700004c2a04838"/>
-    <p:sldId xmlns:r="http://schemas.openxmlformats.org/officeDocument/2006/relationships" id="274" r:id="Rf90cf59008d64e4a"/>
-    <p:sldId xmlns:r="http://schemas.openxmlformats.org/officeDocument/2006/relationships" id="275" r:id="R3414bcc4c2254b90"/>
-    <p:sldId xmlns:r="http://schemas.openxmlformats.org/officeDocument/2006/relationships" id="276" r:id="R0851457b02ac457d"/>
-    <p:sldId xmlns:r="http://schemas.openxmlformats.org/officeDocument/2006/relationships" id="277" r:id="R60b6e1ebdc6846c8"/>
-    <p:sldId xmlns:r="http://schemas.openxmlformats.org/officeDocument/2006/relationships" id="278" r:id="Re6a8a3163cda4d24"/>
-    <p:sldId xmlns:r="http://schemas.openxmlformats.org/officeDocument/2006/relationships" id="279" r:id="Raeb431f582e84797"/>
-    <p:sldId xmlns:r="http://schemas.openxmlformats.org/officeDocument/2006/relationships" id="280" r:id="Re836d4cea79b48e9"/>
-    <p:sldId xmlns:r="http://schemas.openxmlformats.org/officeDocument/2006/relationships" id="281" r:id="R4c3882b5a688468f"/>
+    <p:sldId xmlns:r="http://schemas.openxmlformats.org/officeDocument/2006/relationships" id="256" r:id="R49f15e311e674640"/>
+    <p:sldId xmlns:r="http://schemas.openxmlformats.org/officeDocument/2006/relationships" id="257" r:id="R760e035acf374a42"/>
+    <p:sldId xmlns:r="http://schemas.openxmlformats.org/officeDocument/2006/relationships" id="258" r:id="Rfa5af1c6af1d4fd7"/>
+    <p:sldId xmlns:r="http://schemas.openxmlformats.org/officeDocument/2006/relationships" id="259" r:id="R5c56b9d9fc694560"/>
+    <p:sldId xmlns:r="http://schemas.openxmlformats.org/officeDocument/2006/relationships" id="260" r:id="R958edb0a55b04574"/>
+    <p:sldId xmlns:r="http://schemas.openxmlformats.org/officeDocument/2006/relationships" id="261" r:id="Ra8fde9d40b7648e2"/>
+    <p:sldId xmlns:r="http://schemas.openxmlformats.org/officeDocument/2006/relationships" id="262" r:id="Rbee9ad4dc6034393"/>
+    <p:sldId xmlns:r="http://schemas.openxmlformats.org/officeDocument/2006/relationships" id="263" r:id="R7835f9d2c04742e2"/>
+    <p:sldId xmlns:r="http://schemas.openxmlformats.org/officeDocument/2006/relationships" id="264" r:id="Rcfaf8d5c97234484"/>
+    <p:sldId xmlns:r="http://schemas.openxmlformats.org/officeDocument/2006/relationships" id="265" r:id="R759245d7ab934d5b"/>
+    <p:sldId xmlns:r="http://schemas.openxmlformats.org/officeDocument/2006/relationships" id="266" r:id="R4ba86a30fa8247da"/>
+    <p:sldId xmlns:r="http://schemas.openxmlformats.org/officeDocument/2006/relationships" id="267" r:id="R627f7164dd834f6d"/>
+    <p:sldId xmlns:r="http://schemas.openxmlformats.org/officeDocument/2006/relationships" id="268" r:id="Rddcd4f6d07e34f27"/>
+    <p:sldId xmlns:r="http://schemas.openxmlformats.org/officeDocument/2006/relationships" id="269" r:id="R91abfd15f4bd4608"/>
+    <p:sldId xmlns:r="http://schemas.openxmlformats.org/officeDocument/2006/relationships" id="270" r:id="R1e049c4ad6404014"/>
+    <p:sldId xmlns:r="http://schemas.openxmlformats.org/officeDocument/2006/relationships" id="271" r:id="R5e127d7f18e34808"/>
+    <p:sldId xmlns:r="http://schemas.openxmlformats.org/officeDocument/2006/relationships" id="272" r:id="R7a700fc44709444c"/>
+    <p:sldId xmlns:r="http://schemas.openxmlformats.org/officeDocument/2006/relationships" id="273" r:id="Rb5661f94d865475b"/>
+    <p:sldId xmlns:r="http://schemas.openxmlformats.org/officeDocument/2006/relationships" id="274" r:id="R1e3202496cc44170"/>
+    <p:sldId xmlns:r="http://schemas.openxmlformats.org/officeDocument/2006/relationships" id="275" r:id="Rcd018d2f24c74dcd"/>
+    <p:sldId xmlns:r="http://schemas.openxmlformats.org/officeDocument/2006/relationships" id="276" r:id="Rbfac10ceb5444298"/>
+    <p:sldId xmlns:r="http://schemas.openxmlformats.org/officeDocument/2006/relationships" id="277" r:id="Rab263f25cbcd4169"/>
+    <p:sldId xmlns:r="http://schemas.openxmlformats.org/officeDocument/2006/relationships" id="278" r:id="R5ea262410b2c4881"/>
+    <p:sldId xmlns:r="http://schemas.openxmlformats.org/officeDocument/2006/relationships" id="279" r:id="R0bd5d6c5058e41d5"/>
+    <p:sldId xmlns:r="http://schemas.openxmlformats.org/officeDocument/2006/relationships" id="280" r:id="R50dfde2601d84e02"/>
+    <p:sldId xmlns:r="http://schemas.openxmlformats.org/officeDocument/2006/relationships" id="281" r:id="R9eae49e3ed7146f2"/>
   </p:sldIdLst>
   <p:sldSz cx="12192000" cy="6858000"/>
   <p:notesSz cx="6858000" cy="9144000"/>
@@ -607,7 +607,7 @@
           <a:lstStyle xmlns:a="http://schemas.openxmlformats.org/drawingml/2006/main"/>
           <a:p xmlns:a="http://schemas.openxmlformats.org/drawingml/2006/main">
             <a:r>
-              <a:t>Fonte: reports/semgrep-green.json. O green analisa a cópia corrigida de um arquivo para manter a demonstração previsível.</a:t>
+              <a:t>Fonte: reports/semgrep-green.json. O green analisa a cópia corrigida de um arquivo com o mesmo --config auto usado no red.</a:t>
             </a:r>
           </a:p>
         </p:txBody>
@@ -1377,7 +1377,7 @@
           <a:lstStyle xmlns:a="http://schemas.openxmlformats.org/drawingml/2006/main"/>
           <a:p xmlns:a="http://schemas.openxmlformats.org/drawingml/2006/main">
             <a:r>
-              <a:t>Os comandos internos de Docker, Semgrep, ZAP e quality-gate.mjs já estão automatizados em scripts/run-lab.ps1.</a:t>
+              <a:t>Nenhum script inicia os scanners. fetch-target.ps1 baixa o código, prepare-green.ps1 cria a cópia corrigida e quality-gate.mjs interpreta os JSON.</a:t>
             </a:r>
           </a:p>
         </p:txBody>
@@ -2217,7 +2217,7 @@
           <a:lstStyle xmlns:a="http://schemas.openxmlformats.org/drawingml/2006/main"/>
           <a:p xmlns:a="http://schemas.openxmlformats.org/drawingml/2006/main">
             <a:r>
-              <a:t>Fonte: reports/semgrep-red.json. Explique que o script usa --expect fail para confirmar que o gate detecta o bloqueador.</a:t>
+              <a:t>Fonte: reports/semgrep-red.json. O scan é digitado como comando e usa --config auto. O gate usa --expect fail apenas para confirmar que o bloqueador foi detectado.</a:t>
             </a:r>
           </a:p>
         </p:txBody>
@@ -2285,7 +2285,7 @@
   </p:cSld>
   <p:clrMap bg1="lt1" tx1="dk1" bg2="lt2" tx2="dk2" accent1="accent1" accent2="accent2" accent3="accent3" accent4="accent4" accent5="accent5" accent6="accent6" hlink="hlink" folHlink="folHlink"/>
   <p:sldLayoutIdLst>
-    <p:sldLayoutId xmlns:r="http://schemas.openxmlformats.org/officeDocument/2006/relationships" id="2147483649" r:id="R5abdda6711ce49b0"/>
+    <p:sldLayoutId xmlns:r="http://schemas.openxmlformats.org/officeDocument/2006/relationships" id="2147483649" r:id="R5aa0e0ecbaf14955"/>
   </p:sldLayoutIdLst>
   <p:txStyles>
     <p:titleStyle>
@@ -3164,7 +3164,7 @@
           <p:cNvPr id="9" name="">
             <a:extLst xmlns:a="http://schemas.openxmlformats.org/drawingml/2006/main">
               <a:ext uri="{FF2B5EF4-FFF2-40B4-BE49-F238E27FC236}">
-                <a16:creationId xmlns:a16="http://schemas.microsoft.com/office/drawing/2014/main" id="{9ADC90EB-2D9E-4322-99FB-1BF85E487D28}"/>
+                <a16:creationId xmlns:a16="http://schemas.microsoft.com/office/drawing/2014/main" id="{398F81BB-CB27-4866-8B7B-6553D61995A3}"/>
               </a:ext>
             </a:extLst>
           </p:cNvPr>
@@ -3196,7 +3196,7 @@
           <p:cNvPr id="2" name="">
             <a:extLst xmlns:a="http://schemas.openxmlformats.org/drawingml/2006/main">
               <a:ext uri="{FF2B5EF4-FFF2-40B4-BE49-F238E27FC236}">
-                <a16:creationId xmlns:a16="http://schemas.microsoft.com/office/drawing/2014/main" id="{EE7FB074-A969-422C-9545-0B514A228719}"/>
+                <a16:creationId xmlns:a16="http://schemas.microsoft.com/office/drawing/2014/main" id="{D3158397-01CF-4C65-8FBD-48D770E29CA3}"/>
               </a:ext>
             </a:extLst>
           </p:cNvPr>
@@ -3253,7 +3253,7 @@
           <p:cNvPr id="3" name="">
             <a:extLst xmlns:a="http://schemas.openxmlformats.org/drawingml/2006/main">
               <a:ext uri="{FF2B5EF4-FFF2-40B4-BE49-F238E27FC236}">
-                <a16:creationId xmlns:a16="http://schemas.microsoft.com/office/drawing/2014/main" id="{E4176036-AC1E-47E6-ADDD-10315050DC02}"/>
+                <a16:creationId xmlns:a16="http://schemas.microsoft.com/office/drawing/2014/main" id="{DDD909C8-E8A6-4C9F-BE6C-72718576B851}"/>
               </a:ext>
             </a:extLst>
           </p:cNvPr>
@@ -3333,7 +3333,7 @@
           <p:cNvPr id="4" name="">
             <a:extLst xmlns:a="http://schemas.openxmlformats.org/drawingml/2006/main">
               <a:ext uri="{FF2B5EF4-FFF2-40B4-BE49-F238E27FC236}">
-                <a16:creationId xmlns:a16="http://schemas.microsoft.com/office/drawing/2014/main" id="{46582D98-1F20-4DA4-8BDA-2FE3C99534BA}"/>
+                <a16:creationId xmlns:a16="http://schemas.microsoft.com/office/drawing/2014/main" id="{114368BB-3FA2-4757-BC89-229F34B35BC5}"/>
               </a:ext>
             </a:extLst>
           </p:cNvPr>
@@ -3390,7 +3390,7 @@
           <p:cNvPr id="5" name="">
             <a:extLst xmlns:a="http://schemas.openxmlformats.org/drawingml/2006/main">
               <a:ext uri="{FF2B5EF4-FFF2-40B4-BE49-F238E27FC236}">
-                <a16:creationId xmlns:a16="http://schemas.microsoft.com/office/drawing/2014/main" id="{63AB35A1-67F3-484B-B013-208637E4F358}"/>
+                <a16:creationId xmlns:a16="http://schemas.microsoft.com/office/drawing/2014/main" id="{397E6EE6-470A-471B-ADF5-C2C7A25465A5}"/>
               </a:ext>
             </a:extLst>
           </p:cNvPr>
@@ -3422,7 +3422,7 @@
           <p:cNvPr id="6" name="">
             <a:extLst xmlns:a="http://schemas.openxmlformats.org/drawingml/2006/main">
               <a:ext uri="{FF2B5EF4-FFF2-40B4-BE49-F238E27FC236}">
-                <a16:creationId xmlns:a16="http://schemas.microsoft.com/office/drawing/2014/main" id="{03EE1A27-A318-40FB-B013-6DABD6B7FD31}"/>
+                <a16:creationId xmlns:a16="http://schemas.microsoft.com/office/drawing/2014/main" id="{0BF7D1F9-B160-4865-9D73-0C0F56BFB174}"/>
               </a:ext>
             </a:extLst>
           </p:cNvPr>
@@ -3479,7 +3479,7 @@
           <p:cNvPr id="7" name="">
             <a:extLst xmlns:a="http://schemas.openxmlformats.org/drawingml/2006/main">
               <a:ext uri="{FF2B5EF4-FFF2-40B4-BE49-F238E27FC236}">
-                <a16:creationId xmlns:a16="http://schemas.microsoft.com/office/drawing/2014/main" id="{13D805FB-8EEB-43B9-A904-BE28FC687E9B}"/>
+                <a16:creationId xmlns:a16="http://schemas.microsoft.com/office/drawing/2014/main" id="{6FC07DA5-B331-4960-B0E6-880638B5C10E}"/>
               </a:ext>
             </a:extLst>
           </p:cNvPr>
@@ -3536,7 +3536,7 @@
           <p:cNvPr id="8" name="">
             <a:extLst xmlns:a="http://schemas.openxmlformats.org/drawingml/2006/main">
               <a:ext uri="{FF2B5EF4-FFF2-40B4-BE49-F238E27FC236}">
-                <a16:creationId xmlns:a16="http://schemas.microsoft.com/office/drawing/2014/main" id="{BBB10374-270E-495A-A034-2E4CF22D06F3}"/>
+                <a16:creationId xmlns:a16="http://schemas.microsoft.com/office/drawing/2014/main" id="{FE2104B2-F4B6-421F-91AC-2DA8C56AAA8D}"/>
               </a:ext>
             </a:extLst>
           </p:cNvPr>
@@ -3591,7 +3591,7 @@
     </p:spTree>
     <p:extLst>
       <p:ext uri="{BB962C8B-B14F-4D97-AF65-F5344CB8AC3E}">
-        <p14:creationId xmlns:p14="http://schemas.microsoft.com/office/powerpoint/2010/main" val="1676186177"/>
+        <p14:creationId xmlns:p14="http://schemas.microsoft.com/office/powerpoint/2010/main" val="1651511709"/>
       </p:ext>
     </p:extLst>
   </p:cSld>
@@ -3622,7 +3622,7 @@
           <p:cNvPr id="13" name="">
             <a:extLst xmlns:a="http://schemas.openxmlformats.org/drawingml/2006/main">
               <a:ext uri="{FF2B5EF4-FFF2-40B4-BE49-F238E27FC236}">
-                <a16:creationId xmlns:a16="http://schemas.microsoft.com/office/drawing/2014/main" id="{B8068B6A-B205-4329-B8ED-F3FA0C3F56E8}"/>
+                <a16:creationId xmlns:a16="http://schemas.microsoft.com/office/drawing/2014/main" id="{1D4B7AE1-D557-4BB7-A9CF-41D7C5EB4554}"/>
               </a:ext>
             </a:extLst>
           </p:cNvPr>
@@ -3654,7 +3654,7 @@
           <p:cNvPr id="2" name="">
             <a:extLst xmlns:a="http://schemas.openxmlformats.org/drawingml/2006/main">
               <a:ext uri="{FF2B5EF4-FFF2-40B4-BE49-F238E27FC236}">
-                <a16:creationId xmlns:a16="http://schemas.microsoft.com/office/drawing/2014/main" id="{9059709E-1A3E-4555-A0BE-574BE1E01B2A}"/>
+                <a16:creationId xmlns:a16="http://schemas.microsoft.com/office/drawing/2014/main" id="{8ED585BA-5016-4E43-A803-AF67E513FCA0}"/>
               </a:ext>
             </a:extLst>
           </p:cNvPr>
@@ -3711,7 +3711,7 @@
           <p:cNvPr id="3" name="">
             <a:extLst xmlns:a="http://schemas.openxmlformats.org/drawingml/2006/main">
               <a:ext uri="{FF2B5EF4-FFF2-40B4-BE49-F238E27FC236}">
-                <a16:creationId xmlns:a16="http://schemas.microsoft.com/office/drawing/2014/main" id="{86EAD440-D501-457C-85A8-66CEEB528F05}"/>
+                <a16:creationId xmlns:a16="http://schemas.microsoft.com/office/drawing/2014/main" id="{650CFB22-662E-492B-8DEC-6D57BADEC192}"/>
               </a:ext>
             </a:extLst>
           </p:cNvPr>
@@ -3768,7 +3768,7 @@
           <p:cNvPr id="4" name="">
             <a:extLst xmlns:a="http://schemas.openxmlformats.org/drawingml/2006/main">
               <a:ext uri="{FF2B5EF4-FFF2-40B4-BE49-F238E27FC236}">
-                <a16:creationId xmlns:a16="http://schemas.microsoft.com/office/drawing/2014/main" id="{768B2DD2-58E6-44A8-8A25-3F8189089956}"/>
+                <a16:creationId xmlns:a16="http://schemas.microsoft.com/office/drawing/2014/main" id="{DD799043-E0C6-46D2-A22A-18CDCF74AC1F}"/>
               </a:ext>
             </a:extLst>
           </p:cNvPr>
@@ -3825,7 +3825,7 @@
           <p:cNvPr id="5" name="">
             <a:extLst xmlns:a="http://schemas.openxmlformats.org/drawingml/2006/main">
               <a:ext uri="{FF2B5EF4-FFF2-40B4-BE49-F238E27FC236}">
-                <a16:creationId xmlns:a16="http://schemas.microsoft.com/office/drawing/2014/main" id="{961A6C5C-AF8B-4387-A753-45D7679D9826}"/>
+                <a16:creationId xmlns:a16="http://schemas.microsoft.com/office/drawing/2014/main" id="{3471675D-129E-4F1B-92BF-E113E7314C0D}"/>
               </a:ext>
             </a:extLst>
           </p:cNvPr>
@@ -3882,7 +3882,7 @@
           <p:cNvPr id="6" name="">
             <a:extLst xmlns:a="http://schemas.openxmlformats.org/drawingml/2006/main">
               <a:ext uri="{FF2B5EF4-FFF2-40B4-BE49-F238E27FC236}">
-                <a16:creationId xmlns:a16="http://schemas.microsoft.com/office/drawing/2014/main" id="{B80BA289-213E-4124-A6D5-C5FB50C394FC}"/>
+                <a16:creationId xmlns:a16="http://schemas.microsoft.com/office/drawing/2014/main" id="{DFDEBA6F-4666-4CD9-BBF9-BC71E425523B}"/>
               </a:ext>
             </a:extLst>
           </p:cNvPr>
@@ -3939,7 +3939,7 @@
           <p:cNvPr id="7" name="">
             <a:extLst xmlns:a="http://schemas.openxmlformats.org/drawingml/2006/main">
               <a:ext uri="{FF2B5EF4-FFF2-40B4-BE49-F238E27FC236}">
-                <a16:creationId xmlns:a16="http://schemas.microsoft.com/office/drawing/2014/main" id="{03F17408-B214-4397-899A-E3934C82C948}"/>
+                <a16:creationId xmlns:a16="http://schemas.microsoft.com/office/drawing/2014/main" id="{2B9CF709-2F61-412C-9FAE-A2BA1792531B}"/>
               </a:ext>
             </a:extLst>
           </p:cNvPr>
@@ -3971,7 +3971,7 @@
           <p:cNvPr id="8" name="">
             <a:extLst xmlns:a="http://schemas.openxmlformats.org/drawingml/2006/main">
               <a:ext uri="{FF2B5EF4-FFF2-40B4-BE49-F238E27FC236}">
-                <a16:creationId xmlns:a16="http://schemas.microsoft.com/office/drawing/2014/main" id="{9105FD46-037F-4567-8A09-D870EC860576}"/>
+                <a16:creationId xmlns:a16="http://schemas.microsoft.com/office/drawing/2014/main" id="{47A7EACD-E615-47C4-AEEA-279B0EAFC6A9}"/>
               </a:ext>
             </a:extLst>
           </p:cNvPr>
@@ -4074,7 +4074,7 @@
           <p:cNvPr id="9" name="">
             <a:extLst xmlns:a="http://schemas.openxmlformats.org/drawingml/2006/main">
               <a:ext uri="{FF2B5EF4-FFF2-40B4-BE49-F238E27FC236}">
-                <a16:creationId xmlns:a16="http://schemas.microsoft.com/office/drawing/2014/main" id="{8CB37B01-8CE6-4CEF-A8A8-1D21B53FAA6D}"/>
+                <a16:creationId xmlns:a16="http://schemas.microsoft.com/office/drawing/2014/main" id="{F0AC46B3-730F-4A56-8D54-F952640CC0B3}"/>
               </a:ext>
             </a:extLst>
           </p:cNvPr>
@@ -4131,7 +4131,7 @@
           <p:cNvPr id="10" name="">
             <a:extLst xmlns:a="http://schemas.openxmlformats.org/drawingml/2006/main">
               <a:ext uri="{FF2B5EF4-FFF2-40B4-BE49-F238E27FC236}">
-                <a16:creationId xmlns:a16="http://schemas.microsoft.com/office/drawing/2014/main" id="{9D14DCCD-0DCC-4F98-A059-5CCF934B53F1}"/>
+                <a16:creationId xmlns:a16="http://schemas.microsoft.com/office/drawing/2014/main" id="{BA780804-EC21-484D-8340-890D342AF495}"/>
               </a:ext>
             </a:extLst>
           </p:cNvPr>
@@ -4163,7 +4163,7 @@
           <p:cNvPr id="11" name="">
             <a:extLst xmlns:a="http://schemas.openxmlformats.org/drawingml/2006/main">
               <a:ext uri="{FF2B5EF4-FFF2-40B4-BE49-F238E27FC236}">
-                <a16:creationId xmlns:a16="http://schemas.microsoft.com/office/drawing/2014/main" id="{C6EEBAB4-65FE-44FE-BC54-7F1F665F00E4}"/>
+                <a16:creationId xmlns:a16="http://schemas.microsoft.com/office/drawing/2014/main" id="{F4C86E2D-1F16-42CD-AB11-7AA55AF7BAF9}"/>
               </a:ext>
             </a:extLst>
           </p:cNvPr>
@@ -4289,7 +4289,7 @@
           <p:cNvPr id="12" name="">
             <a:extLst xmlns:a="http://schemas.openxmlformats.org/drawingml/2006/main">
               <a:ext uri="{FF2B5EF4-FFF2-40B4-BE49-F238E27FC236}">
-                <a16:creationId xmlns:a16="http://schemas.microsoft.com/office/drawing/2014/main" id="{1FACEB4D-6D5F-4D63-87EE-FFC06A711121}"/>
+                <a16:creationId xmlns:a16="http://schemas.microsoft.com/office/drawing/2014/main" id="{6E5771F0-BD17-451C-9EB3-8053F052B619}"/>
               </a:ext>
             </a:extLst>
           </p:cNvPr>
@@ -4344,7 +4344,7 @@
     </p:spTree>
     <p:extLst>
       <p:ext uri="{BB962C8B-B14F-4D97-AF65-F5344CB8AC3E}">
-        <p14:creationId xmlns:p14="http://schemas.microsoft.com/office/powerpoint/2010/main" val="745340091"/>
+        <p14:creationId xmlns:p14="http://schemas.microsoft.com/office/powerpoint/2010/main" val="1809448346"/>
       </p:ext>
     </p:extLst>
   </p:cSld>
@@ -4372,10 +4372,10 @@
       </p:grpSpPr>
       <p:sp>
         <p:nvSpPr>
-          <p:cNvPr id="12" name="">
-            <a:extLst xmlns:a="http://schemas.openxmlformats.org/drawingml/2006/main">
-              <a:ext uri="{FF2B5EF4-FFF2-40B4-BE49-F238E27FC236}">
-                <a16:creationId xmlns:a16="http://schemas.microsoft.com/office/drawing/2014/main" id="{7CCD506D-E2D0-46A2-AB47-82B71D743CCE}"/>
+          <p:cNvPr id="15" name="">
+            <a:extLst xmlns:a="http://schemas.openxmlformats.org/drawingml/2006/main">
+              <a:ext uri="{FF2B5EF4-FFF2-40B4-BE49-F238E27FC236}">
+                <a16:creationId xmlns:a16="http://schemas.microsoft.com/office/drawing/2014/main" id="{448A7EFF-9E72-491E-8536-CA0E6E7F469A}"/>
               </a:ext>
             </a:extLst>
           </p:cNvPr>
@@ -4407,7 +4407,7 @@
           <p:cNvPr id="2" name="">
             <a:extLst xmlns:a="http://schemas.openxmlformats.org/drawingml/2006/main">
               <a:ext uri="{FF2B5EF4-FFF2-40B4-BE49-F238E27FC236}">
-                <a16:creationId xmlns:a16="http://schemas.microsoft.com/office/drawing/2014/main" id="{7EF58EBD-997A-481C-9944-B65E2EEC7ABC}"/>
+                <a16:creationId xmlns:a16="http://schemas.microsoft.com/office/drawing/2014/main" id="{16D9E464-A73D-4BF1-8E36-1779E7BFF942}"/>
               </a:ext>
             </a:extLst>
           </p:cNvPr>
@@ -4454,7 +4454,7 @@
                 <a:ea typeface="Arial"/>
                 <a:cs typeface="Arial"/>
               </a:rPr>
-              <a:t>VERIFICAÇÃO DA CORREÇÃO</a:t>
+              <a:t>MESMAS REGRAS GERAIS</a:t>
             </a:r>
           </a:p>
         </p:txBody>
@@ -4464,7 +4464,7 @@
           <p:cNvPr id="3" name="">
             <a:extLst xmlns:a="http://schemas.openxmlformats.org/drawingml/2006/main">
               <a:ext uri="{FF2B5EF4-FFF2-40B4-BE49-F238E27FC236}">
-                <a16:creationId xmlns:a16="http://schemas.microsoft.com/office/drawing/2014/main" id="{5ABA548A-D28D-49AE-94DA-1BA1E5402D68}"/>
+                <a16:creationId xmlns:a16="http://schemas.microsoft.com/office/drawing/2014/main" id="{DD97A34A-4B11-4831-A7D1-7C50CDE921FD}"/>
               </a:ext>
             </a:extLst>
           </p:cNvPr>
@@ -4521,7 +4521,7 @@
           <p:cNvPr id="4" name="">
             <a:extLst xmlns:a="http://schemas.openxmlformats.org/drawingml/2006/main">
               <a:ext uri="{FF2B5EF4-FFF2-40B4-BE49-F238E27FC236}">
-                <a16:creationId xmlns:a16="http://schemas.microsoft.com/office/drawing/2014/main" id="{D103081F-56A2-4271-995C-CA8DF418B9B6}"/>
+                <a16:creationId xmlns:a16="http://schemas.microsoft.com/office/drawing/2014/main" id="{4FE474BB-A881-46F5-949A-79D7C0E84199}"/>
               </a:ext>
             </a:extLst>
           </p:cNvPr>
@@ -4578,64 +4578,7 @@
           <p:cNvPr id="5" name="">
             <a:extLst xmlns:a="http://schemas.openxmlformats.org/drawingml/2006/main">
               <a:ext uri="{FF2B5EF4-FFF2-40B4-BE49-F238E27FC236}">
-                <a16:creationId xmlns:a16="http://schemas.microsoft.com/office/drawing/2014/main" id="{6E17C04D-F3F6-4A4B-8893-F165C92A3031}"/>
-              </a:ext>
-            </a:extLst>
-          </p:cNvPr>
-          <p:cNvSpPr>
-            <a:spLocks xmlns:a="http://schemas.openxmlformats.org/drawingml/2006/main" noGrp="1"/>
-          </p:cNvSpPr>
-          <p:nvPr/>
-        </p:nvSpPr>
-        <p:spPr>
-          <a:xfrm xmlns:a="http://schemas.openxmlformats.org/drawingml/2006/main">
-            <a:off x="4095750" y="6419850"/>
-            <a:ext cx="6858000" cy="228600"/>
-          </a:xfrm>
-          <a:prstGeom xmlns:a="http://schemas.openxmlformats.org/drawingml/2006/main" prst="rect">
-            <a:avLst/>
-          </a:prstGeom>
-          <a:noFill xmlns:a="http://schemas.openxmlformats.org/drawingml/2006/main"/>
-          <a:ln xmlns:a="http://schemas.openxmlformats.org/drawingml/2006/main" w="0">
-            <a:noFill/>
-          </a:ln>
-        </p:spPr>
-        <p:txBody>
-          <a:bodyPr xmlns:a="http://schemas.openxmlformats.org/drawingml/2006/main" anchor="ctr">
-            <a:normAutofit fontScale="85714"/>
-          </a:bodyPr>
-          <a:lstStyle xmlns:a="http://schemas.openxmlformats.org/drawingml/2006/main"/>
-          <a:p xmlns:a="http://schemas.openxmlformats.org/drawingml/2006/main">
-            <a:pPr algn="r">
-              <a:defRPr sz="1050">
-                <a:solidFill>
-                  <a:srgbClr val="637383"/>
-                </a:solidFill>
-                <a:latin typeface="Arial"/>
-                <a:ea typeface="Arial"/>
-                <a:cs typeface="Arial"/>
-              </a:defRPr>
-            </a:pPr>
-            <a:r>
-              <a:rPr sz="1050">
-                <a:solidFill>
-                  <a:srgbClr val="637383"/>
-                </a:solidFill>
-                <a:latin typeface="Arial"/>
-                <a:ea typeface="Arial"/>
-                <a:cs typeface="Arial"/>
-              </a:rPr>
-              <a:t>captura do Grupo 4</a:t>
-            </a:r>
-          </a:p>
-        </p:txBody>
-      </p:sp>
-      <p:sp>
-        <p:nvSpPr>
-          <p:cNvPr id="6" name="">
-            <a:extLst xmlns:a="http://schemas.openxmlformats.org/drawingml/2006/main">
-              <a:ext uri="{FF2B5EF4-FFF2-40B4-BE49-F238E27FC236}">
-                <a16:creationId xmlns:a16="http://schemas.microsoft.com/office/drawing/2014/main" id="{4DCCA2F7-C76C-4D27-BA44-0C48557124FB}"/>
+                <a16:creationId xmlns:a16="http://schemas.microsoft.com/office/drawing/2014/main" id="{0759B934-898D-4297-A811-DBFA6F35A55A}"/>
               </a:ext>
             </a:extLst>
           </p:cNvPr>
@@ -4687,34 +4630,341 @@
           </a:p>
         </p:txBody>
       </p:sp>
-      <p:pic>
-        <p:nvPicPr>
-          <p:cNvPr id="18" name=""/>
-          <p:cNvPicPr>
-            <a:picLocks xmlns:a="http://schemas.openxmlformats.org/drawingml/2006/main" noChangeAspect="1"/>
-          </p:cNvPicPr>
-          <p:nvPr/>
-        </p:nvPicPr>
-        <p:blipFill>
-          <a:blip xmlns:r="http://schemas.openxmlformats.org/officeDocument/2006/relationships" xmlns:a="http://schemas.openxmlformats.org/drawingml/2006/main" r:embed="Red9c29d397a34010"/>
-          <a:stretch xmlns:a="http://schemas.openxmlformats.org/drawingml/2006/main"/>
-        </p:blipFill>
-        <p:spPr>
-          <a:xfrm xmlns:a="http://schemas.openxmlformats.org/drawingml/2006/main">
-            <a:off x="609600" y="1521773"/>
-            <a:ext cx="7334250" cy="4233555"/>
-          </a:xfrm>
-          <a:prstGeom xmlns:a="http://schemas.openxmlformats.org/drawingml/2006/main" prst="rect">
-            <a:avLst/>
-          </a:prstGeom>
-        </p:spPr>
-      </p:pic>
+      <p:sp>
+        <p:nvSpPr>
+          <p:cNvPr id="6" name="">
+            <a:extLst xmlns:a="http://schemas.openxmlformats.org/drawingml/2006/main">
+              <a:ext uri="{FF2B5EF4-FFF2-40B4-BE49-F238E27FC236}">
+                <a16:creationId xmlns:a16="http://schemas.microsoft.com/office/drawing/2014/main" id="{FE050722-96FB-4E1A-A333-699D82DA8F09}"/>
+              </a:ext>
+            </a:extLst>
+          </p:cNvPr>
+          <p:cNvSpPr>
+            <a:spLocks xmlns:a="http://schemas.openxmlformats.org/drawingml/2006/main" noGrp="1"/>
+          </p:cNvSpPr>
+          <p:nvPr/>
+        </p:nvSpPr>
+        <p:spPr>
+          <a:xfrm xmlns:a="http://schemas.openxmlformats.org/drawingml/2006/main">
+            <a:off x="666750" y="1562100"/>
+            <a:ext cx="5715000" cy="381000"/>
+          </a:xfrm>
+          <a:prstGeom xmlns:a="http://schemas.openxmlformats.org/drawingml/2006/main" prst="rect">
+            <a:avLst/>
+          </a:prstGeom>
+          <a:noFill xmlns:a="http://schemas.openxmlformats.org/drawingml/2006/main"/>
+          <a:ln xmlns:a="http://schemas.openxmlformats.org/drawingml/2006/main" w="0">
+            <a:noFill/>
+          </a:ln>
+        </p:spPr>
+        <p:txBody>
+          <a:bodyPr xmlns:a="http://schemas.openxmlformats.org/drawingml/2006/main" anchor="ctr">
+            <a:normAutofit fontScale="93827"/>
+          </a:bodyPr>
+          <a:lstStyle xmlns:a="http://schemas.openxmlformats.org/drawingml/2006/main"/>
+          <a:p xmlns:a="http://schemas.openxmlformats.org/drawingml/2006/main">
+            <a:pPr>
+              <a:defRPr sz="2025" b="1">
+                <a:solidFill>
+                  <a:srgbClr val="00A6C8"/>
+                </a:solidFill>
+                <a:latin typeface="Arial"/>
+                <a:ea typeface="Arial"/>
+                <a:cs typeface="Arial"/>
+              </a:defRPr>
+            </a:pPr>
+            <a:r>
+              <a:rPr sz="2025" b="1">
+                <a:solidFill>
+                  <a:srgbClr val="00A6C8"/>
+                </a:solidFill>
+                <a:latin typeface="Arial"/>
+                <a:ea typeface="Arial"/>
+                <a:cs typeface="Arial"/>
+              </a:rPr>
+              <a:t>Comando repetido após a correção</a:t>
+            </a:r>
+          </a:p>
+        </p:txBody>
+      </p:sp>
+      <p:sp>
+        <p:nvSpPr>
+          <p:cNvPr id="7" name="">
+            <a:extLst xmlns:a="http://schemas.openxmlformats.org/drawingml/2006/main">
+              <a:ext uri="{FF2B5EF4-FFF2-40B4-BE49-F238E27FC236}">
+                <a16:creationId xmlns:a16="http://schemas.microsoft.com/office/drawing/2014/main" id="{19B0FB3C-912C-4741-BC28-F15E7D09C86C}"/>
+              </a:ext>
+            </a:extLst>
+          </p:cNvPr>
+          <p:cNvSpPr>
+            <a:spLocks xmlns:a="http://schemas.openxmlformats.org/drawingml/2006/main" noGrp="1"/>
+          </p:cNvSpPr>
+          <p:nvPr/>
+        </p:nvSpPr>
+        <p:spPr>
+          <a:xfrm xmlns:a="http://schemas.openxmlformats.org/drawingml/2006/main">
+            <a:off x="628650" y="2095500"/>
+            <a:ext cx="7143750" cy="2114550"/>
+          </a:xfrm>
+          <a:prstGeom xmlns:a="http://schemas.openxmlformats.org/drawingml/2006/main" prst="rect">
+            <a:avLst/>
+          </a:prstGeom>
+          <a:solidFill xmlns:a="http://schemas.openxmlformats.org/drawingml/2006/main">
+            <a:srgbClr val="F0F3F5"/>
+          </a:solidFill>
+          <a:ln xmlns:a="http://schemas.openxmlformats.org/drawingml/2006/main" w="9525">
+            <a:solidFill>
+              <a:srgbClr val="D4DEE5"/>
+            </a:solidFill>
+          </a:ln>
+        </p:spPr>
+      </p:sp>
       <p:sp>
         <p:nvSpPr>
           <p:cNvPr id="8" name="">
             <a:extLst xmlns:a="http://schemas.openxmlformats.org/drawingml/2006/main">
               <a:ext uri="{FF2B5EF4-FFF2-40B4-BE49-F238E27FC236}">
-                <a16:creationId xmlns:a16="http://schemas.microsoft.com/office/drawing/2014/main" id="{09634A6E-EAFD-4DC5-AC5C-69079E8DAF23}"/>
+                <a16:creationId xmlns:a16="http://schemas.microsoft.com/office/drawing/2014/main" id="{3D6A27BA-2358-4650-982E-9C8ADEE2EA68}"/>
+              </a:ext>
+            </a:extLst>
+          </p:cNvPr>
+          <p:cNvSpPr>
+            <a:spLocks xmlns:a="http://schemas.openxmlformats.org/drawingml/2006/main" noGrp="1"/>
+          </p:cNvSpPr>
+          <p:nvPr/>
+        </p:nvSpPr>
+        <p:spPr>
+          <a:xfrm xmlns:a="http://schemas.openxmlformats.org/drawingml/2006/main">
+            <a:off x="876300" y="2286000"/>
+            <a:ext cx="6667500" cy="1733550"/>
+          </a:xfrm>
+          <a:prstGeom xmlns:a="http://schemas.openxmlformats.org/drawingml/2006/main" prst="rect">
+            <a:avLst/>
+          </a:prstGeom>
+          <a:noFill xmlns:a="http://schemas.openxmlformats.org/drawingml/2006/main"/>
+          <a:ln xmlns:a="http://schemas.openxmlformats.org/drawingml/2006/main" w="0">
+            <a:noFill/>
+          </a:ln>
+        </p:spPr>
+        <p:txBody>
+          <a:bodyPr xmlns:a="http://schemas.openxmlformats.org/drawingml/2006/main" anchor="ctr">
+            <a:normAutofit fontScale="100000"/>
+          </a:bodyPr>
+          <a:lstStyle xmlns:a="http://schemas.openxmlformats.org/drawingml/2006/main"/>
+          <a:p xmlns:a="http://schemas.openxmlformats.org/drawingml/2006/main">
+            <a:pPr>
+              <a:defRPr sz="1650">
+                <a:solidFill>
+                  <a:srgbClr val="071A2F"/>
+                </a:solidFill>
+                <a:latin typeface="Consolas"/>
+                <a:ea typeface="Consolas"/>
+                <a:cs typeface="Consolas"/>
+              </a:defRPr>
+            </a:pPr>
+            <a:r>
+              <a:rPr sz="1650">
+                <a:solidFill>
+                  <a:srgbClr val="071A2F"/>
+                </a:solidFill>
+                <a:latin typeface="Consolas"/>
+                <a:ea typeface="Consolas"/>
+                <a:cs typeface="Consolas"/>
+              </a:rPr>
+              <a:t>docker compose --profile tools run --rm semgrep</a:t>
+            </a:r>
+          </a:p>
+          <a:p xmlns:a="http://schemas.openxmlformats.org/drawingml/2006/main">
+            <a:pPr>
+              <a:defRPr sz="1650">
+                <a:solidFill>
+                  <a:srgbClr val="071A2F"/>
+                </a:solidFill>
+                <a:latin typeface="Consolas"/>
+                <a:ea typeface="Consolas"/>
+                <a:cs typeface="Consolas"/>
+              </a:defRPr>
+            </a:pPr>
+            <a:r>
+              <a:rPr sz="1650">
+                <a:solidFill>
+                  <a:srgbClr val="071A2F"/>
+                </a:solidFill>
+                <a:latin typeface="Consolas"/>
+                <a:ea typeface="Consolas"/>
+                <a:cs typeface="Consolas"/>
+              </a:rPr>
+              <a:t>  semgrep scan --config auto --json</a:t>
+            </a:r>
+          </a:p>
+          <a:p xmlns:a="http://schemas.openxmlformats.org/drawingml/2006/main">
+            <a:pPr>
+              <a:defRPr sz="1650">
+                <a:solidFill>
+                  <a:srgbClr val="071A2F"/>
+                </a:solidFill>
+                <a:latin typeface="Consolas"/>
+                <a:ea typeface="Consolas"/>
+                <a:cs typeface="Consolas"/>
+              </a:defRPr>
+            </a:pPr>
+            <a:r>
+              <a:rPr sz="1650">
+                <a:solidFill>
+                  <a:srgbClr val="071A2F"/>
+                </a:solidFill>
+                <a:latin typeface="Consolas"/>
+                <a:ea typeface="Consolas"/>
+                <a:cs typeface="Consolas"/>
+              </a:rPr>
+              <a:t>  --output /workspace/reports/semgrep-green.json</a:t>
+            </a:r>
+          </a:p>
+          <a:p xmlns:a="http://schemas.openxmlformats.org/drawingml/2006/main">
+            <a:pPr>
+              <a:defRPr sz="1650">
+                <a:solidFill>
+                  <a:srgbClr val="071A2F"/>
+                </a:solidFill>
+                <a:latin typeface="Consolas"/>
+                <a:ea typeface="Consolas"/>
+                <a:cs typeface="Consolas"/>
+              </a:defRPr>
+            </a:pPr>
+            <a:r>
+              <a:rPr sz="1650">
+                <a:solidFill>
+                  <a:srgbClr val="071A2F"/>
+                </a:solidFill>
+                <a:latin typeface="Consolas"/>
+                <a:ea typeface="Consolas"/>
+                <a:cs typeface="Consolas"/>
+              </a:rPr>
+              <a:t>  /workspace/target/juice-shop-fixed/routes/search.ts</a:t>
+            </a:r>
+          </a:p>
+        </p:txBody>
+      </p:sp>
+      <p:sp>
+        <p:nvSpPr>
+          <p:cNvPr id="9" name="">
+            <a:extLst xmlns:a="http://schemas.openxmlformats.org/drawingml/2006/main">
+              <a:ext uri="{FF2B5EF4-FFF2-40B4-BE49-F238E27FC236}">
+                <a16:creationId xmlns:a16="http://schemas.microsoft.com/office/drawing/2014/main" id="{54CB3E09-401D-47B6-B451-541CE246BB0A}"/>
+              </a:ext>
+            </a:extLst>
+          </p:cNvPr>
+          <p:cNvSpPr>
+            <a:spLocks xmlns:a="http://schemas.openxmlformats.org/drawingml/2006/main" noGrp="1"/>
+          </p:cNvSpPr>
+          <p:nvPr/>
+        </p:nvSpPr>
+        <p:spPr>
+          <a:xfrm xmlns:a="http://schemas.openxmlformats.org/drawingml/2006/main">
+            <a:off x="666750" y="4591050"/>
+            <a:ext cx="6762750" cy="342900"/>
+          </a:xfrm>
+          <a:prstGeom xmlns:a="http://schemas.openxmlformats.org/drawingml/2006/main" prst="rect">
+            <a:avLst/>
+          </a:prstGeom>
+          <a:noFill xmlns:a="http://schemas.openxmlformats.org/drawingml/2006/main"/>
+          <a:ln xmlns:a="http://schemas.openxmlformats.org/drawingml/2006/main" w="0">
+            <a:noFill/>
+          </a:ln>
+        </p:spPr>
+        <p:txBody>
+          <a:bodyPr xmlns:a="http://schemas.openxmlformats.org/drawingml/2006/main" anchor="ctr">
+            <a:normAutofit fontScale="100000"/>
+          </a:bodyPr>
+          <a:lstStyle xmlns:a="http://schemas.openxmlformats.org/drawingml/2006/main"/>
+          <a:p xmlns:a="http://schemas.openxmlformats.org/drawingml/2006/main">
+            <a:pPr>
+              <a:defRPr sz="1650" b="1">
+                <a:solidFill>
+                  <a:srgbClr val="637383"/>
+                </a:solidFill>
+                <a:latin typeface="Arial"/>
+                <a:ea typeface="Arial"/>
+                <a:cs typeface="Arial"/>
+              </a:defRPr>
+            </a:pPr>
+            <a:r>
+              <a:rPr sz="1650" b="1">
+                <a:solidFill>
+                  <a:srgbClr val="637383"/>
+                </a:solidFill>
+                <a:latin typeface="Arial"/>
+                <a:ea typeface="Arial"/>
+                <a:cs typeface="Arial"/>
+              </a:rPr>
+              <a:t>Apenas o arquivo mudou</a:t>
+            </a:r>
+          </a:p>
+        </p:txBody>
+      </p:sp>
+      <p:sp>
+        <p:nvSpPr>
+          <p:cNvPr id="10" name="">
+            <a:extLst xmlns:a="http://schemas.openxmlformats.org/drawingml/2006/main">
+              <a:ext uri="{FF2B5EF4-FFF2-40B4-BE49-F238E27FC236}">
+                <a16:creationId xmlns:a16="http://schemas.microsoft.com/office/drawing/2014/main" id="{F173B6DC-78F4-4EA5-BE2E-A8011D427F75}"/>
+              </a:ext>
+            </a:extLst>
+          </p:cNvPr>
+          <p:cNvSpPr>
+            <a:spLocks xmlns:a="http://schemas.openxmlformats.org/drawingml/2006/main" noGrp="1"/>
+          </p:cNvSpPr>
+          <p:nvPr/>
+        </p:nvSpPr>
+        <p:spPr>
+          <a:xfrm xmlns:a="http://schemas.openxmlformats.org/drawingml/2006/main">
+            <a:off x="666750" y="5048250"/>
+            <a:ext cx="6762750" cy="514350"/>
+          </a:xfrm>
+          <a:prstGeom xmlns:a="http://schemas.openxmlformats.org/drawingml/2006/main" prst="rect">
+            <a:avLst/>
+          </a:prstGeom>
+          <a:noFill xmlns:a="http://schemas.openxmlformats.org/drawingml/2006/main"/>
+          <a:ln xmlns:a="http://schemas.openxmlformats.org/drawingml/2006/main" w="0">
+            <a:noFill/>
+          </a:ln>
+        </p:spPr>
+        <p:txBody>
+          <a:bodyPr xmlns:a="http://schemas.openxmlformats.org/drawingml/2006/main" anchor="ctr">
+            <a:normAutofit fontScale="99740"/>
+          </a:bodyPr>
+          <a:lstStyle xmlns:a="http://schemas.openxmlformats.org/drawingml/2006/main"/>
+          <a:p xmlns:a="http://schemas.openxmlformats.org/drawingml/2006/main">
+            <a:pPr>
+              <a:defRPr sz="2175" b="1">
+                <a:solidFill>
+                  <a:srgbClr val="071A2F"/>
+                </a:solidFill>
+                <a:latin typeface="Arial"/>
+                <a:ea typeface="Arial"/>
+                <a:cs typeface="Arial"/>
+              </a:defRPr>
+            </a:pPr>
+            <a:r>
+              <a:rPr sz="2175" b="1">
+                <a:solidFill>
+                  <a:srgbClr val="071A2F"/>
+                </a:solidFill>
+                <a:latin typeface="Arial"/>
+                <a:ea typeface="Arial"/>
+                <a:cs typeface="Arial"/>
+              </a:rPr>
+              <a:t>Mesma versão do Semgrep e mesmo --config auto</a:t>
+            </a:r>
+          </a:p>
+        </p:txBody>
+      </p:sp>
+      <p:sp>
+        <p:nvSpPr>
+          <p:cNvPr id="11" name="">
+            <a:extLst xmlns:a="http://schemas.openxmlformats.org/drawingml/2006/main">
+              <a:ext uri="{FF2B5EF4-FFF2-40B4-BE49-F238E27FC236}">
+                <a16:creationId xmlns:a16="http://schemas.microsoft.com/office/drawing/2014/main" id="{0197A3CF-C88A-43C4-87A2-24462EDFA1B0}"/>
               </a:ext>
             </a:extLst>
           </p:cNvPr>
@@ -4768,10 +5018,10 @@
       </p:sp>
       <p:sp>
         <p:nvSpPr>
-          <p:cNvPr id="9" name="">
-            <a:extLst xmlns:a="http://schemas.openxmlformats.org/drawingml/2006/main">
-              <a:ext uri="{FF2B5EF4-FFF2-40B4-BE49-F238E27FC236}">
-                <a16:creationId xmlns:a16="http://schemas.microsoft.com/office/drawing/2014/main" id="{1A4C728E-50B1-4615-8BDE-09834AAFA39E}"/>
+          <p:cNvPr id="12" name="">
+            <a:extLst xmlns:a="http://schemas.openxmlformats.org/drawingml/2006/main">
+              <a:ext uri="{FF2B5EF4-FFF2-40B4-BE49-F238E27FC236}">
+                <a16:creationId xmlns:a16="http://schemas.microsoft.com/office/drawing/2014/main" id="{651BE7D0-F1C5-45D1-8EB2-E4D3506B5C29}"/>
               </a:ext>
             </a:extLst>
           </p:cNvPr>
@@ -4825,10 +5075,10 @@
       </p:sp>
       <p:sp>
         <p:nvSpPr>
-          <p:cNvPr id="10" name="">
-            <a:extLst xmlns:a="http://schemas.openxmlformats.org/drawingml/2006/main">
-              <a:ext uri="{FF2B5EF4-FFF2-40B4-BE49-F238E27FC236}">
-                <a16:creationId xmlns:a16="http://schemas.microsoft.com/office/drawing/2014/main" id="{5AAC13CE-6F4F-4E01-8646-C3659063CA96}"/>
+          <p:cNvPr id="13" name="">
+            <a:extLst xmlns:a="http://schemas.openxmlformats.org/drawingml/2006/main">
+              <a:ext uri="{FF2B5EF4-FFF2-40B4-BE49-F238E27FC236}">
+                <a16:creationId xmlns:a16="http://schemas.microsoft.com/office/drawing/2014/main" id="{48AEB9EB-019E-463C-A938-3025F2F81E1E}"/>
               </a:ext>
             </a:extLst>
           </p:cNvPr>
@@ -4882,10 +5132,10 @@
       </p:sp>
       <p:sp>
         <p:nvSpPr>
-          <p:cNvPr id="11" name="">
-            <a:extLst xmlns:a="http://schemas.openxmlformats.org/drawingml/2006/main">
-              <a:ext uri="{FF2B5EF4-FFF2-40B4-BE49-F238E27FC236}">
-                <a16:creationId xmlns:a16="http://schemas.microsoft.com/office/drawing/2014/main" id="{38FCA96B-39D8-4C9A-8F7F-A7A96723F526}"/>
+          <p:cNvPr id="14" name="">
+            <a:extLst xmlns:a="http://schemas.openxmlformats.org/drawingml/2006/main">
+              <a:ext uri="{FF2B5EF4-FFF2-40B4-BE49-F238E27FC236}">
+                <a16:creationId xmlns:a16="http://schemas.microsoft.com/office/drawing/2014/main" id="{11018B68-54C4-4CA1-86C2-39BAC8DDD417}"/>
               </a:ext>
             </a:extLst>
           </p:cNvPr>
@@ -4940,7 +5190,7 @@
     </p:spTree>
     <p:extLst>
       <p:ext uri="{BB962C8B-B14F-4D97-AF65-F5344CB8AC3E}">
-        <p14:creationId xmlns:p14="http://schemas.microsoft.com/office/powerpoint/2010/main" val="1116133353"/>
+        <p14:creationId xmlns:p14="http://schemas.microsoft.com/office/powerpoint/2010/main" val="2073984679"/>
       </p:ext>
     </p:extLst>
   </p:cSld>
@@ -4971,7 +5221,7 @@
           <p:cNvPr id="12" name="">
             <a:extLst xmlns:a="http://schemas.openxmlformats.org/drawingml/2006/main">
               <a:ext uri="{FF2B5EF4-FFF2-40B4-BE49-F238E27FC236}">
-                <a16:creationId xmlns:a16="http://schemas.microsoft.com/office/drawing/2014/main" id="{2C1297C6-3C16-47CB-90C7-D0D7EED7A7BF}"/>
+                <a16:creationId xmlns:a16="http://schemas.microsoft.com/office/drawing/2014/main" id="{DBC41377-59E5-47DA-BF4F-52845068C748}"/>
               </a:ext>
             </a:extLst>
           </p:cNvPr>
@@ -5003,7 +5253,7 @@
           <p:cNvPr id="2" name="">
             <a:extLst xmlns:a="http://schemas.openxmlformats.org/drawingml/2006/main">
               <a:ext uri="{FF2B5EF4-FFF2-40B4-BE49-F238E27FC236}">
-                <a16:creationId xmlns:a16="http://schemas.microsoft.com/office/drawing/2014/main" id="{A5437DBD-F8A0-4973-82F0-003C13605DDF}"/>
+                <a16:creationId xmlns:a16="http://schemas.microsoft.com/office/drawing/2014/main" id="{593B936E-235D-4A0B-B671-CF5F9C4D5227}"/>
               </a:ext>
             </a:extLst>
           </p:cNvPr>
@@ -5060,7 +5310,7 @@
           <p:cNvPr id="3" name="">
             <a:extLst xmlns:a="http://schemas.openxmlformats.org/drawingml/2006/main">
               <a:ext uri="{FF2B5EF4-FFF2-40B4-BE49-F238E27FC236}">
-                <a16:creationId xmlns:a16="http://schemas.microsoft.com/office/drawing/2014/main" id="{72CD256A-D603-442D-BC35-D3BDFA099D97}"/>
+                <a16:creationId xmlns:a16="http://schemas.microsoft.com/office/drawing/2014/main" id="{0A370237-811A-4A1F-8DD5-0C11DD2E7749}"/>
               </a:ext>
             </a:extLst>
           </p:cNvPr>
@@ -5117,7 +5367,7 @@
           <p:cNvPr id="4" name="">
             <a:extLst xmlns:a="http://schemas.openxmlformats.org/drawingml/2006/main">
               <a:ext uri="{FF2B5EF4-FFF2-40B4-BE49-F238E27FC236}">
-                <a16:creationId xmlns:a16="http://schemas.microsoft.com/office/drawing/2014/main" id="{5DADBE54-054E-461C-AD6C-B33F3F0389EE}"/>
+                <a16:creationId xmlns:a16="http://schemas.microsoft.com/office/drawing/2014/main" id="{0E286A04-C9BD-44D9-99EE-F05249937B35}"/>
               </a:ext>
             </a:extLst>
           </p:cNvPr>
@@ -5174,7 +5424,7 @@
           <p:cNvPr id="5" name="">
             <a:extLst xmlns:a="http://schemas.openxmlformats.org/drawingml/2006/main">
               <a:ext uri="{FF2B5EF4-FFF2-40B4-BE49-F238E27FC236}">
-                <a16:creationId xmlns:a16="http://schemas.microsoft.com/office/drawing/2014/main" id="{03CC358F-6694-41AF-A083-FBBABC164AE7}"/>
+                <a16:creationId xmlns:a16="http://schemas.microsoft.com/office/drawing/2014/main" id="{6C90C37C-C3D1-4E87-9A29-0C04C858EA06}"/>
               </a:ext>
             </a:extLst>
           </p:cNvPr>
@@ -5231,7 +5481,7 @@
           <p:cNvPr id="6" name="">
             <a:extLst xmlns:a="http://schemas.openxmlformats.org/drawingml/2006/main">
               <a:ext uri="{FF2B5EF4-FFF2-40B4-BE49-F238E27FC236}">
-                <a16:creationId xmlns:a16="http://schemas.microsoft.com/office/drawing/2014/main" id="{E1040A36-1250-4BA4-9F8A-8D7AE8C8E7BD}"/>
+                <a16:creationId xmlns:a16="http://schemas.microsoft.com/office/drawing/2014/main" id="{34BFB2FA-27E6-48EF-BEA8-234FA65A8F1D}"/>
               </a:ext>
             </a:extLst>
           </p:cNvPr>
@@ -5288,7 +5538,7 @@
           <p:cNvPr id="7" name="">
             <a:extLst xmlns:a="http://schemas.openxmlformats.org/drawingml/2006/main">
               <a:ext uri="{FF2B5EF4-FFF2-40B4-BE49-F238E27FC236}">
-                <a16:creationId xmlns:a16="http://schemas.microsoft.com/office/drawing/2014/main" id="{C89B2FFF-70E1-45D8-AA92-D69212F3F3D5}"/>
+                <a16:creationId xmlns:a16="http://schemas.microsoft.com/office/drawing/2014/main" id="{D2DDF602-D7BB-45A6-8138-8B65B3308E8C}"/>
               </a:ext>
             </a:extLst>
           </p:cNvPr>
@@ -5403,7 +5653,7 @@
           <p:cNvPr id="8" name="">
             <a:extLst xmlns:a="http://schemas.openxmlformats.org/drawingml/2006/main">
               <a:ext uri="{FF2B5EF4-FFF2-40B4-BE49-F238E27FC236}">
-                <a16:creationId xmlns:a16="http://schemas.microsoft.com/office/drawing/2014/main" id="{AB1180F0-E165-4E6E-BDA9-119F00E665D9}"/>
+                <a16:creationId xmlns:a16="http://schemas.microsoft.com/office/drawing/2014/main" id="{87BE78EB-B726-4E39-99A3-D52CB1345C0A}"/>
               </a:ext>
             </a:extLst>
           </p:cNvPr>
@@ -5460,7 +5710,7 @@
           <p:cNvPr id="9" name="">
             <a:extLst xmlns:a="http://schemas.openxmlformats.org/drawingml/2006/main">
               <a:ext uri="{FF2B5EF4-FFF2-40B4-BE49-F238E27FC236}">
-                <a16:creationId xmlns:a16="http://schemas.microsoft.com/office/drawing/2014/main" id="{DDF1182E-1F83-407D-8EBB-B2130E3D05E6}"/>
+                <a16:creationId xmlns:a16="http://schemas.microsoft.com/office/drawing/2014/main" id="{658D16F6-005F-41D1-AB23-C0F561EECCD5}"/>
               </a:ext>
             </a:extLst>
           </p:cNvPr>
@@ -5602,7 +5852,7 @@
           <p:cNvPr id="10" name="">
             <a:extLst xmlns:a="http://schemas.openxmlformats.org/drawingml/2006/main">
               <a:ext uri="{FF2B5EF4-FFF2-40B4-BE49-F238E27FC236}">
-                <a16:creationId xmlns:a16="http://schemas.microsoft.com/office/drawing/2014/main" id="{CD1E4569-7FE0-43B6-A4B2-59FC05F80DE8}"/>
+                <a16:creationId xmlns:a16="http://schemas.microsoft.com/office/drawing/2014/main" id="{181217CB-3DD7-477C-8642-2BE22CCECF09}"/>
               </a:ext>
             </a:extLst>
           </p:cNvPr>
@@ -5634,7 +5884,7 @@
           <p:cNvPr id="11" name="">
             <a:extLst xmlns:a="http://schemas.openxmlformats.org/drawingml/2006/main">
               <a:ext uri="{FF2B5EF4-FFF2-40B4-BE49-F238E27FC236}">
-                <a16:creationId xmlns:a16="http://schemas.microsoft.com/office/drawing/2014/main" id="{9B42C816-552B-493D-A234-4A4F6DEB28B0}"/>
+                <a16:creationId xmlns:a16="http://schemas.microsoft.com/office/drawing/2014/main" id="{EDF1C1F3-2B0F-4C94-A4E9-2498A0FF753E}"/>
               </a:ext>
             </a:extLst>
           </p:cNvPr>
@@ -5689,7 +5939,7 @@
     </p:spTree>
     <p:extLst>
       <p:ext uri="{BB962C8B-B14F-4D97-AF65-F5344CB8AC3E}">
-        <p14:creationId xmlns:p14="http://schemas.microsoft.com/office/powerpoint/2010/main" val="218557639"/>
+        <p14:creationId xmlns:p14="http://schemas.microsoft.com/office/powerpoint/2010/main" val="1912841923"/>
       </p:ext>
     </p:extLst>
   </p:cSld>
@@ -5720,7 +5970,7 @@
           <p:cNvPr id="15" name="">
             <a:extLst xmlns:a="http://schemas.openxmlformats.org/drawingml/2006/main">
               <a:ext uri="{FF2B5EF4-FFF2-40B4-BE49-F238E27FC236}">
-                <a16:creationId xmlns:a16="http://schemas.microsoft.com/office/drawing/2014/main" id="{39B05CC9-E397-4C62-89D1-2A5233540005}"/>
+                <a16:creationId xmlns:a16="http://schemas.microsoft.com/office/drawing/2014/main" id="{57D96A65-CD6E-4782-A1C9-D0A02412E63D}"/>
               </a:ext>
             </a:extLst>
           </p:cNvPr>
@@ -5752,7 +6002,7 @@
           <p:cNvPr id="2" name="">
             <a:extLst xmlns:a="http://schemas.openxmlformats.org/drawingml/2006/main">
               <a:ext uri="{FF2B5EF4-FFF2-40B4-BE49-F238E27FC236}">
-                <a16:creationId xmlns:a16="http://schemas.microsoft.com/office/drawing/2014/main" id="{7B4F5E59-832F-47C9-90DF-46ACFCDD902B}"/>
+                <a16:creationId xmlns:a16="http://schemas.microsoft.com/office/drawing/2014/main" id="{BDB1ED0C-949D-41EB-BF25-9BEF19064B78}"/>
               </a:ext>
             </a:extLst>
           </p:cNvPr>
@@ -5809,7 +6059,7 @@
           <p:cNvPr id="3" name="">
             <a:extLst xmlns:a="http://schemas.openxmlformats.org/drawingml/2006/main">
               <a:ext uri="{FF2B5EF4-FFF2-40B4-BE49-F238E27FC236}">
-                <a16:creationId xmlns:a16="http://schemas.microsoft.com/office/drawing/2014/main" id="{31673337-6D21-4668-84B4-4BA07E4F74CA}"/>
+                <a16:creationId xmlns:a16="http://schemas.microsoft.com/office/drawing/2014/main" id="{02A1AA46-B2A5-4244-BAB3-AA722ED6DCAB}"/>
               </a:ext>
             </a:extLst>
           </p:cNvPr>
@@ -5866,7 +6116,7 @@
           <p:cNvPr id="4" name="">
             <a:extLst xmlns:a="http://schemas.openxmlformats.org/drawingml/2006/main">
               <a:ext uri="{FF2B5EF4-FFF2-40B4-BE49-F238E27FC236}">
-                <a16:creationId xmlns:a16="http://schemas.microsoft.com/office/drawing/2014/main" id="{688E8EB4-C695-4243-935A-72C1592CD084}"/>
+                <a16:creationId xmlns:a16="http://schemas.microsoft.com/office/drawing/2014/main" id="{E02AB512-2EC7-4CC6-B514-22D78A34C6BC}"/>
               </a:ext>
             </a:extLst>
           </p:cNvPr>
@@ -5923,7 +6173,7 @@
           <p:cNvPr id="5" name="">
             <a:extLst xmlns:a="http://schemas.openxmlformats.org/drawingml/2006/main">
               <a:ext uri="{FF2B5EF4-FFF2-40B4-BE49-F238E27FC236}">
-                <a16:creationId xmlns:a16="http://schemas.microsoft.com/office/drawing/2014/main" id="{EACE3E50-D77A-4258-8401-B75D98EE674F}"/>
+                <a16:creationId xmlns:a16="http://schemas.microsoft.com/office/drawing/2014/main" id="{85E713C0-5A6B-41F5-8111-4616DE6F4BF1}"/>
               </a:ext>
             </a:extLst>
           </p:cNvPr>
@@ -5980,7 +6230,7 @@
           <p:cNvPr id="6" name="">
             <a:extLst xmlns:a="http://schemas.openxmlformats.org/drawingml/2006/main">
               <a:ext uri="{FF2B5EF4-FFF2-40B4-BE49-F238E27FC236}">
-                <a16:creationId xmlns:a16="http://schemas.microsoft.com/office/drawing/2014/main" id="{136146E6-4E4D-408F-9724-5E4EB190A5E6}"/>
+                <a16:creationId xmlns:a16="http://schemas.microsoft.com/office/drawing/2014/main" id="{7CA88682-8AC3-4ACB-B15C-2A5F8E6B9593}"/>
               </a:ext>
             </a:extLst>
           </p:cNvPr>
@@ -6041,7 +6291,7 @@
           <p:nvPr/>
         </p:nvPicPr>
         <p:blipFill>
-          <a:blip xmlns:r="http://schemas.openxmlformats.org/officeDocument/2006/relationships" xmlns:a="http://schemas.openxmlformats.org/drawingml/2006/main" r:embed="R11f3e5c3068b49b9"/>
+          <a:blip xmlns:r="http://schemas.openxmlformats.org/officeDocument/2006/relationships" xmlns:a="http://schemas.openxmlformats.org/drawingml/2006/main" r:embed="Rbff77fe9cd20499b"/>
           <a:stretch xmlns:a="http://schemas.openxmlformats.org/drawingml/2006/main"/>
         </p:blipFill>
         <p:spPr>
@@ -6059,7 +6309,7 @@
           <p:cNvPr id="8" name="">
             <a:extLst xmlns:a="http://schemas.openxmlformats.org/drawingml/2006/main">
               <a:ext uri="{FF2B5EF4-FFF2-40B4-BE49-F238E27FC236}">
-                <a16:creationId xmlns:a16="http://schemas.microsoft.com/office/drawing/2014/main" id="{78356909-5493-4DBD-B2E7-4D8DE02DD6B3}"/>
+                <a16:creationId xmlns:a16="http://schemas.microsoft.com/office/drawing/2014/main" id="{1CC9B3B9-9343-47A7-97D2-AC593A0E32A6}"/>
               </a:ext>
             </a:extLst>
           </p:cNvPr>
@@ -6116,7 +6366,7 @@
           <p:cNvPr id="9" name="">
             <a:extLst xmlns:a="http://schemas.openxmlformats.org/drawingml/2006/main">
               <a:ext uri="{FF2B5EF4-FFF2-40B4-BE49-F238E27FC236}">
-                <a16:creationId xmlns:a16="http://schemas.microsoft.com/office/drawing/2014/main" id="{55A8AFBF-3BA6-4BD0-8A2D-A6A1BFD95F79}"/>
+                <a16:creationId xmlns:a16="http://schemas.microsoft.com/office/drawing/2014/main" id="{08B785D6-081D-495C-A704-CE60E4707281}"/>
               </a:ext>
             </a:extLst>
           </p:cNvPr>
@@ -6173,7 +6423,7 @@
           <p:cNvPr id="10" name="">
             <a:extLst xmlns:a="http://schemas.openxmlformats.org/drawingml/2006/main">
               <a:ext uri="{FF2B5EF4-FFF2-40B4-BE49-F238E27FC236}">
-                <a16:creationId xmlns:a16="http://schemas.microsoft.com/office/drawing/2014/main" id="{E1F50521-D03D-4CB5-A25F-E684142E7BAA}"/>
+                <a16:creationId xmlns:a16="http://schemas.microsoft.com/office/drawing/2014/main" id="{12B39641-DF4D-4592-9D1C-19074987BB3B}"/>
               </a:ext>
             </a:extLst>
           </p:cNvPr>
@@ -6230,7 +6480,7 @@
           <p:cNvPr id="11" name="">
             <a:extLst xmlns:a="http://schemas.openxmlformats.org/drawingml/2006/main">
               <a:ext uri="{FF2B5EF4-FFF2-40B4-BE49-F238E27FC236}">
-                <a16:creationId xmlns:a16="http://schemas.microsoft.com/office/drawing/2014/main" id="{29E3A42F-F672-47E6-999F-E9B59E576A2E}"/>
+                <a16:creationId xmlns:a16="http://schemas.microsoft.com/office/drawing/2014/main" id="{F5C7C241-56E4-410B-9724-EF98FBBCAB3F}"/>
               </a:ext>
             </a:extLst>
           </p:cNvPr>
@@ -6287,7 +6537,7 @@
           <p:cNvPr id="12" name="">
             <a:extLst xmlns:a="http://schemas.openxmlformats.org/drawingml/2006/main">
               <a:ext uri="{FF2B5EF4-FFF2-40B4-BE49-F238E27FC236}">
-                <a16:creationId xmlns:a16="http://schemas.microsoft.com/office/drawing/2014/main" id="{CE07378D-DCA4-419D-8B95-5F4B65A7ED30}"/>
+                <a16:creationId xmlns:a16="http://schemas.microsoft.com/office/drawing/2014/main" id="{18099B5D-51E2-4019-ADBD-739F3E5144DB}"/>
               </a:ext>
             </a:extLst>
           </p:cNvPr>
@@ -6344,7 +6594,7 @@
           <p:cNvPr id="13" name="">
             <a:extLst xmlns:a="http://schemas.openxmlformats.org/drawingml/2006/main">
               <a:ext uri="{FF2B5EF4-FFF2-40B4-BE49-F238E27FC236}">
-                <a16:creationId xmlns:a16="http://schemas.microsoft.com/office/drawing/2014/main" id="{69B00584-1D99-4068-9CD8-469FB0A3B250}"/>
+                <a16:creationId xmlns:a16="http://schemas.microsoft.com/office/drawing/2014/main" id="{66658E6D-F12F-48F0-9AE0-C7D66548B57D}"/>
               </a:ext>
             </a:extLst>
           </p:cNvPr>
@@ -6401,7 +6651,7 @@
           <p:cNvPr id="14" name="">
             <a:extLst xmlns:a="http://schemas.openxmlformats.org/drawingml/2006/main">
               <a:ext uri="{FF2B5EF4-FFF2-40B4-BE49-F238E27FC236}">
-                <a16:creationId xmlns:a16="http://schemas.microsoft.com/office/drawing/2014/main" id="{AA7F04DF-CBC2-4F90-A13E-CDF462F8FC86}"/>
+                <a16:creationId xmlns:a16="http://schemas.microsoft.com/office/drawing/2014/main" id="{B22925C2-4556-4508-827E-A68898613CCD}"/>
               </a:ext>
             </a:extLst>
           </p:cNvPr>
@@ -6456,7 +6706,7 @@
     </p:spTree>
     <p:extLst>
       <p:ext uri="{BB962C8B-B14F-4D97-AF65-F5344CB8AC3E}">
-        <p14:creationId xmlns:p14="http://schemas.microsoft.com/office/powerpoint/2010/main" val="1235442699"/>
+        <p14:creationId xmlns:p14="http://schemas.microsoft.com/office/powerpoint/2010/main" val="609051483"/>
       </p:ext>
     </p:extLst>
   </p:cSld>
@@ -6487,7 +6737,7 @@
           <p:cNvPr id="12" name="">
             <a:extLst xmlns:a="http://schemas.openxmlformats.org/drawingml/2006/main">
               <a:ext uri="{FF2B5EF4-FFF2-40B4-BE49-F238E27FC236}">
-                <a16:creationId xmlns:a16="http://schemas.microsoft.com/office/drawing/2014/main" id="{9828CB32-3E43-4533-B634-CDFECF90A18A}"/>
+                <a16:creationId xmlns:a16="http://schemas.microsoft.com/office/drawing/2014/main" id="{89A36D61-A90C-4F68-BA08-4502D11B5F52}"/>
               </a:ext>
             </a:extLst>
           </p:cNvPr>
@@ -6519,7 +6769,7 @@
           <p:cNvPr id="2" name="">
             <a:extLst xmlns:a="http://schemas.openxmlformats.org/drawingml/2006/main">
               <a:ext uri="{FF2B5EF4-FFF2-40B4-BE49-F238E27FC236}">
-                <a16:creationId xmlns:a16="http://schemas.microsoft.com/office/drawing/2014/main" id="{41A7EE49-0DC8-4E12-BF87-F4BDBB663F0E}"/>
+                <a16:creationId xmlns:a16="http://schemas.microsoft.com/office/drawing/2014/main" id="{F4179793-C16E-4D8F-8575-3D7FA75EF91C}"/>
               </a:ext>
             </a:extLst>
           </p:cNvPr>
@@ -6576,7 +6826,7 @@
           <p:cNvPr id="3" name="">
             <a:extLst xmlns:a="http://schemas.openxmlformats.org/drawingml/2006/main">
               <a:ext uri="{FF2B5EF4-FFF2-40B4-BE49-F238E27FC236}">
-                <a16:creationId xmlns:a16="http://schemas.microsoft.com/office/drawing/2014/main" id="{0FEF9FEA-F8F9-4D8F-BDEB-E278338C292E}"/>
+                <a16:creationId xmlns:a16="http://schemas.microsoft.com/office/drawing/2014/main" id="{89C78660-E2A4-4A81-A873-FE27E8FFD08C}"/>
               </a:ext>
             </a:extLst>
           </p:cNvPr>
@@ -6633,7 +6883,7 @@
           <p:cNvPr id="4" name="">
             <a:extLst xmlns:a="http://schemas.openxmlformats.org/drawingml/2006/main">
               <a:ext uri="{FF2B5EF4-FFF2-40B4-BE49-F238E27FC236}">
-                <a16:creationId xmlns:a16="http://schemas.microsoft.com/office/drawing/2014/main" id="{38CA42C9-50AA-4F93-8324-356242820BCE}"/>
+                <a16:creationId xmlns:a16="http://schemas.microsoft.com/office/drawing/2014/main" id="{8230A035-24E8-4FB6-A57F-043547183CA0}"/>
               </a:ext>
             </a:extLst>
           </p:cNvPr>
@@ -6690,7 +6940,7 @@
           <p:cNvPr id="5" name="">
             <a:extLst xmlns:a="http://schemas.openxmlformats.org/drawingml/2006/main">
               <a:ext uri="{FF2B5EF4-FFF2-40B4-BE49-F238E27FC236}">
-                <a16:creationId xmlns:a16="http://schemas.microsoft.com/office/drawing/2014/main" id="{C80CAF44-D72A-4677-A990-2085103816BD}"/>
+                <a16:creationId xmlns:a16="http://schemas.microsoft.com/office/drawing/2014/main" id="{79A72D39-4F53-47B8-9F3A-F85BCAEB5CD3}"/>
               </a:ext>
             </a:extLst>
           </p:cNvPr>
@@ -6747,7 +6997,7 @@
           <p:cNvPr id="6" name="">
             <a:extLst xmlns:a="http://schemas.openxmlformats.org/drawingml/2006/main">
               <a:ext uri="{FF2B5EF4-FFF2-40B4-BE49-F238E27FC236}">
-                <a16:creationId xmlns:a16="http://schemas.microsoft.com/office/drawing/2014/main" id="{757C3264-D5C6-491F-95A3-3C58CF6358FF}"/>
+                <a16:creationId xmlns:a16="http://schemas.microsoft.com/office/drawing/2014/main" id="{6241BB80-12B0-46EF-A86E-8121307861A1}"/>
               </a:ext>
             </a:extLst>
           </p:cNvPr>
@@ -6804,7 +7054,7 @@
           <p:cNvPr id="7" name="">
             <a:extLst xmlns:a="http://schemas.openxmlformats.org/drawingml/2006/main">
               <a:ext uri="{FF2B5EF4-FFF2-40B4-BE49-F238E27FC236}">
-                <a16:creationId xmlns:a16="http://schemas.microsoft.com/office/drawing/2014/main" id="{02178632-B7E4-4DA3-A6FA-377E762760B1}"/>
+                <a16:creationId xmlns:a16="http://schemas.microsoft.com/office/drawing/2014/main" id="{7741329A-30F3-4374-8570-436F02BA7E88}"/>
               </a:ext>
             </a:extLst>
           </p:cNvPr>
@@ -6919,7 +7169,7 @@
           <p:cNvPr id="8" name="">
             <a:extLst xmlns:a="http://schemas.openxmlformats.org/drawingml/2006/main">
               <a:ext uri="{FF2B5EF4-FFF2-40B4-BE49-F238E27FC236}">
-                <a16:creationId xmlns:a16="http://schemas.microsoft.com/office/drawing/2014/main" id="{87977C96-1CAD-4381-AC21-0743EFAF8FC4}"/>
+                <a16:creationId xmlns:a16="http://schemas.microsoft.com/office/drawing/2014/main" id="{252D0FC6-012F-4D3C-85D4-CFBECA91EA68}"/>
               </a:ext>
             </a:extLst>
           </p:cNvPr>
@@ -6976,7 +7226,7 @@
           <p:cNvPr id="9" name="">
             <a:extLst xmlns:a="http://schemas.openxmlformats.org/drawingml/2006/main">
               <a:ext uri="{FF2B5EF4-FFF2-40B4-BE49-F238E27FC236}">
-                <a16:creationId xmlns:a16="http://schemas.microsoft.com/office/drawing/2014/main" id="{09900867-160D-4CF5-A0EB-B79736EA6421}"/>
+                <a16:creationId xmlns:a16="http://schemas.microsoft.com/office/drawing/2014/main" id="{0092A143-5EF2-4D23-B924-AEBCAF0C2352}"/>
               </a:ext>
             </a:extLst>
           </p:cNvPr>
@@ -7118,7 +7368,7 @@
           <p:cNvPr id="10" name="">
             <a:extLst xmlns:a="http://schemas.openxmlformats.org/drawingml/2006/main">
               <a:ext uri="{FF2B5EF4-FFF2-40B4-BE49-F238E27FC236}">
-                <a16:creationId xmlns:a16="http://schemas.microsoft.com/office/drawing/2014/main" id="{AE4D348F-67D6-4D46-8433-3963407F1B34}"/>
+                <a16:creationId xmlns:a16="http://schemas.microsoft.com/office/drawing/2014/main" id="{10AFBE95-E188-4549-8EA3-849A07E2A464}"/>
               </a:ext>
             </a:extLst>
           </p:cNvPr>
@@ -7150,7 +7400,7 @@
           <p:cNvPr id="11" name="">
             <a:extLst xmlns:a="http://schemas.openxmlformats.org/drawingml/2006/main">
               <a:ext uri="{FF2B5EF4-FFF2-40B4-BE49-F238E27FC236}">
-                <a16:creationId xmlns:a16="http://schemas.microsoft.com/office/drawing/2014/main" id="{EF413EC1-7D21-4AE7-8BFB-0221298DCADE}"/>
+                <a16:creationId xmlns:a16="http://schemas.microsoft.com/office/drawing/2014/main" id="{D1FB3FF6-0E8B-4418-AD76-F53356FC9502}"/>
               </a:ext>
             </a:extLst>
           </p:cNvPr>
@@ -7205,7 +7455,7 @@
     </p:spTree>
     <p:extLst>
       <p:ext uri="{BB962C8B-B14F-4D97-AF65-F5344CB8AC3E}">
-        <p14:creationId xmlns:p14="http://schemas.microsoft.com/office/powerpoint/2010/main" val="763136979"/>
+        <p14:creationId xmlns:p14="http://schemas.microsoft.com/office/powerpoint/2010/main" val="86457510"/>
       </p:ext>
     </p:extLst>
   </p:cSld>
@@ -7236,7 +7486,7 @@
           <p:cNvPr id="11" name="">
             <a:extLst xmlns:a="http://schemas.openxmlformats.org/drawingml/2006/main">
               <a:ext uri="{FF2B5EF4-FFF2-40B4-BE49-F238E27FC236}">
-                <a16:creationId xmlns:a16="http://schemas.microsoft.com/office/drawing/2014/main" id="{339EFDA0-8C11-4241-A67E-A14A7501EA02}"/>
+                <a16:creationId xmlns:a16="http://schemas.microsoft.com/office/drawing/2014/main" id="{0A6DE246-6A80-4FBA-B39A-DE0543915376}"/>
               </a:ext>
             </a:extLst>
           </p:cNvPr>
@@ -7268,7 +7518,7 @@
           <p:cNvPr id="2" name="">
             <a:extLst xmlns:a="http://schemas.openxmlformats.org/drawingml/2006/main">
               <a:ext uri="{FF2B5EF4-FFF2-40B4-BE49-F238E27FC236}">
-                <a16:creationId xmlns:a16="http://schemas.microsoft.com/office/drawing/2014/main" id="{5D63B8BC-4E0D-417E-8D4C-FF3780B60B12}"/>
+                <a16:creationId xmlns:a16="http://schemas.microsoft.com/office/drawing/2014/main" id="{68D42F84-5781-4C64-8C4E-A8B1F70021EB}"/>
               </a:ext>
             </a:extLst>
           </p:cNvPr>
@@ -7325,7 +7575,7 @@
           <p:cNvPr id="3" name="">
             <a:extLst xmlns:a="http://schemas.openxmlformats.org/drawingml/2006/main">
               <a:ext uri="{FF2B5EF4-FFF2-40B4-BE49-F238E27FC236}">
-                <a16:creationId xmlns:a16="http://schemas.microsoft.com/office/drawing/2014/main" id="{BF09499A-6EAE-42BD-A2FA-87B7061A0806}"/>
+                <a16:creationId xmlns:a16="http://schemas.microsoft.com/office/drawing/2014/main" id="{FDE27BC9-5D5B-4762-8E6A-90CEC560DB2B}"/>
               </a:ext>
             </a:extLst>
           </p:cNvPr>
@@ -7382,7 +7632,7 @@
           <p:cNvPr id="4" name="">
             <a:extLst xmlns:a="http://schemas.openxmlformats.org/drawingml/2006/main">
               <a:ext uri="{FF2B5EF4-FFF2-40B4-BE49-F238E27FC236}">
-                <a16:creationId xmlns:a16="http://schemas.microsoft.com/office/drawing/2014/main" id="{4B4F65DB-854C-4392-802E-03D05738824C}"/>
+                <a16:creationId xmlns:a16="http://schemas.microsoft.com/office/drawing/2014/main" id="{764DD9F6-C0F3-453D-AE24-2C3EA32100E5}"/>
               </a:ext>
             </a:extLst>
           </p:cNvPr>
@@ -7439,7 +7689,7 @@
           <p:cNvPr id="5" name="">
             <a:extLst xmlns:a="http://schemas.openxmlformats.org/drawingml/2006/main">
               <a:ext uri="{FF2B5EF4-FFF2-40B4-BE49-F238E27FC236}">
-                <a16:creationId xmlns:a16="http://schemas.microsoft.com/office/drawing/2014/main" id="{B6C8ACE4-1F78-47FF-8DDD-8CD130D42DD6}"/>
+                <a16:creationId xmlns:a16="http://schemas.microsoft.com/office/drawing/2014/main" id="{09025C55-E033-4AD1-9DDC-FDF83ED7D4BD}"/>
               </a:ext>
             </a:extLst>
           </p:cNvPr>
@@ -7496,7 +7746,7 @@
           <p:cNvPr id="6" name="">
             <a:extLst xmlns:a="http://schemas.openxmlformats.org/drawingml/2006/main">
               <a:ext uri="{FF2B5EF4-FFF2-40B4-BE49-F238E27FC236}">
-                <a16:creationId xmlns:a16="http://schemas.microsoft.com/office/drawing/2014/main" id="{B2ED5A0D-8DD1-482B-9325-B59952460EFB}"/>
+                <a16:creationId xmlns:a16="http://schemas.microsoft.com/office/drawing/2014/main" id="{4CFD4FFD-BACD-40F0-922E-7A7F2F029ED5}"/>
               </a:ext>
             </a:extLst>
           </p:cNvPr>
@@ -7557,7 +7807,7 @@
           <p:nvPr/>
         </p:nvPicPr>
         <p:blipFill>
-          <a:blip xmlns:r="http://schemas.openxmlformats.org/officeDocument/2006/relationships" xmlns:a="http://schemas.openxmlformats.org/drawingml/2006/main" r:embed="Rb3c2954ba2e94ed8"/>
+          <a:blip xmlns:r="http://schemas.openxmlformats.org/officeDocument/2006/relationships" xmlns:a="http://schemas.openxmlformats.org/drawingml/2006/main" r:embed="R44383a8fc3c74270"/>
           <a:stretch xmlns:a="http://schemas.openxmlformats.org/drawingml/2006/main"/>
         </p:blipFill>
         <p:spPr>
@@ -7582,7 +7832,7 @@
         </p:xfrm>
         <a:graphic xmlns:a="http://schemas.openxmlformats.org/drawingml/2006/main">
           <a:graphicData uri="http://schemas.openxmlformats.org/drawingml/2006/chart">
-            <c:chart xmlns:r="http://schemas.openxmlformats.org/officeDocument/2006/relationships" xmlns:c="http://schemas.openxmlformats.org/drawingml/2006/chart" r:id="Ra41717aed85f4cd1"/>
+            <c:chart xmlns:r="http://schemas.openxmlformats.org/officeDocument/2006/relationships" xmlns:c="http://schemas.openxmlformats.org/drawingml/2006/chart" r:id="R0b711e5d6a584ad3"/>
           </a:graphicData>
         </a:graphic>
       </p:graphicFrame>
@@ -7591,7 +7841,7 @@
           <p:cNvPr id="9" name="">
             <a:extLst xmlns:a="http://schemas.openxmlformats.org/drawingml/2006/main">
               <a:ext uri="{FF2B5EF4-FFF2-40B4-BE49-F238E27FC236}">
-                <a16:creationId xmlns:a16="http://schemas.microsoft.com/office/drawing/2014/main" id="{794D3A8A-61AE-4B16-9492-3AFBC96DA87B}"/>
+                <a16:creationId xmlns:a16="http://schemas.microsoft.com/office/drawing/2014/main" id="{095F4274-A7F3-4642-85E9-BA324334F045}"/>
               </a:ext>
             </a:extLst>
           </p:cNvPr>
@@ -7648,7 +7898,7 @@
           <p:cNvPr id="10" name="">
             <a:extLst xmlns:a="http://schemas.openxmlformats.org/drawingml/2006/main">
               <a:ext uri="{FF2B5EF4-FFF2-40B4-BE49-F238E27FC236}">
-                <a16:creationId xmlns:a16="http://schemas.microsoft.com/office/drawing/2014/main" id="{30F3D126-A548-4107-ABDA-FFE8A7DA93B3}"/>
+                <a16:creationId xmlns:a16="http://schemas.microsoft.com/office/drawing/2014/main" id="{32E5F6E1-3CDF-467A-BD85-0DA4CFFA614E}"/>
               </a:ext>
             </a:extLst>
           </p:cNvPr>
@@ -7703,7 +7953,7 @@
     </p:spTree>
     <p:extLst>
       <p:ext uri="{BB962C8B-B14F-4D97-AF65-F5344CB8AC3E}">
-        <p14:creationId xmlns:p14="http://schemas.microsoft.com/office/powerpoint/2010/main" val="844088236"/>
+        <p14:creationId xmlns:p14="http://schemas.microsoft.com/office/powerpoint/2010/main" val="358315880"/>
       </p:ext>
     </p:extLst>
   </p:cSld>
@@ -7734,7 +7984,7 @@
           <p:cNvPr id="8" name="">
             <a:extLst xmlns:a="http://schemas.openxmlformats.org/drawingml/2006/main">
               <a:ext uri="{FF2B5EF4-FFF2-40B4-BE49-F238E27FC236}">
-                <a16:creationId xmlns:a16="http://schemas.microsoft.com/office/drawing/2014/main" id="{59088C0A-670F-41D3-BA9F-8823EA6C0EBD}"/>
+                <a16:creationId xmlns:a16="http://schemas.microsoft.com/office/drawing/2014/main" id="{FA9A9E15-0ADE-472B-A5D3-9832C086ADCD}"/>
               </a:ext>
             </a:extLst>
           </p:cNvPr>
@@ -7766,7 +8016,7 @@
           <p:cNvPr id="2" name="">
             <a:extLst xmlns:a="http://schemas.openxmlformats.org/drawingml/2006/main">
               <a:ext uri="{FF2B5EF4-FFF2-40B4-BE49-F238E27FC236}">
-                <a16:creationId xmlns:a16="http://schemas.microsoft.com/office/drawing/2014/main" id="{868FCD56-D0C3-4213-B9B1-8CF1CE2F49DF}"/>
+                <a16:creationId xmlns:a16="http://schemas.microsoft.com/office/drawing/2014/main" id="{E52CAB1A-E2A4-4D30-8589-F701823B0CBF}"/>
               </a:ext>
             </a:extLst>
           </p:cNvPr>
@@ -7823,7 +8073,7 @@
           <p:cNvPr id="3" name="">
             <a:extLst xmlns:a="http://schemas.openxmlformats.org/drawingml/2006/main">
               <a:ext uri="{FF2B5EF4-FFF2-40B4-BE49-F238E27FC236}">
-                <a16:creationId xmlns:a16="http://schemas.microsoft.com/office/drawing/2014/main" id="{8031900D-06FF-4775-860A-3676BB50C985}"/>
+                <a16:creationId xmlns:a16="http://schemas.microsoft.com/office/drawing/2014/main" id="{7137736E-1A43-49F9-B818-CE18CD7E3277}"/>
               </a:ext>
             </a:extLst>
           </p:cNvPr>
@@ -7880,7 +8130,7 @@
           <p:cNvPr id="4" name="">
             <a:extLst xmlns:a="http://schemas.openxmlformats.org/drawingml/2006/main">
               <a:ext uri="{FF2B5EF4-FFF2-40B4-BE49-F238E27FC236}">
-                <a16:creationId xmlns:a16="http://schemas.microsoft.com/office/drawing/2014/main" id="{45948464-D692-4B8C-AA1C-50B16C2B5711}"/>
+                <a16:creationId xmlns:a16="http://schemas.microsoft.com/office/drawing/2014/main" id="{048A06CD-A398-492A-BE17-59BD146F05AA}"/>
               </a:ext>
             </a:extLst>
           </p:cNvPr>
@@ -7937,7 +8187,7 @@
           <p:cNvPr id="5" name="">
             <a:extLst xmlns:a="http://schemas.openxmlformats.org/drawingml/2006/main">
               <a:ext uri="{FF2B5EF4-FFF2-40B4-BE49-F238E27FC236}">
-                <a16:creationId xmlns:a16="http://schemas.microsoft.com/office/drawing/2014/main" id="{56E4C56D-3C9E-407E-9DAC-05FEB3E18A2D}"/>
+                <a16:creationId xmlns:a16="http://schemas.microsoft.com/office/drawing/2014/main" id="{E87D9A21-E6DE-4794-96FC-1A7A6EC4693E}"/>
               </a:ext>
             </a:extLst>
           </p:cNvPr>
@@ -8598,7 +8848,7 @@
           <p:cNvPr id="7" name="">
             <a:extLst xmlns:a="http://schemas.openxmlformats.org/drawingml/2006/main">
               <a:ext uri="{FF2B5EF4-FFF2-40B4-BE49-F238E27FC236}">
-                <a16:creationId xmlns:a16="http://schemas.microsoft.com/office/drawing/2014/main" id="{F9280AB6-D805-4D80-8BC1-C865E84D8F01}"/>
+                <a16:creationId xmlns:a16="http://schemas.microsoft.com/office/drawing/2014/main" id="{791632CD-FB22-4D6A-A667-523F39E1A2C2}"/>
               </a:ext>
             </a:extLst>
           </p:cNvPr>
@@ -8653,7 +8903,7 @@
     </p:spTree>
     <p:extLst>
       <p:ext uri="{BB962C8B-B14F-4D97-AF65-F5344CB8AC3E}">
-        <p14:creationId xmlns:p14="http://schemas.microsoft.com/office/powerpoint/2010/main" val="1816782398"/>
+        <p14:creationId xmlns:p14="http://schemas.microsoft.com/office/powerpoint/2010/main" val="2087598086"/>
       </p:ext>
     </p:extLst>
   </p:cSld>
@@ -8684,7 +8934,7 @@
           <p:cNvPr id="11" name="">
             <a:extLst xmlns:a="http://schemas.openxmlformats.org/drawingml/2006/main">
               <a:ext uri="{FF2B5EF4-FFF2-40B4-BE49-F238E27FC236}">
-                <a16:creationId xmlns:a16="http://schemas.microsoft.com/office/drawing/2014/main" id="{050B64A1-0F83-4F4A-A791-A375243BD31E}"/>
+                <a16:creationId xmlns:a16="http://schemas.microsoft.com/office/drawing/2014/main" id="{CFED97DB-4FCB-4B73-A495-92A2B17D50BE}"/>
               </a:ext>
             </a:extLst>
           </p:cNvPr>
@@ -8716,7 +8966,7 @@
           <p:cNvPr id="2" name="">
             <a:extLst xmlns:a="http://schemas.openxmlformats.org/drawingml/2006/main">
               <a:ext uri="{FF2B5EF4-FFF2-40B4-BE49-F238E27FC236}">
-                <a16:creationId xmlns:a16="http://schemas.microsoft.com/office/drawing/2014/main" id="{ACD25560-9199-4C85-B10F-90E36600850E}"/>
+                <a16:creationId xmlns:a16="http://schemas.microsoft.com/office/drawing/2014/main" id="{F343E30C-8F34-4719-94DE-7DE34A9C3D02}"/>
               </a:ext>
             </a:extLst>
           </p:cNvPr>
@@ -8773,7 +9023,7 @@
           <p:cNvPr id="3" name="">
             <a:extLst xmlns:a="http://schemas.openxmlformats.org/drawingml/2006/main">
               <a:ext uri="{FF2B5EF4-FFF2-40B4-BE49-F238E27FC236}">
-                <a16:creationId xmlns:a16="http://schemas.microsoft.com/office/drawing/2014/main" id="{ED17A6EF-0AE5-4B56-9C9C-5415CEFBF746}"/>
+                <a16:creationId xmlns:a16="http://schemas.microsoft.com/office/drawing/2014/main" id="{C83503FA-8CCA-4C04-ADA5-5253E6C0EAD2}"/>
               </a:ext>
             </a:extLst>
           </p:cNvPr>
@@ -8830,7 +9080,7 @@
           <p:cNvPr id="4" name="">
             <a:extLst xmlns:a="http://schemas.openxmlformats.org/drawingml/2006/main">
               <a:ext uri="{FF2B5EF4-FFF2-40B4-BE49-F238E27FC236}">
-                <a16:creationId xmlns:a16="http://schemas.microsoft.com/office/drawing/2014/main" id="{E5EEA293-E536-4BD9-9EF8-A643628358C1}"/>
+                <a16:creationId xmlns:a16="http://schemas.microsoft.com/office/drawing/2014/main" id="{3059D2A8-A680-4EB0-8832-8A35F6357AAA}"/>
               </a:ext>
             </a:extLst>
           </p:cNvPr>
@@ -8887,7 +9137,7 @@
           <p:cNvPr id="5" name="">
             <a:extLst xmlns:a="http://schemas.openxmlformats.org/drawingml/2006/main">
               <a:ext uri="{FF2B5EF4-FFF2-40B4-BE49-F238E27FC236}">
-                <a16:creationId xmlns:a16="http://schemas.microsoft.com/office/drawing/2014/main" id="{3D1F9F98-EDF4-40F6-8C3B-FA5DB8BA2A91}"/>
+                <a16:creationId xmlns:a16="http://schemas.microsoft.com/office/drawing/2014/main" id="{3A2CE002-796C-4B3E-8D08-B0149B6B4D0D}"/>
               </a:ext>
             </a:extLst>
           </p:cNvPr>
@@ -8944,7 +9194,7 @@
           <p:cNvPr id="6" name="">
             <a:extLst xmlns:a="http://schemas.openxmlformats.org/drawingml/2006/main">
               <a:ext uri="{FF2B5EF4-FFF2-40B4-BE49-F238E27FC236}">
-                <a16:creationId xmlns:a16="http://schemas.microsoft.com/office/drawing/2014/main" id="{4AEB3C5E-D652-496F-9B0A-5DFFF1F87E6E}"/>
+                <a16:creationId xmlns:a16="http://schemas.microsoft.com/office/drawing/2014/main" id="{95A0031C-C789-4BCA-93FE-95EA870FD2FE}"/>
               </a:ext>
             </a:extLst>
           </p:cNvPr>
@@ -9001,7 +9251,7 @@
           <p:cNvPr id="7" name="">
             <a:extLst xmlns:a="http://schemas.openxmlformats.org/drawingml/2006/main">
               <a:ext uri="{FF2B5EF4-FFF2-40B4-BE49-F238E27FC236}">
-                <a16:creationId xmlns:a16="http://schemas.microsoft.com/office/drawing/2014/main" id="{E05A30B3-6385-41BA-8713-1BAE0FDC13AC}"/>
+                <a16:creationId xmlns:a16="http://schemas.microsoft.com/office/drawing/2014/main" id="{E3679C00-30A3-418E-AA8C-D13423AD0916}"/>
               </a:ext>
             </a:extLst>
           </p:cNvPr>
@@ -9143,7 +9393,7 @@
           <p:cNvPr id="8" name="">
             <a:extLst xmlns:a="http://schemas.openxmlformats.org/drawingml/2006/main">
               <a:ext uri="{FF2B5EF4-FFF2-40B4-BE49-F238E27FC236}">
-                <a16:creationId xmlns:a16="http://schemas.microsoft.com/office/drawing/2014/main" id="{0C0A040B-6021-437F-A9DC-03A79D66FDAA}"/>
+                <a16:creationId xmlns:a16="http://schemas.microsoft.com/office/drawing/2014/main" id="{A16C4E5D-2DCC-4E08-9D32-558B1E196A50}"/>
               </a:ext>
             </a:extLst>
           </p:cNvPr>
@@ -9200,7 +9450,7 @@
           <p:cNvPr id="9" name="">
             <a:extLst xmlns:a="http://schemas.openxmlformats.org/drawingml/2006/main">
               <a:ext uri="{FF2B5EF4-FFF2-40B4-BE49-F238E27FC236}">
-                <a16:creationId xmlns:a16="http://schemas.microsoft.com/office/drawing/2014/main" id="{EC996F19-2511-4E78-8646-2C2D64DB56DB}"/>
+                <a16:creationId xmlns:a16="http://schemas.microsoft.com/office/drawing/2014/main" id="{ADFC0CAD-2045-425E-9802-58D2B35E9CE5}"/>
               </a:ext>
             </a:extLst>
           </p:cNvPr>
@@ -9342,7 +9592,7 @@
           <p:cNvPr id="10" name="">
             <a:extLst xmlns:a="http://schemas.openxmlformats.org/drawingml/2006/main">
               <a:ext uri="{FF2B5EF4-FFF2-40B4-BE49-F238E27FC236}">
-                <a16:creationId xmlns:a16="http://schemas.microsoft.com/office/drawing/2014/main" id="{27741466-4356-44B7-9ADF-73BCBA9B2874}"/>
+                <a16:creationId xmlns:a16="http://schemas.microsoft.com/office/drawing/2014/main" id="{4062FEDD-9130-488E-A7C1-11557B593E02}"/>
               </a:ext>
             </a:extLst>
           </p:cNvPr>
@@ -9397,7 +9647,7 @@
     </p:spTree>
     <p:extLst>
       <p:ext uri="{BB962C8B-B14F-4D97-AF65-F5344CB8AC3E}">
-        <p14:creationId xmlns:p14="http://schemas.microsoft.com/office/powerpoint/2010/main" val="354573240"/>
+        <p14:creationId xmlns:p14="http://schemas.microsoft.com/office/powerpoint/2010/main" val="1708904158"/>
       </p:ext>
     </p:extLst>
   </p:cSld>
@@ -9428,7 +9678,7 @@
           <p:cNvPr id="15" name="">
             <a:extLst xmlns:a="http://schemas.openxmlformats.org/drawingml/2006/main">
               <a:ext uri="{FF2B5EF4-FFF2-40B4-BE49-F238E27FC236}">
-                <a16:creationId xmlns:a16="http://schemas.microsoft.com/office/drawing/2014/main" id="{5F3D4874-B0C5-4DB7-983E-66C3DA43BE33}"/>
+                <a16:creationId xmlns:a16="http://schemas.microsoft.com/office/drawing/2014/main" id="{6D1D3124-0C56-4B64-899E-533A95C1261A}"/>
               </a:ext>
             </a:extLst>
           </p:cNvPr>
@@ -9460,7 +9710,7 @@
           <p:cNvPr id="2" name="">
             <a:extLst xmlns:a="http://schemas.openxmlformats.org/drawingml/2006/main">
               <a:ext uri="{FF2B5EF4-FFF2-40B4-BE49-F238E27FC236}">
-                <a16:creationId xmlns:a16="http://schemas.microsoft.com/office/drawing/2014/main" id="{9C825009-25D2-46B9-8692-80F549C2ECCF}"/>
+                <a16:creationId xmlns:a16="http://schemas.microsoft.com/office/drawing/2014/main" id="{AF065885-3F92-412F-8B77-92D2F63F9766}"/>
               </a:ext>
             </a:extLst>
           </p:cNvPr>
@@ -9517,7 +9767,7 @@
           <p:cNvPr id="3" name="">
             <a:extLst xmlns:a="http://schemas.openxmlformats.org/drawingml/2006/main">
               <a:ext uri="{FF2B5EF4-FFF2-40B4-BE49-F238E27FC236}">
-                <a16:creationId xmlns:a16="http://schemas.microsoft.com/office/drawing/2014/main" id="{0FE58029-045C-4563-9E76-E8819CBB28A7}"/>
+                <a16:creationId xmlns:a16="http://schemas.microsoft.com/office/drawing/2014/main" id="{9A90A67E-4DE6-47D7-96D7-83837B80FFB6}"/>
               </a:ext>
             </a:extLst>
           </p:cNvPr>
@@ -9574,7 +9824,7 @@
           <p:cNvPr id="4" name="">
             <a:extLst xmlns:a="http://schemas.openxmlformats.org/drawingml/2006/main">
               <a:ext uri="{FF2B5EF4-FFF2-40B4-BE49-F238E27FC236}">
-                <a16:creationId xmlns:a16="http://schemas.microsoft.com/office/drawing/2014/main" id="{3C9BEBEC-860C-4527-AEC0-EDA1B4DB6C2D}"/>
+                <a16:creationId xmlns:a16="http://schemas.microsoft.com/office/drawing/2014/main" id="{77790DDA-05E0-4B0C-B449-356665BF82BC}"/>
               </a:ext>
             </a:extLst>
           </p:cNvPr>
@@ -9631,7 +9881,7 @@
           <p:cNvPr id="5" name="">
             <a:extLst xmlns:a="http://schemas.openxmlformats.org/drawingml/2006/main">
               <a:ext uri="{FF2B5EF4-FFF2-40B4-BE49-F238E27FC236}">
-                <a16:creationId xmlns:a16="http://schemas.microsoft.com/office/drawing/2014/main" id="{EF180C67-FE62-451D-ADCF-6E6481C6C94D}"/>
+                <a16:creationId xmlns:a16="http://schemas.microsoft.com/office/drawing/2014/main" id="{42A02465-89BA-4925-B486-AB48CB3E84F9}"/>
               </a:ext>
             </a:extLst>
           </p:cNvPr>
@@ -9688,7 +9938,7 @@
           <p:cNvPr id="6" name="">
             <a:extLst xmlns:a="http://schemas.openxmlformats.org/drawingml/2006/main">
               <a:ext uri="{FF2B5EF4-FFF2-40B4-BE49-F238E27FC236}">
-                <a16:creationId xmlns:a16="http://schemas.microsoft.com/office/drawing/2014/main" id="{DFC92004-4602-4024-921A-796A91C87DCA}"/>
+                <a16:creationId xmlns:a16="http://schemas.microsoft.com/office/drawing/2014/main" id="{3EC5A23F-918D-4006-8D01-C46DB29010B9}"/>
               </a:ext>
             </a:extLst>
           </p:cNvPr>
@@ -9749,7 +9999,7 @@
           <p:nvPr/>
         </p:nvPicPr>
         <p:blipFill>
-          <a:blip xmlns:r="http://schemas.openxmlformats.org/officeDocument/2006/relationships" xmlns:a="http://schemas.openxmlformats.org/drawingml/2006/main" r:embed="R5cca9c0b91404a0e"/>
+          <a:blip xmlns:r="http://schemas.openxmlformats.org/officeDocument/2006/relationships" xmlns:a="http://schemas.openxmlformats.org/drawingml/2006/main" r:embed="Ra337e60d91b4411e"/>
           <a:stretch xmlns:a="http://schemas.openxmlformats.org/drawingml/2006/main"/>
         </p:blipFill>
         <p:spPr>
@@ -9767,7 +10017,7 @@
           <p:cNvPr id="8" name="">
             <a:extLst xmlns:a="http://schemas.openxmlformats.org/drawingml/2006/main">
               <a:ext uri="{FF2B5EF4-FFF2-40B4-BE49-F238E27FC236}">
-                <a16:creationId xmlns:a16="http://schemas.microsoft.com/office/drawing/2014/main" id="{C140D227-E470-4C87-8E56-F51720B2BD56}"/>
+                <a16:creationId xmlns:a16="http://schemas.microsoft.com/office/drawing/2014/main" id="{590D290D-3EA9-4F28-BFF4-312195D35C6E}"/>
               </a:ext>
             </a:extLst>
           </p:cNvPr>
@@ -9824,7 +10074,7 @@
           <p:cNvPr id="9" name="">
             <a:extLst xmlns:a="http://schemas.openxmlformats.org/drawingml/2006/main">
               <a:ext uri="{FF2B5EF4-FFF2-40B4-BE49-F238E27FC236}">
-                <a16:creationId xmlns:a16="http://schemas.microsoft.com/office/drawing/2014/main" id="{711C073C-C367-4AE8-B0EF-B3FE45098BC6}"/>
+                <a16:creationId xmlns:a16="http://schemas.microsoft.com/office/drawing/2014/main" id="{2223358E-E620-40FC-A284-1205ADB4AAE7}"/>
               </a:ext>
             </a:extLst>
           </p:cNvPr>
@@ -9881,7 +10131,7 @@
           <p:cNvPr id="10" name="">
             <a:extLst xmlns:a="http://schemas.openxmlformats.org/drawingml/2006/main">
               <a:ext uri="{FF2B5EF4-FFF2-40B4-BE49-F238E27FC236}">
-                <a16:creationId xmlns:a16="http://schemas.microsoft.com/office/drawing/2014/main" id="{3BAE75BD-B570-4DE7-81D6-513015181C22}"/>
+                <a16:creationId xmlns:a16="http://schemas.microsoft.com/office/drawing/2014/main" id="{8944DAD2-135F-4BC5-AAA9-65E23371E577}"/>
               </a:ext>
             </a:extLst>
           </p:cNvPr>
@@ -9938,7 +10188,7 @@
           <p:cNvPr id="11" name="">
             <a:extLst xmlns:a="http://schemas.openxmlformats.org/drawingml/2006/main">
               <a:ext uri="{FF2B5EF4-FFF2-40B4-BE49-F238E27FC236}">
-                <a16:creationId xmlns:a16="http://schemas.microsoft.com/office/drawing/2014/main" id="{17C060BC-04CC-45EC-8A29-71B51A619C7F}"/>
+                <a16:creationId xmlns:a16="http://schemas.microsoft.com/office/drawing/2014/main" id="{07AF72EA-5276-4B74-8538-4283FE7B4428}"/>
               </a:ext>
             </a:extLst>
           </p:cNvPr>
@@ -9995,7 +10245,7 @@
           <p:cNvPr id="12" name="">
             <a:extLst xmlns:a="http://schemas.openxmlformats.org/drawingml/2006/main">
               <a:ext uri="{FF2B5EF4-FFF2-40B4-BE49-F238E27FC236}">
-                <a16:creationId xmlns:a16="http://schemas.microsoft.com/office/drawing/2014/main" id="{11EE1331-12DF-4565-A65B-5A1FF7071FEE}"/>
+                <a16:creationId xmlns:a16="http://schemas.microsoft.com/office/drawing/2014/main" id="{7B03E649-BB22-4774-8ED8-0D12CE224AC9}"/>
               </a:ext>
             </a:extLst>
           </p:cNvPr>
@@ -10052,7 +10302,7 @@
           <p:cNvPr id="13" name="">
             <a:extLst xmlns:a="http://schemas.openxmlformats.org/drawingml/2006/main">
               <a:ext uri="{FF2B5EF4-FFF2-40B4-BE49-F238E27FC236}">
-                <a16:creationId xmlns:a16="http://schemas.microsoft.com/office/drawing/2014/main" id="{D1BA1EA7-69BE-40A5-9331-2E0621668E0B}"/>
+                <a16:creationId xmlns:a16="http://schemas.microsoft.com/office/drawing/2014/main" id="{84B46EE7-9980-4101-8828-10D416DF4A6D}"/>
               </a:ext>
             </a:extLst>
           </p:cNvPr>
@@ -10109,7 +10359,7 @@
           <p:cNvPr id="14" name="">
             <a:extLst xmlns:a="http://schemas.openxmlformats.org/drawingml/2006/main">
               <a:ext uri="{FF2B5EF4-FFF2-40B4-BE49-F238E27FC236}">
-                <a16:creationId xmlns:a16="http://schemas.microsoft.com/office/drawing/2014/main" id="{277D3B89-E252-47B9-BDC6-20CFD3AAD819}"/>
+                <a16:creationId xmlns:a16="http://schemas.microsoft.com/office/drawing/2014/main" id="{76A4673A-4065-4AE6-871F-9DB675BEBE9F}"/>
               </a:ext>
             </a:extLst>
           </p:cNvPr>
@@ -10164,7 +10414,7 @@
     </p:spTree>
     <p:extLst>
       <p:ext uri="{BB962C8B-B14F-4D97-AF65-F5344CB8AC3E}">
-        <p14:creationId xmlns:p14="http://schemas.microsoft.com/office/powerpoint/2010/main" val="536250316"/>
+        <p14:creationId xmlns:p14="http://schemas.microsoft.com/office/powerpoint/2010/main" val="623753848"/>
       </p:ext>
     </p:extLst>
   </p:cSld>
@@ -10195,7 +10445,7 @@
           <p:cNvPr id="11" name="">
             <a:extLst xmlns:a="http://schemas.openxmlformats.org/drawingml/2006/main">
               <a:ext uri="{FF2B5EF4-FFF2-40B4-BE49-F238E27FC236}">
-                <a16:creationId xmlns:a16="http://schemas.microsoft.com/office/drawing/2014/main" id="{EBAA77F8-E7F8-4D1D-A613-94877613ABD1}"/>
+                <a16:creationId xmlns:a16="http://schemas.microsoft.com/office/drawing/2014/main" id="{4AD1A395-7E7D-4581-BE58-CC040762EB25}"/>
               </a:ext>
             </a:extLst>
           </p:cNvPr>
@@ -10227,7 +10477,7 @@
           <p:cNvPr id="2" name="">
             <a:extLst xmlns:a="http://schemas.openxmlformats.org/drawingml/2006/main">
               <a:ext uri="{FF2B5EF4-FFF2-40B4-BE49-F238E27FC236}">
-                <a16:creationId xmlns:a16="http://schemas.microsoft.com/office/drawing/2014/main" id="{90B3F8DF-4097-4FED-BED5-B74F6CA8362D}"/>
+                <a16:creationId xmlns:a16="http://schemas.microsoft.com/office/drawing/2014/main" id="{AB51DC33-EE1A-4753-A3EA-98EF708ECC36}"/>
               </a:ext>
             </a:extLst>
           </p:cNvPr>
@@ -10284,7 +10534,7 @@
           <p:cNvPr id="3" name="">
             <a:extLst xmlns:a="http://schemas.openxmlformats.org/drawingml/2006/main">
               <a:ext uri="{FF2B5EF4-FFF2-40B4-BE49-F238E27FC236}">
-                <a16:creationId xmlns:a16="http://schemas.microsoft.com/office/drawing/2014/main" id="{0C897E57-DDB5-4DDC-ADFD-DDABBCF9C49D}"/>
+                <a16:creationId xmlns:a16="http://schemas.microsoft.com/office/drawing/2014/main" id="{6CDF5356-95C0-488B-99C8-FC4AF1C42E3B}"/>
               </a:ext>
             </a:extLst>
           </p:cNvPr>
@@ -10341,7 +10591,7 @@
           <p:cNvPr id="4" name="">
             <a:extLst xmlns:a="http://schemas.openxmlformats.org/drawingml/2006/main">
               <a:ext uri="{FF2B5EF4-FFF2-40B4-BE49-F238E27FC236}">
-                <a16:creationId xmlns:a16="http://schemas.microsoft.com/office/drawing/2014/main" id="{AF521C60-39E6-423F-BACB-B972FB8774B0}"/>
+                <a16:creationId xmlns:a16="http://schemas.microsoft.com/office/drawing/2014/main" id="{75E1C879-889E-4BBE-ACA5-D223D030E2BD}"/>
               </a:ext>
             </a:extLst>
           </p:cNvPr>
@@ -10398,7 +10648,7 @@
           <p:cNvPr id="5" name="">
             <a:extLst xmlns:a="http://schemas.openxmlformats.org/drawingml/2006/main">
               <a:ext uri="{FF2B5EF4-FFF2-40B4-BE49-F238E27FC236}">
-                <a16:creationId xmlns:a16="http://schemas.microsoft.com/office/drawing/2014/main" id="{D3761FAD-D303-4E85-8198-BCE04CDCAD47}"/>
+                <a16:creationId xmlns:a16="http://schemas.microsoft.com/office/drawing/2014/main" id="{60520B00-474B-4D1D-B376-5B4E3DDFC5F3}"/>
               </a:ext>
             </a:extLst>
           </p:cNvPr>
@@ -10455,7 +10705,7 @@
           <p:cNvPr id="6" name="">
             <a:extLst xmlns:a="http://schemas.openxmlformats.org/drawingml/2006/main">
               <a:ext uri="{FF2B5EF4-FFF2-40B4-BE49-F238E27FC236}">
-                <a16:creationId xmlns:a16="http://schemas.microsoft.com/office/drawing/2014/main" id="{3E8307FC-0517-4920-B65D-DB1BBD04C6BD}"/>
+                <a16:creationId xmlns:a16="http://schemas.microsoft.com/office/drawing/2014/main" id="{F9D91249-2DCE-4F51-AEA2-C94385C33877}"/>
               </a:ext>
             </a:extLst>
           </p:cNvPr>
@@ -10516,7 +10766,7 @@
           <p:nvPr/>
         </p:nvPicPr>
         <p:blipFill>
-          <a:blip xmlns:r="http://schemas.openxmlformats.org/officeDocument/2006/relationships" xmlns:a="http://schemas.openxmlformats.org/drawingml/2006/main" r:embed="R2bbce44bbadf4b94"/>
+          <a:blip xmlns:r="http://schemas.openxmlformats.org/officeDocument/2006/relationships" xmlns:a="http://schemas.openxmlformats.org/drawingml/2006/main" r:embed="Rad75144c7d4741db"/>
           <a:stretch xmlns:a="http://schemas.openxmlformats.org/drawingml/2006/main"/>
         </p:blipFill>
         <p:spPr>
@@ -10541,7 +10791,7 @@
         </p:xfrm>
         <a:graphic xmlns:a="http://schemas.openxmlformats.org/drawingml/2006/main">
           <a:graphicData uri="http://schemas.openxmlformats.org/drawingml/2006/chart">
-            <c:chart xmlns:r="http://schemas.openxmlformats.org/officeDocument/2006/relationships" xmlns:c="http://schemas.openxmlformats.org/drawingml/2006/chart" r:id="Rc8bbc655be41465e"/>
+            <c:chart xmlns:r="http://schemas.openxmlformats.org/officeDocument/2006/relationships" xmlns:c="http://schemas.openxmlformats.org/drawingml/2006/chart" r:id="Ra23ed6e840494658"/>
           </a:graphicData>
         </a:graphic>
       </p:graphicFrame>
@@ -10550,7 +10800,7 @@
           <p:cNvPr id="9" name="">
             <a:extLst xmlns:a="http://schemas.openxmlformats.org/drawingml/2006/main">
               <a:ext uri="{FF2B5EF4-FFF2-40B4-BE49-F238E27FC236}">
-                <a16:creationId xmlns:a16="http://schemas.microsoft.com/office/drawing/2014/main" id="{F148CC33-57F5-4F99-BAB1-237394C12849}"/>
+                <a16:creationId xmlns:a16="http://schemas.microsoft.com/office/drawing/2014/main" id="{773CB1AB-A955-440F-9A24-4D61D69DCE1C}"/>
               </a:ext>
             </a:extLst>
           </p:cNvPr>
@@ -10607,7 +10857,7 @@
           <p:cNvPr id="10" name="">
             <a:extLst xmlns:a="http://schemas.openxmlformats.org/drawingml/2006/main">
               <a:ext uri="{FF2B5EF4-FFF2-40B4-BE49-F238E27FC236}">
-                <a16:creationId xmlns:a16="http://schemas.microsoft.com/office/drawing/2014/main" id="{4307D6D2-8EDC-45A7-AD92-18AE29194DA6}"/>
+                <a16:creationId xmlns:a16="http://schemas.microsoft.com/office/drawing/2014/main" id="{D6A11577-ABA0-4B86-ADBD-28597BF62095}"/>
               </a:ext>
             </a:extLst>
           </p:cNvPr>
@@ -10662,7 +10912,7 @@
     </p:spTree>
     <p:extLst>
       <p:ext uri="{BB962C8B-B14F-4D97-AF65-F5344CB8AC3E}">
-        <p14:creationId xmlns:p14="http://schemas.microsoft.com/office/powerpoint/2010/main" val="1444504760"/>
+        <p14:creationId xmlns:p14="http://schemas.microsoft.com/office/powerpoint/2010/main" val="1337289501"/>
       </p:ext>
     </p:extLst>
   </p:cSld>
@@ -10693,7 +10943,7 @@
           <p:cNvPr id="16" name="">
             <a:extLst xmlns:a="http://schemas.openxmlformats.org/drawingml/2006/main">
               <a:ext uri="{FF2B5EF4-FFF2-40B4-BE49-F238E27FC236}">
-                <a16:creationId xmlns:a16="http://schemas.microsoft.com/office/drawing/2014/main" id="{975AB2EC-A07A-4E67-BCB4-B3C19BB01964}"/>
+                <a16:creationId xmlns:a16="http://schemas.microsoft.com/office/drawing/2014/main" id="{D6B8DBD6-CCC3-4106-AF0E-19157B94A8A2}"/>
               </a:ext>
             </a:extLst>
           </p:cNvPr>
@@ -10725,7 +10975,7 @@
           <p:cNvPr id="2" name="">
             <a:extLst xmlns:a="http://schemas.openxmlformats.org/drawingml/2006/main">
               <a:ext uri="{FF2B5EF4-FFF2-40B4-BE49-F238E27FC236}">
-                <a16:creationId xmlns:a16="http://schemas.microsoft.com/office/drawing/2014/main" id="{12B26169-1559-4967-9317-83DECD610194}"/>
+                <a16:creationId xmlns:a16="http://schemas.microsoft.com/office/drawing/2014/main" id="{DC70EABC-19B7-434F-AFD4-23DBD7F3F299}"/>
               </a:ext>
             </a:extLst>
           </p:cNvPr>
@@ -10782,7 +11032,7 @@
           <p:cNvPr id="3" name="">
             <a:extLst xmlns:a="http://schemas.openxmlformats.org/drawingml/2006/main">
               <a:ext uri="{FF2B5EF4-FFF2-40B4-BE49-F238E27FC236}">
-                <a16:creationId xmlns:a16="http://schemas.microsoft.com/office/drawing/2014/main" id="{E466F283-9FE8-4440-BA89-E0D2C20FBDDD}"/>
+                <a16:creationId xmlns:a16="http://schemas.microsoft.com/office/drawing/2014/main" id="{C0D25BE2-5BD5-456E-9859-BC8B4E5B33D0}"/>
               </a:ext>
             </a:extLst>
           </p:cNvPr>
@@ -10839,7 +11089,7 @@
           <p:cNvPr id="4" name="">
             <a:extLst xmlns:a="http://schemas.openxmlformats.org/drawingml/2006/main">
               <a:ext uri="{FF2B5EF4-FFF2-40B4-BE49-F238E27FC236}">
-                <a16:creationId xmlns:a16="http://schemas.microsoft.com/office/drawing/2014/main" id="{4677A6A3-74C5-4A12-939D-405791E27D3F}"/>
+                <a16:creationId xmlns:a16="http://schemas.microsoft.com/office/drawing/2014/main" id="{2B4EE796-3CD8-45DC-A3A0-D42D83D13DDC}"/>
               </a:ext>
             </a:extLst>
           </p:cNvPr>
@@ -10896,7 +11146,7 @@
           <p:cNvPr id="5" name="">
             <a:extLst xmlns:a="http://schemas.openxmlformats.org/drawingml/2006/main">
               <a:ext uri="{FF2B5EF4-FFF2-40B4-BE49-F238E27FC236}">
-                <a16:creationId xmlns:a16="http://schemas.microsoft.com/office/drawing/2014/main" id="{5F730420-2555-4B64-A377-6CE61DC810DB}"/>
+                <a16:creationId xmlns:a16="http://schemas.microsoft.com/office/drawing/2014/main" id="{E5DF1D48-A4A2-45BE-A524-022AD98B951F}"/>
               </a:ext>
             </a:extLst>
           </p:cNvPr>
@@ -10953,7 +11203,7 @@
           <p:cNvPr id="6" name="">
             <a:extLst xmlns:a="http://schemas.openxmlformats.org/drawingml/2006/main">
               <a:ext uri="{FF2B5EF4-FFF2-40B4-BE49-F238E27FC236}">
-                <a16:creationId xmlns:a16="http://schemas.microsoft.com/office/drawing/2014/main" id="{846C0CBE-074D-4FFF-B4E6-7021C8867068}"/>
+                <a16:creationId xmlns:a16="http://schemas.microsoft.com/office/drawing/2014/main" id="{C05841D1-3128-4477-AD9B-58A6DB3F61A4}"/>
               </a:ext>
             </a:extLst>
           </p:cNvPr>
@@ -11010,7 +11260,7 @@
           <p:cNvPr id="7" name="">
             <a:extLst xmlns:a="http://schemas.openxmlformats.org/drawingml/2006/main">
               <a:ext uri="{FF2B5EF4-FFF2-40B4-BE49-F238E27FC236}">
-                <a16:creationId xmlns:a16="http://schemas.microsoft.com/office/drawing/2014/main" id="{5F86EE79-C598-4AB0-A4F2-31AD1EF4521E}"/>
+                <a16:creationId xmlns:a16="http://schemas.microsoft.com/office/drawing/2014/main" id="{13144428-5A4B-4B42-A926-9C422D5644EE}"/>
               </a:ext>
             </a:extLst>
           </p:cNvPr>
@@ -11067,7 +11317,7 @@
           <p:cNvPr id="8" name="">
             <a:extLst xmlns:a="http://schemas.openxmlformats.org/drawingml/2006/main">
               <a:ext uri="{FF2B5EF4-FFF2-40B4-BE49-F238E27FC236}">
-                <a16:creationId xmlns:a16="http://schemas.microsoft.com/office/drawing/2014/main" id="{1C79D415-7880-405D-AE3E-D519992ED93F}"/>
+                <a16:creationId xmlns:a16="http://schemas.microsoft.com/office/drawing/2014/main" id="{0F81B251-5B0D-42A5-9F6B-716AEDD637E3}"/>
               </a:ext>
             </a:extLst>
           </p:cNvPr>
@@ -11124,7 +11374,7 @@
           <p:cNvPr id="9" name="">
             <a:extLst xmlns:a="http://schemas.openxmlformats.org/drawingml/2006/main">
               <a:ext uri="{FF2B5EF4-FFF2-40B4-BE49-F238E27FC236}">
-                <a16:creationId xmlns:a16="http://schemas.microsoft.com/office/drawing/2014/main" id="{CF24C1C3-6787-42A7-B7E1-B605C5CE5703}"/>
+                <a16:creationId xmlns:a16="http://schemas.microsoft.com/office/drawing/2014/main" id="{E8250F65-4368-478F-9D82-0604A241870E}"/>
               </a:ext>
             </a:extLst>
           </p:cNvPr>
@@ -11181,7 +11431,7 @@
           <p:cNvPr id="10" name="">
             <a:extLst xmlns:a="http://schemas.openxmlformats.org/drawingml/2006/main">
               <a:ext uri="{FF2B5EF4-FFF2-40B4-BE49-F238E27FC236}">
-                <a16:creationId xmlns:a16="http://schemas.microsoft.com/office/drawing/2014/main" id="{CDC36DC0-E326-49FB-9547-25DC54314D1B}"/>
+                <a16:creationId xmlns:a16="http://schemas.microsoft.com/office/drawing/2014/main" id="{3D0E1E4E-7D94-4320-AC01-D7036F4EC404}"/>
               </a:ext>
             </a:extLst>
           </p:cNvPr>
@@ -11213,7 +11463,7 @@
           <p:cNvPr id="11" name="">
             <a:extLst xmlns:a="http://schemas.openxmlformats.org/drawingml/2006/main">
               <a:ext uri="{FF2B5EF4-FFF2-40B4-BE49-F238E27FC236}">
-                <a16:creationId xmlns:a16="http://schemas.microsoft.com/office/drawing/2014/main" id="{A6730FB4-DC92-4FD7-ABC2-489BE96B52C2}"/>
+                <a16:creationId xmlns:a16="http://schemas.microsoft.com/office/drawing/2014/main" id="{4F1DC52B-585B-43A2-827F-DCEBC35C74D9}"/>
               </a:ext>
             </a:extLst>
           </p:cNvPr>
@@ -11270,7 +11520,7 @@
           <p:cNvPr id="12" name="">
             <a:extLst xmlns:a="http://schemas.openxmlformats.org/drawingml/2006/main">
               <a:ext uri="{FF2B5EF4-FFF2-40B4-BE49-F238E27FC236}">
-                <a16:creationId xmlns:a16="http://schemas.microsoft.com/office/drawing/2014/main" id="{04546BB8-B9D8-419C-9054-5DA2B37C2941}"/>
+                <a16:creationId xmlns:a16="http://schemas.microsoft.com/office/drawing/2014/main" id="{8EC2F452-606B-4C10-A185-AF0C7B880F54}"/>
               </a:ext>
             </a:extLst>
           </p:cNvPr>
@@ -11327,7 +11577,7 @@
           <p:cNvPr id="13" name="">
             <a:extLst xmlns:a="http://schemas.openxmlformats.org/drawingml/2006/main">
               <a:ext uri="{FF2B5EF4-FFF2-40B4-BE49-F238E27FC236}">
-                <a16:creationId xmlns:a16="http://schemas.microsoft.com/office/drawing/2014/main" id="{AF0ADE61-CDD3-44AA-816A-3FC5C734237F}"/>
+                <a16:creationId xmlns:a16="http://schemas.microsoft.com/office/drawing/2014/main" id="{5C57F7EC-BB64-4779-A9B0-C72D64F9BD25}"/>
               </a:ext>
             </a:extLst>
           </p:cNvPr>
@@ -11384,7 +11634,7 @@
           <p:cNvPr id="14" name="">
             <a:extLst xmlns:a="http://schemas.openxmlformats.org/drawingml/2006/main">
               <a:ext uri="{FF2B5EF4-FFF2-40B4-BE49-F238E27FC236}">
-                <a16:creationId xmlns:a16="http://schemas.microsoft.com/office/drawing/2014/main" id="{1597D048-B303-4955-B999-BC025CE0D620}"/>
+                <a16:creationId xmlns:a16="http://schemas.microsoft.com/office/drawing/2014/main" id="{B1C13CD5-3A5F-4DAB-A4E1-AA513CF2713F}"/>
               </a:ext>
             </a:extLst>
           </p:cNvPr>
@@ -11441,7 +11691,7 @@
           <p:cNvPr id="15" name="">
             <a:extLst xmlns:a="http://schemas.openxmlformats.org/drawingml/2006/main">
               <a:ext uri="{FF2B5EF4-FFF2-40B4-BE49-F238E27FC236}">
-                <a16:creationId xmlns:a16="http://schemas.microsoft.com/office/drawing/2014/main" id="{21F216BF-CAB0-40B4-874A-0906068600F1}"/>
+                <a16:creationId xmlns:a16="http://schemas.microsoft.com/office/drawing/2014/main" id="{DE266908-D555-4313-B0C6-C718FB16B407}"/>
               </a:ext>
             </a:extLst>
           </p:cNvPr>
@@ -11496,7 +11746,7 @@
     </p:spTree>
     <p:extLst>
       <p:ext uri="{BB962C8B-B14F-4D97-AF65-F5344CB8AC3E}">
-        <p14:creationId xmlns:p14="http://schemas.microsoft.com/office/powerpoint/2010/main" val="1523230279"/>
+        <p14:creationId xmlns:p14="http://schemas.microsoft.com/office/powerpoint/2010/main" val="1224737241"/>
       </p:ext>
     </p:extLst>
   </p:cSld>
@@ -11527,7 +11777,7 @@
           <p:cNvPr id="31" name="">
             <a:extLst xmlns:a="http://schemas.openxmlformats.org/drawingml/2006/main">
               <a:ext uri="{FF2B5EF4-FFF2-40B4-BE49-F238E27FC236}">
-                <a16:creationId xmlns:a16="http://schemas.microsoft.com/office/drawing/2014/main" id="{ED219CB5-93BE-4BA3-9BB5-9A8C7306487E}"/>
+                <a16:creationId xmlns:a16="http://schemas.microsoft.com/office/drawing/2014/main" id="{3E62C71B-906E-4833-932F-E2E4B5A06661}"/>
               </a:ext>
             </a:extLst>
           </p:cNvPr>
@@ -11559,7 +11809,7 @@
           <p:cNvPr id="2" name="">
             <a:extLst xmlns:a="http://schemas.openxmlformats.org/drawingml/2006/main">
               <a:ext uri="{FF2B5EF4-FFF2-40B4-BE49-F238E27FC236}">
-                <a16:creationId xmlns:a16="http://schemas.microsoft.com/office/drawing/2014/main" id="{C4A04C12-41C3-4322-B78E-FB46E6B216DB}"/>
+                <a16:creationId xmlns:a16="http://schemas.microsoft.com/office/drawing/2014/main" id="{3358A5DD-DD3F-4D9B-B09F-FA96F77E87AC}"/>
               </a:ext>
             </a:extLst>
           </p:cNvPr>
@@ -11616,7 +11866,7 @@
           <p:cNvPr id="3" name="">
             <a:extLst xmlns:a="http://schemas.openxmlformats.org/drawingml/2006/main">
               <a:ext uri="{FF2B5EF4-FFF2-40B4-BE49-F238E27FC236}">
-                <a16:creationId xmlns:a16="http://schemas.microsoft.com/office/drawing/2014/main" id="{9C087D1D-DF48-4064-B8E2-64160A0C2485}"/>
+                <a16:creationId xmlns:a16="http://schemas.microsoft.com/office/drawing/2014/main" id="{3EFAA695-4BB5-4D99-9C80-8379D640EDC5}"/>
               </a:ext>
             </a:extLst>
           </p:cNvPr>
@@ -11673,7 +11923,7 @@
           <p:cNvPr id="4" name="">
             <a:extLst xmlns:a="http://schemas.openxmlformats.org/drawingml/2006/main">
               <a:ext uri="{FF2B5EF4-FFF2-40B4-BE49-F238E27FC236}">
-                <a16:creationId xmlns:a16="http://schemas.microsoft.com/office/drawing/2014/main" id="{9AF5CCEF-8C32-46EE-A544-17EFB54A9339}"/>
+                <a16:creationId xmlns:a16="http://schemas.microsoft.com/office/drawing/2014/main" id="{936D36EF-A167-4792-BD1A-AD35E82F11C4}"/>
               </a:ext>
             </a:extLst>
           </p:cNvPr>
@@ -11730,7 +11980,7 @@
           <p:cNvPr id="5" name="">
             <a:extLst xmlns:a="http://schemas.openxmlformats.org/drawingml/2006/main">
               <a:ext uri="{FF2B5EF4-FFF2-40B4-BE49-F238E27FC236}">
-                <a16:creationId xmlns:a16="http://schemas.microsoft.com/office/drawing/2014/main" id="{4E394D60-12E1-4D2B-BEC3-5F062DD90354}"/>
+                <a16:creationId xmlns:a16="http://schemas.microsoft.com/office/drawing/2014/main" id="{9C493842-03EA-45AE-99C4-F29F5981AA60}"/>
               </a:ext>
             </a:extLst>
           </p:cNvPr>
@@ -11787,7 +12037,7 @@
           <p:cNvPr id="6" name="">
             <a:extLst xmlns:a="http://schemas.openxmlformats.org/drawingml/2006/main">
               <a:ext uri="{FF2B5EF4-FFF2-40B4-BE49-F238E27FC236}">
-                <a16:creationId xmlns:a16="http://schemas.microsoft.com/office/drawing/2014/main" id="{8A7911C4-E6B8-4D67-8775-7E34DE8F08FB}"/>
+                <a16:creationId xmlns:a16="http://schemas.microsoft.com/office/drawing/2014/main" id="{39C8CD7D-CED7-4E42-811F-5B01E769CD55}"/>
               </a:ext>
             </a:extLst>
           </p:cNvPr>
@@ -11821,7 +12071,7 @@
           <p:cNvPr id="7" name="">
             <a:extLst xmlns:a="http://schemas.openxmlformats.org/drawingml/2006/main">
               <a:ext uri="{FF2B5EF4-FFF2-40B4-BE49-F238E27FC236}">
-                <a16:creationId xmlns:a16="http://schemas.microsoft.com/office/drawing/2014/main" id="{8E49C04E-045D-4053-8618-639AF0AC344D}"/>
+                <a16:creationId xmlns:a16="http://schemas.microsoft.com/office/drawing/2014/main" id="{90A084D7-3859-4820-8CFA-DDDD36428605}"/>
               </a:ext>
             </a:extLst>
           </p:cNvPr>
@@ -11878,7 +12128,7 @@
           <p:cNvPr id="8" name="">
             <a:extLst xmlns:a="http://schemas.openxmlformats.org/drawingml/2006/main">
               <a:ext uri="{FF2B5EF4-FFF2-40B4-BE49-F238E27FC236}">
-                <a16:creationId xmlns:a16="http://schemas.microsoft.com/office/drawing/2014/main" id="{E9457296-9A5D-4156-91B0-C6E0AC4ED18D}"/>
+                <a16:creationId xmlns:a16="http://schemas.microsoft.com/office/drawing/2014/main" id="{A4023587-8725-486A-9305-ADE98433887B}"/>
               </a:ext>
             </a:extLst>
           </p:cNvPr>
@@ -11935,7 +12185,7 @@
           <p:cNvPr id="9" name="">
             <a:extLst xmlns:a="http://schemas.openxmlformats.org/drawingml/2006/main">
               <a:ext uri="{FF2B5EF4-FFF2-40B4-BE49-F238E27FC236}">
-                <a16:creationId xmlns:a16="http://schemas.microsoft.com/office/drawing/2014/main" id="{1655A9E8-6974-4521-A1AE-600753F890A9}"/>
+                <a16:creationId xmlns:a16="http://schemas.microsoft.com/office/drawing/2014/main" id="{947A9A7C-7F5F-4269-8D38-8F0C751323A5}"/>
               </a:ext>
             </a:extLst>
           </p:cNvPr>
@@ -11992,7 +12242,7 @@
           <p:cNvPr id="10" name="">
             <a:extLst xmlns:a="http://schemas.openxmlformats.org/drawingml/2006/main">
               <a:ext uri="{FF2B5EF4-FFF2-40B4-BE49-F238E27FC236}">
-                <a16:creationId xmlns:a16="http://schemas.microsoft.com/office/drawing/2014/main" id="{EB032442-A405-4127-B821-A3870BF1BA9F}"/>
+                <a16:creationId xmlns:a16="http://schemas.microsoft.com/office/drawing/2014/main" id="{EEC0A1B4-78EF-4700-BFD3-80C27737BAF8}"/>
               </a:ext>
             </a:extLst>
           </p:cNvPr>
@@ -12049,7 +12299,7 @@
           <p:cNvPr id="11" name="">
             <a:extLst xmlns:a="http://schemas.openxmlformats.org/drawingml/2006/main">
               <a:ext uri="{FF2B5EF4-FFF2-40B4-BE49-F238E27FC236}">
-                <a16:creationId xmlns:a16="http://schemas.microsoft.com/office/drawing/2014/main" id="{2B3588DA-0B03-405E-9613-73C4EEBE9250}"/>
+                <a16:creationId xmlns:a16="http://schemas.microsoft.com/office/drawing/2014/main" id="{DB153483-427C-45FB-8CEA-CC977864E815}"/>
               </a:ext>
             </a:extLst>
           </p:cNvPr>
@@ -12083,7 +12333,7 @@
           <p:cNvPr id="12" name="">
             <a:extLst xmlns:a="http://schemas.openxmlformats.org/drawingml/2006/main">
               <a:ext uri="{FF2B5EF4-FFF2-40B4-BE49-F238E27FC236}">
-                <a16:creationId xmlns:a16="http://schemas.microsoft.com/office/drawing/2014/main" id="{0A659BEA-E9C3-4FAB-8358-7C6B655E335E}"/>
+                <a16:creationId xmlns:a16="http://schemas.microsoft.com/office/drawing/2014/main" id="{C4424377-EE71-4336-B8FB-08DA904815C8}"/>
               </a:ext>
             </a:extLst>
           </p:cNvPr>
@@ -12140,7 +12390,7 @@
           <p:cNvPr id="13" name="">
             <a:extLst xmlns:a="http://schemas.openxmlformats.org/drawingml/2006/main">
               <a:ext uri="{FF2B5EF4-FFF2-40B4-BE49-F238E27FC236}">
-                <a16:creationId xmlns:a16="http://schemas.microsoft.com/office/drawing/2014/main" id="{F462DDF1-0675-478D-A1CF-B88D4A286F12}"/>
+                <a16:creationId xmlns:a16="http://schemas.microsoft.com/office/drawing/2014/main" id="{75B1F540-A589-4AB8-9689-1A25577C4A47}"/>
               </a:ext>
             </a:extLst>
           </p:cNvPr>
@@ -12197,7 +12447,7 @@
           <p:cNvPr id="14" name="">
             <a:extLst xmlns:a="http://schemas.openxmlformats.org/drawingml/2006/main">
               <a:ext uri="{FF2B5EF4-FFF2-40B4-BE49-F238E27FC236}">
-                <a16:creationId xmlns:a16="http://schemas.microsoft.com/office/drawing/2014/main" id="{9B7E131A-8ED3-46E2-9D4A-63A8EF08DE5F}"/>
+                <a16:creationId xmlns:a16="http://schemas.microsoft.com/office/drawing/2014/main" id="{5E553143-62F0-4FFF-A070-9FC23D026C3C}"/>
               </a:ext>
             </a:extLst>
           </p:cNvPr>
@@ -12254,7 +12504,7 @@
           <p:cNvPr id="15" name="">
             <a:extLst xmlns:a="http://schemas.openxmlformats.org/drawingml/2006/main">
               <a:ext uri="{FF2B5EF4-FFF2-40B4-BE49-F238E27FC236}">
-                <a16:creationId xmlns:a16="http://schemas.microsoft.com/office/drawing/2014/main" id="{291D758A-D969-462A-9EFA-AAB31E34A214}"/>
+                <a16:creationId xmlns:a16="http://schemas.microsoft.com/office/drawing/2014/main" id="{F0F68376-50AE-428A-A64E-F1E219CC039D}"/>
               </a:ext>
             </a:extLst>
           </p:cNvPr>
@@ -12311,7 +12561,7 @@
           <p:cNvPr id="16" name="">
             <a:extLst xmlns:a="http://schemas.openxmlformats.org/drawingml/2006/main">
               <a:ext uri="{FF2B5EF4-FFF2-40B4-BE49-F238E27FC236}">
-                <a16:creationId xmlns:a16="http://schemas.microsoft.com/office/drawing/2014/main" id="{F70D4E75-C7CC-44C4-BE69-A1421B09EE00}"/>
+                <a16:creationId xmlns:a16="http://schemas.microsoft.com/office/drawing/2014/main" id="{B1678871-F1A4-4C15-B3B7-AE3BF3BD721F}"/>
               </a:ext>
             </a:extLst>
           </p:cNvPr>
@@ -12345,7 +12595,7 @@
           <p:cNvPr id="17" name="">
             <a:extLst xmlns:a="http://schemas.openxmlformats.org/drawingml/2006/main">
               <a:ext uri="{FF2B5EF4-FFF2-40B4-BE49-F238E27FC236}">
-                <a16:creationId xmlns:a16="http://schemas.microsoft.com/office/drawing/2014/main" id="{B2BD19A8-CE99-41CE-BFF0-3905FF2F99F1}"/>
+                <a16:creationId xmlns:a16="http://schemas.microsoft.com/office/drawing/2014/main" id="{7D550E13-B9B1-453A-88F6-AFC3CE12C346}"/>
               </a:ext>
             </a:extLst>
           </p:cNvPr>
@@ -12402,7 +12652,7 @@
           <p:cNvPr id="18" name="">
             <a:extLst xmlns:a="http://schemas.openxmlformats.org/drawingml/2006/main">
               <a:ext uri="{FF2B5EF4-FFF2-40B4-BE49-F238E27FC236}">
-                <a16:creationId xmlns:a16="http://schemas.microsoft.com/office/drawing/2014/main" id="{880B4AA5-3354-483D-80AF-3E73020DA6E0}"/>
+                <a16:creationId xmlns:a16="http://schemas.microsoft.com/office/drawing/2014/main" id="{47CC408B-A3FA-48D0-87BB-7337B8D0E019}"/>
               </a:ext>
             </a:extLst>
           </p:cNvPr>
@@ -12459,7 +12709,7 @@
           <p:cNvPr id="19" name="">
             <a:extLst xmlns:a="http://schemas.openxmlformats.org/drawingml/2006/main">
               <a:ext uri="{FF2B5EF4-FFF2-40B4-BE49-F238E27FC236}">
-                <a16:creationId xmlns:a16="http://schemas.microsoft.com/office/drawing/2014/main" id="{D5275EC1-4380-43F3-9516-5426498A1DC0}"/>
+                <a16:creationId xmlns:a16="http://schemas.microsoft.com/office/drawing/2014/main" id="{5B5E88AF-4FE9-4FE8-A4B6-C1C082E44B80}"/>
               </a:ext>
             </a:extLst>
           </p:cNvPr>
@@ -12516,7 +12766,7 @@
           <p:cNvPr id="20" name="">
             <a:extLst xmlns:a="http://schemas.openxmlformats.org/drawingml/2006/main">
               <a:ext uri="{FF2B5EF4-FFF2-40B4-BE49-F238E27FC236}">
-                <a16:creationId xmlns:a16="http://schemas.microsoft.com/office/drawing/2014/main" id="{6258E34B-95A3-4ABD-8426-479D20F187D1}"/>
+                <a16:creationId xmlns:a16="http://schemas.microsoft.com/office/drawing/2014/main" id="{2F63D951-223C-44C1-A5C5-B82DF6965FBB}"/>
               </a:ext>
             </a:extLst>
           </p:cNvPr>
@@ -12573,7 +12823,7 @@
           <p:cNvPr id="21" name="">
             <a:extLst xmlns:a="http://schemas.openxmlformats.org/drawingml/2006/main">
               <a:ext uri="{FF2B5EF4-FFF2-40B4-BE49-F238E27FC236}">
-                <a16:creationId xmlns:a16="http://schemas.microsoft.com/office/drawing/2014/main" id="{CEE053C3-996B-4541-81EA-415732F75DBC}"/>
+                <a16:creationId xmlns:a16="http://schemas.microsoft.com/office/drawing/2014/main" id="{95DB6F06-2ACF-4E50-8748-08809C14FA06}"/>
               </a:ext>
             </a:extLst>
           </p:cNvPr>
@@ -12607,7 +12857,7 @@
           <p:cNvPr id="22" name="">
             <a:extLst xmlns:a="http://schemas.openxmlformats.org/drawingml/2006/main">
               <a:ext uri="{FF2B5EF4-FFF2-40B4-BE49-F238E27FC236}">
-                <a16:creationId xmlns:a16="http://schemas.microsoft.com/office/drawing/2014/main" id="{23DCBD13-0BDF-4F07-95AB-5C820F95048C}"/>
+                <a16:creationId xmlns:a16="http://schemas.microsoft.com/office/drawing/2014/main" id="{1AA24A91-F556-497E-A0CC-8E41D04F3B69}"/>
               </a:ext>
             </a:extLst>
           </p:cNvPr>
@@ -12664,7 +12914,7 @@
           <p:cNvPr id="23" name="">
             <a:extLst xmlns:a="http://schemas.openxmlformats.org/drawingml/2006/main">
               <a:ext uri="{FF2B5EF4-FFF2-40B4-BE49-F238E27FC236}">
-                <a16:creationId xmlns:a16="http://schemas.microsoft.com/office/drawing/2014/main" id="{603A1B8F-A0DB-4C1B-8606-272C89FAA1D4}"/>
+                <a16:creationId xmlns:a16="http://schemas.microsoft.com/office/drawing/2014/main" id="{C1B9411A-F70F-4500-8B86-71A79B03563E}"/>
               </a:ext>
             </a:extLst>
           </p:cNvPr>
@@ -12721,7 +12971,7 @@
           <p:cNvPr id="24" name="">
             <a:extLst xmlns:a="http://schemas.openxmlformats.org/drawingml/2006/main">
               <a:ext uri="{FF2B5EF4-FFF2-40B4-BE49-F238E27FC236}">
-                <a16:creationId xmlns:a16="http://schemas.microsoft.com/office/drawing/2014/main" id="{4D6B38D7-D0B1-4F51-A35F-C5332D05FF1F}"/>
+                <a16:creationId xmlns:a16="http://schemas.microsoft.com/office/drawing/2014/main" id="{01EB0196-C89A-4AAF-820A-67AC694E5381}"/>
               </a:ext>
             </a:extLst>
           </p:cNvPr>
@@ -12778,7 +13028,7 @@
           <p:cNvPr id="25" name="">
             <a:extLst xmlns:a="http://schemas.openxmlformats.org/drawingml/2006/main">
               <a:ext uri="{FF2B5EF4-FFF2-40B4-BE49-F238E27FC236}">
-                <a16:creationId xmlns:a16="http://schemas.microsoft.com/office/drawing/2014/main" id="{AD7FDACE-1FB2-4F9C-ACB3-E7E4515FF608}"/>
+                <a16:creationId xmlns:a16="http://schemas.microsoft.com/office/drawing/2014/main" id="{EFDFE9B6-EAF1-4411-B1A0-1CD8601D1A0E}"/>
               </a:ext>
             </a:extLst>
           </p:cNvPr>
@@ -12835,7 +13085,7 @@
           <p:cNvPr id="26" name="">
             <a:extLst xmlns:a="http://schemas.openxmlformats.org/drawingml/2006/main">
               <a:ext uri="{FF2B5EF4-FFF2-40B4-BE49-F238E27FC236}">
-                <a16:creationId xmlns:a16="http://schemas.microsoft.com/office/drawing/2014/main" id="{E69A24A2-ACBE-44CA-B02D-D9537C9ADA38}"/>
+                <a16:creationId xmlns:a16="http://schemas.microsoft.com/office/drawing/2014/main" id="{AF420F97-5698-4A2F-A897-F73CDCAA5DD7}"/>
               </a:ext>
             </a:extLst>
           </p:cNvPr>
@@ -12869,7 +13119,7 @@
           <p:cNvPr id="27" name="">
             <a:extLst xmlns:a="http://schemas.openxmlformats.org/drawingml/2006/main">
               <a:ext uri="{FF2B5EF4-FFF2-40B4-BE49-F238E27FC236}">
-                <a16:creationId xmlns:a16="http://schemas.microsoft.com/office/drawing/2014/main" id="{5164A6BE-650A-411F-A5B5-B34B9DBE5EC4}"/>
+                <a16:creationId xmlns:a16="http://schemas.microsoft.com/office/drawing/2014/main" id="{7DB1A31D-F20C-44F8-A133-59FDAEFAA051}"/>
               </a:ext>
             </a:extLst>
           </p:cNvPr>
@@ -12926,7 +13176,7 @@
           <p:cNvPr id="28" name="">
             <a:extLst xmlns:a="http://schemas.openxmlformats.org/drawingml/2006/main">
               <a:ext uri="{FF2B5EF4-FFF2-40B4-BE49-F238E27FC236}">
-                <a16:creationId xmlns:a16="http://schemas.microsoft.com/office/drawing/2014/main" id="{FC2E3D68-C670-4160-B710-1C4A9FFBD60C}"/>
+                <a16:creationId xmlns:a16="http://schemas.microsoft.com/office/drawing/2014/main" id="{01F6C828-CBDB-4954-9BEA-197FD9A7C23B}"/>
               </a:ext>
             </a:extLst>
           </p:cNvPr>
@@ -12983,7 +13233,7 @@
           <p:cNvPr id="29" name="">
             <a:extLst xmlns:a="http://schemas.openxmlformats.org/drawingml/2006/main">
               <a:ext uri="{FF2B5EF4-FFF2-40B4-BE49-F238E27FC236}">
-                <a16:creationId xmlns:a16="http://schemas.microsoft.com/office/drawing/2014/main" id="{71F310A3-B3BC-44AE-9EA5-BDB871ED2C6A}"/>
+                <a16:creationId xmlns:a16="http://schemas.microsoft.com/office/drawing/2014/main" id="{C744F0E6-D668-4E80-B39E-D166317E6357}"/>
               </a:ext>
             </a:extLst>
           </p:cNvPr>
@@ -13040,7 +13290,7 @@
           <p:cNvPr id="30" name="">
             <a:extLst xmlns:a="http://schemas.openxmlformats.org/drawingml/2006/main">
               <a:ext uri="{FF2B5EF4-FFF2-40B4-BE49-F238E27FC236}">
-                <a16:creationId xmlns:a16="http://schemas.microsoft.com/office/drawing/2014/main" id="{75F526DE-9F7C-4597-BA69-DAD5B171A9FC}"/>
+                <a16:creationId xmlns:a16="http://schemas.microsoft.com/office/drawing/2014/main" id="{9BD0CBB6-6AAB-4B35-BC9B-197BA92213A6}"/>
               </a:ext>
             </a:extLst>
           </p:cNvPr>
@@ -13087,7 +13337,7 @@
                 <a:ea typeface="Arial"/>
                 <a:cs typeface="Arial"/>
               </a:rPr>
-              <a:t>A turma executa somente três comandos. Os comandos extensos ficam dentro dos scripts.</a:t>
+              <a:t>A turma digita os comandos dos scanners. O script permanece apenas na preparação da correção.</a:t>
             </a:r>
           </a:p>
         </p:txBody>
@@ -13095,7 +13345,7 @@
     </p:spTree>
     <p:extLst>
       <p:ext uri="{BB962C8B-B14F-4D97-AF65-F5344CB8AC3E}">
-        <p14:creationId xmlns:p14="http://schemas.microsoft.com/office/powerpoint/2010/main" val="1009423851"/>
+        <p14:creationId xmlns:p14="http://schemas.microsoft.com/office/powerpoint/2010/main" val="372521209"/>
       </p:ext>
     </p:extLst>
   </p:cSld>
@@ -13123,10 +13373,10 @@
       </p:grpSpPr>
       <p:sp>
         <p:nvSpPr>
-          <p:cNvPr id="18" name="">
-            <a:extLst xmlns:a="http://schemas.openxmlformats.org/drawingml/2006/main">
-              <a:ext uri="{FF2B5EF4-FFF2-40B4-BE49-F238E27FC236}">
-                <a16:creationId xmlns:a16="http://schemas.microsoft.com/office/drawing/2014/main" id="{C85BB26F-E71F-4CB7-B157-C211B9779EA9}"/>
+          <p:cNvPr id="20" name="">
+            <a:extLst xmlns:a="http://schemas.openxmlformats.org/drawingml/2006/main">
+              <a:ext uri="{FF2B5EF4-FFF2-40B4-BE49-F238E27FC236}">
+                <a16:creationId xmlns:a16="http://schemas.microsoft.com/office/drawing/2014/main" id="{7B993852-CA80-455C-98F8-4B75FEF02336}"/>
               </a:ext>
             </a:extLst>
           </p:cNvPr>
@@ -13158,7 +13408,7 @@
           <p:cNvPr id="2" name="">
             <a:extLst xmlns:a="http://schemas.openxmlformats.org/drawingml/2006/main">
               <a:ext uri="{FF2B5EF4-FFF2-40B4-BE49-F238E27FC236}">
-                <a16:creationId xmlns:a16="http://schemas.microsoft.com/office/drawing/2014/main" id="{274C613B-C927-45DC-BEE4-5014D1F36220}"/>
+                <a16:creationId xmlns:a16="http://schemas.microsoft.com/office/drawing/2014/main" id="{2B7A9C4F-6839-4896-9DB3-41B7DF500A78}"/>
               </a:ext>
             </a:extLst>
           </p:cNvPr>
@@ -13215,7 +13465,7 @@
           <p:cNvPr id="3" name="">
             <a:extLst xmlns:a="http://schemas.openxmlformats.org/drawingml/2006/main">
               <a:ext uri="{FF2B5EF4-FFF2-40B4-BE49-F238E27FC236}">
-                <a16:creationId xmlns:a16="http://schemas.microsoft.com/office/drawing/2014/main" id="{4F184DCC-8186-4E2B-A49B-0C71DF289A1E}"/>
+                <a16:creationId xmlns:a16="http://schemas.microsoft.com/office/drawing/2014/main" id="{46116791-75CE-43C1-8A3E-4359F712EE0C}"/>
               </a:ext>
             </a:extLst>
           </p:cNvPr>
@@ -13272,7 +13522,7 @@
           <p:cNvPr id="4" name="">
             <a:extLst xmlns:a="http://schemas.openxmlformats.org/drawingml/2006/main">
               <a:ext uri="{FF2B5EF4-FFF2-40B4-BE49-F238E27FC236}">
-                <a16:creationId xmlns:a16="http://schemas.microsoft.com/office/drawing/2014/main" id="{AD0D0DD1-F276-4A64-BD6A-84C2FEC9E36A}"/>
+                <a16:creationId xmlns:a16="http://schemas.microsoft.com/office/drawing/2014/main" id="{685CCB6E-9706-4F0D-8DA3-4799704C875F}"/>
               </a:ext>
             </a:extLst>
           </p:cNvPr>
@@ -13329,7 +13579,7 @@
           <p:cNvPr id="5" name="">
             <a:extLst xmlns:a="http://schemas.openxmlformats.org/drawingml/2006/main">
               <a:ext uri="{FF2B5EF4-FFF2-40B4-BE49-F238E27FC236}">
-                <a16:creationId xmlns:a16="http://schemas.microsoft.com/office/drawing/2014/main" id="{FFD7D6A4-1E8D-4A4E-880A-E5633EA40986}"/>
+                <a16:creationId xmlns:a16="http://schemas.microsoft.com/office/drawing/2014/main" id="{809A9A00-48BD-4E17-BD31-0B1D4A8DCCDA}"/>
               </a:ext>
             </a:extLst>
           </p:cNvPr>
@@ -13386,18 +13636,18 @@
           <p:cNvPr id="6" name="">
             <a:extLst xmlns:a="http://schemas.openxmlformats.org/drawingml/2006/main">
               <a:ext uri="{FF2B5EF4-FFF2-40B4-BE49-F238E27FC236}">
-                <a16:creationId xmlns:a16="http://schemas.microsoft.com/office/drawing/2014/main" id="{44A21C09-996C-423F-A04F-2E3C99DF7F9A}"/>
-              </a:ext>
-            </a:extLst>
-          </p:cNvPr>
-          <p:cNvSpPr>
-            <a:spLocks xmlns:a="http://schemas.openxmlformats.org/drawingml/2006/main" noGrp="1"/>
-          </p:cNvSpPr>
-          <p:nvPr/>
-        </p:nvSpPr>
-        <p:spPr>
-          <a:xfrm xmlns:a="http://schemas.openxmlformats.org/drawingml/2006/main">
-            <a:off x="762000" y="1657350"/>
+                <a16:creationId xmlns:a16="http://schemas.microsoft.com/office/drawing/2014/main" id="{3A62BC72-B5EC-430E-83BE-9075F4ECB382}"/>
+              </a:ext>
+            </a:extLst>
+          </p:cNvPr>
+          <p:cNvSpPr>
+            <a:spLocks xmlns:a="http://schemas.openxmlformats.org/drawingml/2006/main" noGrp="1"/>
+          </p:cNvSpPr>
+          <p:nvPr/>
+        </p:nvSpPr>
+        <p:spPr>
+          <a:xfrm xmlns:a="http://schemas.openxmlformats.org/drawingml/2006/main">
+            <a:off x="666750" y="1428750"/>
             <a:ext cx="685800" cy="590550"/>
           </a:xfrm>
           <a:prstGeom xmlns:a="http://schemas.openxmlformats.org/drawingml/2006/main" prst="rect">
@@ -13415,7 +13665,7 @@
           <a:lstStyle xmlns:a="http://schemas.openxmlformats.org/drawingml/2006/main"/>
           <a:p xmlns:a="http://schemas.openxmlformats.org/drawingml/2006/main">
             <a:pPr algn="ctr">
-              <a:defRPr sz="2550" b="1">
+              <a:defRPr sz="2400" b="1">
                 <a:solidFill>
                   <a:srgbClr val="00A6C8"/>
                 </a:solidFill>
@@ -13425,7 +13675,7 @@
               </a:defRPr>
             </a:pPr>
             <a:r>
-              <a:rPr sz="2550" b="1">
+              <a:rPr sz="2400" b="1">
                 <a:solidFill>
                   <a:srgbClr val="00A6C8"/>
                 </a:solidFill>
@@ -13443,19 +13693,19 @@
           <p:cNvPr id="7" name="">
             <a:extLst xmlns:a="http://schemas.openxmlformats.org/drawingml/2006/main">
               <a:ext uri="{FF2B5EF4-FFF2-40B4-BE49-F238E27FC236}">
-                <a16:creationId xmlns:a16="http://schemas.microsoft.com/office/drawing/2014/main" id="{138E8129-B9C5-4C0E-B8CC-D3E9F990529B}"/>
-              </a:ext>
-            </a:extLst>
-          </p:cNvPr>
-          <p:cNvSpPr>
-            <a:spLocks xmlns:a="http://schemas.openxmlformats.org/drawingml/2006/main" noGrp="1"/>
-          </p:cNvSpPr>
-          <p:nvPr/>
-        </p:nvSpPr>
-        <p:spPr>
-          <a:xfrm xmlns:a="http://schemas.openxmlformats.org/drawingml/2006/main">
-            <a:off x="1676400" y="1657350"/>
-            <a:ext cx="8953500" cy="666750"/>
+                <a16:creationId xmlns:a16="http://schemas.microsoft.com/office/drawing/2014/main" id="{BA7C495D-9F1E-4CC8-8435-CD8529C6CFD5}"/>
+              </a:ext>
+            </a:extLst>
+          </p:cNvPr>
+          <p:cNvSpPr>
+            <a:spLocks xmlns:a="http://schemas.openxmlformats.org/drawingml/2006/main" noGrp="1"/>
+          </p:cNvSpPr>
+          <p:nvPr/>
+        </p:nvSpPr>
+        <p:spPr>
+          <a:xfrm xmlns:a="http://schemas.openxmlformats.org/drawingml/2006/main">
+            <a:off x="1581150" y="1428750"/>
+            <a:ext cx="9620250" cy="666750"/>
           </a:xfrm>
           <a:prstGeom xmlns:a="http://schemas.openxmlformats.org/drawingml/2006/main" prst="rect">
             <a:avLst/>
@@ -13475,36 +13725,36 @@
           <p:cNvPr id="8" name="">
             <a:extLst xmlns:a="http://schemas.openxmlformats.org/drawingml/2006/main">
               <a:ext uri="{FF2B5EF4-FFF2-40B4-BE49-F238E27FC236}">
-                <a16:creationId xmlns:a16="http://schemas.microsoft.com/office/drawing/2014/main" id="{F82B2DDD-3692-486B-BD67-A7739A447882}"/>
-              </a:ext>
-            </a:extLst>
-          </p:cNvPr>
-          <p:cNvSpPr>
-            <a:spLocks xmlns:a="http://schemas.openxmlformats.org/drawingml/2006/main" noGrp="1"/>
-          </p:cNvSpPr>
-          <p:nvPr/>
-        </p:nvSpPr>
-        <p:spPr>
-          <a:xfrm xmlns:a="http://schemas.openxmlformats.org/drawingml/2006/main">
-            <a:off x="1924050" y="1733550"/>
-            <a:ext cx="8477250" cy="514350"/>
-          </a:xfrm>
-          <a:prstGeom xmlns:a="http://schemas.openxmlformats.org/drawingml/2006/main" prst="rect">
-            <a:avLst/>
-          </a:prstGeom>
-          <a:noFill xmlns:a="http://schemas.openxmlformats.org/drawingml/2006/main"/>
-          <a:ln xmlns:a="http://schemas.openxmlformats.org/drawingml/2006/main" w="0">
-            <a:noFill/>
-          </a:ln>
-        </p:spPr>
-        <p:txBody>
-          <a:bodyPr xmlns:a="http://schemas.openxmlformats.org/drawingml/2006/main" anchor="ctr">
-            <a:normAutofit fontScale="100000"/>
+                <a16:creationId xmlns:a16="http://schemas.microsoft.com/office/drawing/2014/main" id="{AB2854F1-237B-469F-9EFD-41AEF3B643A4}"/>
+              </a:ext>
+            </a:extLst>
+          </p:cNvPr>
+          <p:cNvSpPr>
+            <a:spLocks xmlns:a="http://schemas.openxmlformats.org/drawingml/2006/main" noGrp="1"/>
+          </p:cNvSpPr>
+          <p:nvPr/>
+        </p:nvSpPr>
+        <p:spPr>
+          <a:xfrm xmlns:a="http://schemas.openxmlformats.org/drawingml/2006/main">
+            <a:off x="1809750" y="1504950"/>
+            <a:ext cx="9163050" cy="514350"/>
+          </a:xfrm>
+          <a:prstGeom xmlns:a="http://schemas.openxmlformats.org/drawingml/2006/main" prst="rect">
+            <a:avLst/>
+          </a:prstGeom>
+          <a:noFill xmlns:a="http://schemas.openxmlformats.org/drawingml/2006/main"/>
+          <a:ln xmlns:a="http://schemas.openxmlformats.org/drawingml/2006/main" w="0">
+            <a:noFill/>
+          </a:ln>
+        </p:spPr>
+        <p:txBody>
+          <a:bodyPr xmlns:a="http://schemas.openxmlformats.org/drawingml/2006/main" anchor="ctr">
+            <a:normAutofit fontScale="88095"/>
           </a:bodyPr>
           <a:lstStyle xmlns:a="http://schemas.openxmlformats.org/drawingml/2006/main"/>
           <a:p xmlns:a="http://schemas.openxmlformats.org/drawingml/2006/main">
             <a:pPr>
-              <a:defRPr sz="1875">
+              <a:defRPr sz="1575">
                 <a:solidFill>
                   <a:srgbClr val="071A2F"/>
                 </a:solidFill>
@@ -13514,7 +13764,7 @@
               </a:defRPr>
             </a:pPr>
             <a:r>
-              <a:rPr sz="1875">
+              <a:rPr sz="1575">
                 <a:solidFill>
                   <a:srgbClr val="071A2F"/>
                 </a:solidFill>
@@ -13522,7 +13772,7 @@
                 <a:ea typeface="Consolas"/>
                 <a:cs typeface="Consolas"/>
               </a:rPr>
-              <a:t>.\scripts\run-lab.ps1 -Mode sast-red</a:t>
+              <a:t>docker compose --profile tools run --rm semgrep semgrep scan --config auto /workspace/target/juice-shop/routes/search.ts</a:t>
             </a:r>
           </a:p>
         </p:txBody>
@@ -13532,18 +13782,18 @@
           <p:cNvPr id="9" name="">
             <a:extLst xmlns:a="http://schemas.openxmlformats.org/drawingml/2006/main">
               <a:ext uri="{FF2B5EF4-FFF2-40B4-BE49-F238E27FC236}">
-                <a16:creationId xmlns:a16="http://schemas.microsoft.com/office/drawing/2014/main" id="{B79D1A9C-A1FB-4D85-93AA-3B734E990BFC}"/>
-              </a:ext>
-            </a:extLst>
-          </p:cNvPr>
-          <p:cNvSpPr>
-            <a:spLocks xmlns:a="http://schemas.openxmlformats.org/drawingml/2006/main" noGrp="1"/>
-          </p:cNvSpPr>
-          <p:nvPr/>
-        </p:nvSpPr>
-        <p:spPr>
-          <a:xfrm xmlns:a="http://schemas.openxmlformats.org/drawingml/2006/main">
-            <a:off x="762000" y="2724150"/>
+                <a16:creationId xmlns:a16="http://schemas.microsoft.com/office/drawing/2014/main" id="{B8AA0A7D-969C-48D7-B0A4-7007F7DC68D9}"/>
+              </a:ext>
+            </a:extLst>
+          </p:cNvPr>
+          <p:cNvSpPr>
+            <a:spLocks xmlns:a="http://schemas.openxmlformats.org/drawingml/2006/main" noGrp="1"/>
+          </p:cNvSpPr>
+          <p:nvPr/>
+        </p:nvSpPr>
+        <p:spPr>
+          <a:xfrm xmlns:a="http://schemas.openxmlformats.org/drawingml/2006/main">
+            <a:off x="666750" y="2305050"/>
             <a:ext cx="685800" cy="590550"/>
           </a:xfrm>
           <a:prstGeom xmlns:a="http://schemas.openxmlformats.org/drawingml/2006/main" prst="rect">
@@ -13561,7 +13811,7 @@
           <a:lstStyle xmlns:a="http://schemas.openxmlformats.org/drawingml/2006/main"/>
           <a:p xmlns:a="http://schemas.openxmlformats.org/drawingml/2006/main">
             <a:pPr algn="ctr">
-              <a:defRPr sz="2550" b="1">
+              <a:defRPr sz="2400" b="1">
                 <a:solidFill>
                   <a:srgbClr val="00A6C8"/>
                 </a:solidFill>
@@ -13571,7 +13821,7 @@
               </a:defRPr>
             </a:pPr>
             <a:r>
-              <a:rPr sz="2550" b="1">
+              <a:rPr sz="2400" b="1">
                 <a:solidFill>
                   <a:srgbClr val="00A6C8"/>
                 </a:solidFill>
@@ -13589,19 +13839,19 @@
           <p:cNvPr id="10" name="">
             <a:extLst xmlns:a="http://schemas.openxmlformats.org/drawingml/2006/main">
               <a:ext uri="{FF2B5EF4-FFF2-40B4-BE49-F238E27FC236}">
-                <a16:creationId xmlns:a16="http://schemas.microsoft.com/office/drawing/2014/main" id="{A4F25C21-C2D9-4CFE-B557-689C6A67A199}"/>
-              </a:ext>
-            </a:extLst>
-          </p:cNvPr>
-          <p:cNvSpPr>
-            <a:spLocks xmlns:a="http://schemas.openxmlformats.org/drawingml/2006/main" noGrp="1"/>
-          </p:cNvSpPr>
-          <p:nvPr/>
-        </p:nvSpPr>
-        <p:spPr>
-          <a:xfrm xmlns:a="http://schemas.openxmlformats.org/drawingml/2006/main">
-            <a:off x="1676400" y="2724150"/>
-            <a:ext cx="8953500" cy="666750"/>
+                <a16:creationId xmlns:a16="http://schemas.microsoft.com/office/drawing/2014/main" id="{ED9D4BF9-E6BF-49DD-93DE-E2F016AEB284}"/>
+              </a:ext>
+            </a:extLst>
+          </p:cNvPr>
+          <p:cNvSpPr>
+            <a:spLocks xmlns:a="http://schemas.openxmlformats.org/drawingml/2006/main" noGrp="1"/>
+          </p:cNvSpPr>
+          <p:nvPr/>
+        </p:nvSpPr>
+        <p:spPr>
+          <a:xfrm xmlns:a="http://schemas.openxmlformats.org/drawingml/2006/main">
+            <a:off x="1581150" y="2305050"/>
+            <a:ext cx="9620250" cy="666750"/>
           </a:xfrm>
           <a:prstGeom xmlns:a="http://schemas.openxmlformats.org/drawingml/2006/main" prst="rect">
             <a:avLst/>
@@ -13621,19 +13871,19 @@
           <p:cNvPr id="11" name="">
             <a:extLst xmlns:a="http://schemas.openxmlformats.org/drawingml/2006/main">
               <a:ext uri="{FF2B5EF4-FFF2-40B4-BE49-F238E27FC236}">
-                <a16:creationId xmlns:a16="http://schemas.microsoft.com/office/drawing/2014/main" id="{388645DE-9EA7-492B-BC7F-424D12457D19}"/>
-              </a:ext>
-            </a:extLst>
-          </p:cNvPr>
-          <p:cNvSpPr>
-            <a:spLocks xmlns:a="http://schemas.openxmlformats.org/drawingml/2006/main" noGrp="1"/>
-          </p:cNvSpPr>
-          <p:nvPr/>
-        </p:nvSpPr>
-        <p:spPr>
-          <a:xfrm xmlns:a="http://schemas.openxmlformats.org/drawingml/2006/main">
-            <a:off x="1924050" y="2800350"/>
-            <a:ext cx="8477250" cy="514350"/>
+                <a16:creationId xmlns:a16="http://schemas.microsoft.com/office/drawing/2014/main" id="{AB32D7D9-3C69-4C3D-9AC1-CE85C6712E27}"/>
+              </a:ext>
+            </a:extLst>
+          </p:cNvPr>
+          <p:cNvSpPr>
+            <a:spLocks xmlns:a="http://schemas.openxmlformats.org/drawingml/2006/main" noGrp="1"/>
+          </p:cNvSpPr>
+          <p:nvPr/>
+        </p:nvSpPr>
+        <p:spPr>
+          <a:xfrm xmlns:a="http://schemas.openxmlformats.org/drawingml/2006/main">
+            <a:off x="1809750" y="2381250"/>
+            <a:ext cx="9163050" cy="514350"/>
           </a:xfrm>
           <a:prstGeom xmlns:a="http://schemas.openxmlformats.org/drawingml/2006/main" prst="rect">
             <a:avLst/>
@@ -13650,7 +13900,7 @@
           <a:lstStyle xmlns:a="http://schemas.openxmlformats.org/drawingml/2006/main"/>
           <a:p xmlns:a="http://schemas.openxmlformats.org/drawingml/2006/main">
             <a:pPr>
-              <a:defRPr sz="1875">
+              <a:defRPr sz="1575">
                 <a:solidFill>
                   <a:srgbClr val="071A2F"/>
                 </a:solidFill>
@@ -13660,7 +13910,7 @@
               </a:defRPr>
             </a:pPr>
             <a:r>
-              <a:rPr sz="1875">
+              <a:rPr sz="1575">
                 <a:solidFill>
                   <a:srgbClr val="071A2F"/>
                 </a:solidFill>
@@ -13668,7 +13918,7 @@
                 <a:ea typeface="Consolas"/>
                 <a:cs typeface="Consolas"/>
               </a:rPr>
-              <a:t>.\scripts\run-lab.ps1 -Mode sast-green</a:t>
+              <a:t>.\scripts\prepare-green.ps1</a:t>
             </a:r>
           </a:p>
         </p:txBody>
@@ -13678,18 +13928,18 @@
           <p:cNvPr id="12" name="">
             <a:extLst xmlns:a="http://schemas.openxmlformats.org/drawingml/2006/main">
               <a:ext uri="{FF2B5EF4-FFF2-40B4-BE49-F238E27FC236}">
-                <a16:creationId xmlns:a16="http://schemas.microsoft.com/office/drawing/2014/main" id="{4498F963-4AB6-498C-ADDA-2F44EA8DE575}"/>
-              </a:ext>
-            </a:extLst>
-          </p:cNvPr>
-          <p:cNvSpPr>
-            <a:spLocks xmlns:a="http://schemas.openxmlformats.org/drawingml/2006/main" noGrp="1"/>
-          </p:cNvSpPr>
-          <p:nvPr/>
-        </p:nvSpPr>
-        <p:spPr>
-          <a:xfrm xmlns:a="http://schemas.openxmlformats.org/drawingml/2006/main">
-            <a:off x="762000" y="3790950"/>
+                <a16:creationId xmlns:a16="http://schemas.microsoft.com/office/drawing/2014/main" id="{B70CBCA0-3036-44AC-9FCD-7C350BA86BAB}"/>
+              </a:ext>
+            </a:extLst>
+          </p:cNvPr>
+          <p:cNvSpPr>
+            <a:spLocks xmlns:a="http://schemas.openxmlformats.org/drawingml/2006/main" noGrp="1"/>
+          </p:cNvSpPr>
+          <p:nvPr/>
+        </p:nvSpPr>
+        <p:spPr>
+          <a:xfrm xmlns:a="http://schemas.openxmlformats.org/drawingml/2006/main">
+            <a:off x="666750" y="3181350"/>
             <a:ext cx="685800" cy="590550"/>
           </a:xfrm>
           <a:prstGeom xmlns:a="http://schemas.openxmlformats.org/drawingml/2006/main" prst="rect">
@@ -13707,7 +13957,7 @@
           <a:lstStyle xmlns:a="http://schemas.openxmlformats.org/drawingml/2006/main"/>
           <a:p xmlns:a="http://schemas.openxmlformats.org/drawingml/2006/main">
             <a:pPr algn="ctr">
-              <a:defRPr sz="2550" b="1">
+              <a:defRPr sz="2400" b="1">
                 <a:solidFill>
                   <a:srgbClr val="00A6C8"/>
                 </a:solidFill>
@@ -13717,7 +13967,7 @@
               </a:defRPr>
             </a:pPr>
             <a:r>
-              <a:rPr sz="2550" b="1">
+              <a:rPr sz="2400" b="1">
                 <a:solidFill>
                   <a:srgbClr val="00A6C8"/>
                 </a:solidFill>
@@ -13735,19 +13985,19 @@
           <p:cNvPr id="13" name="">
             <a:extLst xmlns:a="http://schemas.openxmlformats.org/drawingml/2006/main">
               <a:ext uri="{FF2B5EF4-FFF2-40B4-BE49-F238E27FC236}">
-                <a16:creationId xmlns:a16="http://schemas.microsoft.com/office/drawing/2014/main" id="{0AC6D50E-B70A-480D-A167-EE9FE984FF29}"/>
-              </a:ext>
-            </a:extLst>
-          </p:cNvPr>
-          <p:cNvSpPr>
-            <a:spLocks xmlns:a="http://schemas.openxmlformats.org/drawingml/2006/main" noGrp="1"/>
-          </p:cNvSpPr>
-          <p:nvPr/>
-        </p:nvSpPr>
-        <p:spPr>
-          <a:xfrm xmlns:a="http://schemas.openxmlformats.org/drawingml/2006/main">
-            <a:off x="1676400" y="3790950"/>
-            <a:ext cx="8953500" cy="666750"/>
+                <a16:creationId xmlns:a16="http://schemas.microsoft.com/office/drawing/2014/main" id="{CCAECA97-3F53-45F8-AE34-434D46F74FEF}"/>
+              </a:ext>
+            </a:extLst>
+          </p:cNvPr>
+          <p:cNvSpPr>
+            <a:spLocks xmlns:a="http://schemas.openxmlformats.org/drawingml/2006/main" noGrp="1"/>
+          </p:cNvSpPr>
+          <p:nvPr/>
+        </p:nvSpPr>
+        <p:spPr>
+          <a:xfrm xmlns:a="http://schemas.openxmlformats.org/drawingml/2006/main">
+            <a:off x="1581150" y="3181350"/>
+            <a:ext cx="9620250" cy="666750"/>
           </a:xfrm>
           <a:prstGeom xmlns:a="http://schemas.openxmlformats.org/drawingml/2006/main" prst="rect">
             <a:avLst/>
@@ -13767,36 +14017,36 @@
           <p:cNvPr id="14" name="">
             <a:extLst xmlns:a="http://schemas.openxmlformats.org/drawingml/2006/main">
               <a:ext uri="{FF2B5EF4-FFF2-40B4-BE49-F238E27FC236}">
-                <a16:creationId xmlns:a16="http://schemas.microsoft.com/office/drawing/2014/main" id="{0CEBD04E-F02A-4069-9D17-5C890A80F101}"/>
-              </a:ext>
-            </a:extLst>
-          </p:cNvPr>
-          <p:cNvSpPr>
-            <a:spLocks xmlns:a="http://schemas.openxmlformats.org/drawingml/2006/main" noGrp="1"/>
-          </p:cNvSpPr>
-          <p:nvPr/>
-        </p:nvSpPr>
-        <p:spPr>
-          <a:xfrm xmlns:a="http://schemas.openxmlformats.org/drawingml/2006/main">
-            <a:off x="1924050" y="3867150"/>
-            <a:ext cx="8477250" cy="514350"/>
-          </a:xfrm>
-          <a:prstGeom xmlns:a="http://schemas.openxmlformats.org/drawingml/2006/main" prst="rect">
-            <a:avLst/>
-          </a:prstGeom>
-          <a:noFill xmlns:a="http://schemas.openxmlformats.org/drawingml/2006/main"/>
-          <a:ln xmlns:a="http://schemas.openxmlformats.org/drawingml/2006/main" w="0">
-            <a:noFill/>
-          </a:ln>
-        </p:spPr>
-        <p:txBody>
-          <a:bodyPr xmlns:a="http://schemas.openxmlformats.org/drawingml/2006/main" anchor="ctr">
-            <a:normAutofit fontScale="100000"/>
+                <a16:creationId xmlns:a16="http://schemas.microsoft.com/office/drawing/2014/main" id="{403450E1-44DF-439E-96F2-54406AD6C5D1}"/>
+              </a:ext>
+            </a:extLst>
+          </p:cNvPr>
+          <p:cNvSpPr>
+            <a:spLocks xmlns:a="http://schemas.openxmlformats.org/drawingml/2006/main" noGrp="1"/>
+          </p:cNvSpPr>
+          <p:nvPr/>
+        </p:nvSpPr>
+        <p:spPr>
+          <a:xfrm xmlns:a="http://schemas.openxmlformats.org/drawingml/2006/main">
+            <a:off x="1809750" y="3257550"/>
+            <a:ext cx="9163050" cy="514350"/>
+          </a:xfrm>
+          <a:prstGeom xmlns:a="http://schemas.openxmlformats.org/drawingml/2006/main" prst="rect">
+            <a:avLst/>
+          </a:prstGeom>
+          <a:noFill xmlns:a="http://schemas.openxmlformats.org/drawingml/2006/main"/>
+          <a:ln xmlns:a="http://schemas.openxmlformats.org/drawingml/2006/main" w="0">
+            <a:noFill/>
+          </a:ln>
+        </p:spPr>
+        <p:txBody>
+          <a:bodyPr xmlns:a="http://schemas.openxmlformats.org/drawingml/2006/main" anchor="ctr">
+            <a:normAutofit fontScale="88095"/>
           </a:bodyPr>
           <a:lstStyle xmlns:a="http://schemas.openxmlformats.org/drawingml/2006/main"/>
           <a:p xmlns:a="http://schemas.openxmlformats.org/drawingml/2006/main">
             <a:pPr>
-              <a:defRPr sz="1875">
+              <a:defRPr sz="1575">
                 <a:solidFill>
                   <a:srgbClr val="071A2F"/>
                 </a:solidFill>
@@ -13806,7 +14056,7 @@
               </a:defRPr>
             </a:pPr>
             <a:r>
-              <a:rPr sz="1875">
+              <a:rPr sz="1575">
                 <a:solidFill>
                   <a:srgbClr val="071A2F"/>
                 </a:solidFill>
@@ -13814,7 +14064,7 @@
                 <a:ea typeface="Consolas"/>
                 <a:cs typeface="Consolas"/>
               </a:rPr>
-              <a:t>.\scripts\run-lab.ps1 -Mode dast</a:t>
+              <a:t>docker compose --profile tools run --rm semgrep semgrep scan --config auto /workspace/target/juice-shop-fixed/routes/search.ts</a:t>
             </a:r>
           </a:p>
         </p:txBody>
@@ -13824,19 +14074,188 @@
           <p:cNvPr id="15" name="">
             <a:extLst xmlns:a="http://schemas.openxmlformats.org/drawingml/2006/main">
               <a:ext uri="{FF2B5EF4-FFF2-40B4-BE49-F238E27FC236}">
-                <a16:creationId xmlns:a16="http://schemas.microsoft.com/office/drawing/2014/main" id="{B6D5934B-E5BA-4698-A35A-65B4D50A57BC}"/>
-              </a:ext>
-            </a:extLst>
-          </p:cNvPr>
-          <p:cNvSpPr>
-            <a:spLocks xmlns:a="http://schemas.openxmlformats.org/drawingml/2006/main" noGrp="1"/>
-          </p:cNvSpPr>
-          <p:nvPr/>
-        </p:nvSpPr>
-        <p:spPr>
-          <a:xfrm xmlns:a="http://schemas.openxmlformats.org/drawingml/2006/main">
-            <a:off x="762000" y="4953000"/>
-            <a:ext cx="10096500" cy="19050"/>
+                <a16:creationId xmlns:a16="http://schemas.microsoft.com/office/drawing/2014/main" id="{CC13B122-A1D5-4027-B0CD-E94BBFEB6E08}"/>
+              </a:ext>
+            </a:extLst>
+          </p:cNvPr>
+          <p:cNvSpPr>
+            <a:spLocks xmlns:a="http://schemas.openxmlformats.org/drawingml/2006/main" noGrp="1"/>
+          </p:cNvSpPr>
+          <p:nvPr/>
+        </p:nvSpPr>
+        <p:spPr>
+          <a:xfrm xmlns:a="http://schemas.openxmlformats.org/drawingml/2006/main">
+            <a:off x="666750" y="4057650"/>
+            <a:ext cx="685800" cy="590550"/>
+          </a:xfrm>
+          <a:prstGeom xmlns:a="http://schemas.openxmlformats.org/drawingml/2006/main" prst="rect">
+            <a:avLst/>
+          </a:prstGeom>
+          <a:noFill xmlns:a="http://schemas.openxmlformats.org/drawingml/2006/main"/>
+          <a:ln xmlns:a="http://schemas.openxmlformats.org/drawingml/2006/main" w="0">
+            <a:noFill/>
+          </a:ln>
+        </p:spPr>
+        <p:txBody>
+          <a:bodyPr xmlns:a="http://schemas.openxmlformats.org/drawingml/2006/main" anchor="ctr">
+            <a:normAutofit fontScale="100000"/>
+          </a:bodyPr>
+          <a:lstStyle xmlns:a="http://schemas.openxmlformats.org/drawingml/2006/main"/>
+          <a:p xmlns:a="http://schemas.openxmlformats.org/drawingml/2006/main">
+            <a:pPr algn="ctr">
+              <a:defRPr sz="2400" b="1">
+                <a:solidFill>
+                  <a:srgbClr val="00A6C8"/>
+                </a:solidFill>
+                <a:latin typeface="Arial"/>
+                <a:ea typeface="Arial"/>
+                <a:cs typeface="Arial"/>
+              </a:defRPr>
+            </a:pPr>
+            <a:r>
+              <a:rPr sz="2400" b="1">
+                <a:solidFill>
+                  <a:srgbClr val="00A6C8"/>
+                </a:solidFill>
+                <a:latin typeface="Arial"/>
+                <a:ea typeface="Arial"/>
+                <a:cs typeface="Arial"/>
+              </a:rPr>
+              <a:t>04</a:t>
+            </a:r>
+          </a:p>
+        </p:txBody>
+      </p:sp>
+      <p:sp>
+        <p:nvSpPr>
+          <p:cNvPr id="16" name="">
+            <a:extLst xmlns:a="http://schemas.openxmlformats.org/drawingml/2006/main">
+              <a:ext uri="{FF2B5EF4-FFF2-40B4-BE49-F238E27FC236}">
+                <a16:creationId xmlns:a16="http://schemas.microsoft.com/office/drawing/2014/main" id="{1C1B9502-1052-4648-9A8D-768F5EBA04CC}"/>
+              </a:ext>
+            </a:extLst>
+          </p:cNvPr>
+          <p:cNvSpPr>
+            <a:spLocks xmlns:a="http://schemas.openxmlformats.org/drawingml/2006/main" noGrp="1"/>
+          </p:cNvSpPr>
+          <p:nvPr/>
+        </p:nvSpPr>
+        <p:spPr>
+          <a:xfrm xmlns:a="http://schemas.openxmlformats.org/drawingml/2006/main">
+            <a:off x="1581150" y="4057650"/>
+            <a:ext cx="9620250" cy="666750"/>
+          </a:xfrm>
+          <a:prstGeom xmlns:a="http://schemas.openxmlformats.org/drawingml/2006/main" prst="rect">
+            <a:avLst/>
+          </a:prstGeom>
+          <a:solidFill xmlns:a="http://schemas.openxmlformats.org/drawingml/2006/main">
+            <a:srgbClr val="F0F3F5"/>
+          </a:solidFill>
+          <a:ln xmlns:a="http://schemas.openxmlformats.org/drawingml/2006/main" w="9525">
+            <a:solidFill>
+              <a:srgbClr val="D4DEE5"/>
+            </a:solidFill>
+          </a:ln>
+        </p:spPr>
+      </p:sp>
+      <p:sp>
+        <p:nvSpPr>
+          <p:cNvPr id="17" name="">
+            <a:extLst xmlns:a="http://schemas.openxmlformats.org/drawingml/2006/main">
+              <a:ext uri="{FF2B5EF4-FFF2-40B4-BE49-F238E27FC236}">
+                <a16:creationId xmlns:a16="http://schemas.microsoft.com/office/drawing/2014/main" id="{E51D329D-CAD5-40A6-90DE-44CF2D32AD9B}"/>
+              </a:ext>
+            </a:extLst>
+          </p:cNvPr>
+          <p:cNvSpPr>
+            <a:spLocks xmlns:a="http://schemas.openxmlformats.org/drawingml/2006/main" noGrp="1"/>
+          </p:cNvSpPr>
+          <p:nvPr/>
+        </p:nvSpPr>
+        <p:spPr>
+          <a:xfrm xmlns:a="http://schemas.openxmlformats.org/drawingml/2006/main">
+            <a:off x="1809750" y="4133850"/>
+            <a:ext cx="9163050" cy="514350"/>
+          </a:xfrm>
+          <a:prstGeom xmlns:a="http://schemas.openxmlformats.org/drawingml/2006/main" prst="rect">
+            <a:avLst/>
+          </a:prstGeom>
+          <a:noFill xmlns:a="http://schemas.openxmlformats.org/drawingml/2006/main"/>
+          <a:ln xmlns:a="http://schemas.openxmlformats.org/drawingml/2006/main" w="0">
+            <a:noFill/>
+          </a:ln>
+        </p:spPr>
+        <p:txBody>
+          <a:bodyPr xmlns:a="http://schemas.openxmlformats.org/drawingml/2006/main" anchor="ctr">
+            <a:normAutofit fontScale="88095"/>
+          </a:bodyPr>
+          <a:lstStyle xmlns:a="http://schemas.openxmlformats.org/drawingml/2006/main"/>
+          <a:p xmlns:a="http://schemas.openxmlformats.org/drawingml/2006/main">
+            <a:pPr>
+              <a:defRPr sz="1575">
+                <a:solidFill>
+                  <a:srgbClr val="071A2F"/>
+                </a:solidFill>
+                <a:latin typeface="Consolas"/>
+                <a:ea typeface="Consolas"/>
+                <a:cs typeface="Consolas"/>
+              </a:defRPr>
+            </a:pPr>
+            <a:r>
+              <a:rPr sz="1575">
+                <a:solidFill>
+                  <a:srgbClr val="071A2F"/>
+                </a:solidFill>
+                <a:latin typeface="Consolas"/>
+                <a:ea typeface="Consolas"/>
+                <a:cs typeface="Consolas"/>
+              </a:rPr>
+              <a:t>docker compose up -d juice-shop</a:t>
+            </a:r>
+          </a:p>
+          <a:p xmlns:a="http://schemas.openxmlformats.org/drawingml/2006/main">
+            <a:pPr>
+              <a:defRPr sz="1575">
+                <a:solidFill>
+                  <a:srgbClr val="071A2F"/>
+                </a:solidFill>
+                <a:latin typeface="Consolas"/>
+                <a:ea typeface="Consolas"/>
+                <a:cs typeface="Consolas"/>
+              </a:defRPr>
+            </a:pPr>
+            <a:r>
+              <a:rPr sz="1575">
+                <a:solidFill>
+                  <a:srgbClr val="071A2F"/>
+                </a:solidFill>
+                <a:latin typeface="Consolas"/>
+                <a:ea typeface="Consolas"/>
+                <a:cs typeface="Consolas"/>
+              </a:rPr>
+              <a:t>docker compose --profile tools run --rm zap</a:t>
+            </a:r>
+          </a:p>
+        </p:txBody>
+      </p:sp>
+      <p:sp>
+        <p:nvSpPr>
+          <p:cNvPr id="18" name="">
+            <a:extLst xmlns:a="http://schemas.openxmlformats.org/drawingml/2006/main">
+              <a:ext uri="{FF2B5EF4-FFF2-40B4-BE49-F238E27FC236}">
+                <a16:creationId xmlns:a16="http://schemas.microsoft.com/office/drawing/2014/main" id="{000438A9-2D79-449A-AA95-AF97065D9385}"/>
+              </a:ext>
+            </a:extLst>
+          </p:cNvPr>
+          <p:cNvSpPr>
+            <a:spLocks xmlns:a="http://schemas.openxmlformats.org/drawingml/2006/main" noGrp="1"/>
+          </p:cNvSpPr>
+          <p:nvPr/>
+        </p:nvSpPr>
+        <p:spPr>
+          <a:xfrm xmlns:a="http://schemas.openxmlformats.org/drawingml/2006/main">
+            <a:off x="762000" y="5048250"/>
+            <a:ext cx="10287000" cy="19050"/>
           </a:xfrm>
           <a:prstGeom xmlns:a="http://schemas.openxmlformats.org/drawingml/2006/main" prst="rect">
             <a:avLst/>
@@ -13853,137 +14272,57 @@
       </p:sp>
       <p:sp>
         <p:nvSpPr>
-          <p:cNvPr id="16" name="">
-            <a:extLst xmlns:a="http://schemas.openxmlformats.org/drawingml/2006/main">
-              <a:ext uri="{FF2B5EF4-FFF2-40B4-BE49-F238E27FC236}">
-                <a16:creationId xmlns:a16="http://schemas.microsoft.com/office/drawing/2014/main" id="{7A835B9D-286B-4430-95BA-08FCFD86F018}"/>
-              </a:ext>
-            </a:extLst>
-          </p:cNvPr>
-          <p:cNvSpPr>
-            <a:spLocks xmlns:a="http://schemas.openxmlformats.org/drawingml/2006/main" noGrp="1"/>
-          </p:cNvSpPr>
-          <p:nvPr/>
-        </p:nvSpPr>
-        <p:spPr>
-          <a:xfrm xmlns:a="http://schemas.openxmlformats.org/drawingml/2006/main">
-            <a:off x="762000" y="5219700"/>
-            <a:ext cx="3333750" cy="342900"/>
-          </a:xfrm>
-          <a:prstGeom xmlns:a="http://schemas.openxmlformats.org/drawingml/2006/main" prst="rect">
-            <a:avLst/>
-          </a:prstGeom>
-          <a:noFill xmlns:a="http://schemas.openxmlformats.org/drawingml/2006/main"/>
-          <a:ln xmlns:a="http://schemas.openxmlformats.org/drawingml/2006/main" w="0">
-            <a:noFill/>
-          </a:ln>
-        </p:spPr>
-        <p:txBody>
-          <a:bodyPr xmlns:a="http://schemas.openxmlformats.org/drawingml/2006/main" anchor="ctr">
-            <a:normAutofit fontScale="95652"/>
-          </a:bodyPr>
-          <a:lstStyle xmlns:a="http://schemas.openxmlformats.org/drawingml/2006/main"/>
-          <a:p xmlns:a="http://schemas.openxmlformats.org/drawingml/2006/main">
-            <a:pPr>
-              <a:defRPr sz="1725" b="1">
-                <a:solidFill>
-                  <a:srgbClr val="E14B64"/>
-                </a:solidFill>
-                <a:latin typeface="Arial"/>
-                <a:ea typeface="Arial"/>
-                <a:cs typeface="Arial"/>
-              </a:defRPr>
-            </a:pPr>
-            <a:r>
-              <a:rPr sz="1725" b="1">
-                <a:solidFill>
-                  <a:srgbClr val="E14B64"/>
-                </a:solidFill>
-                <a:latin typeface="Arial"/>
-                <a:ea typeface="Arial"/>
-                <a:cs typeface="Arial"/>
-              </a:rPr>
-              <a:t>Perguntas de verificação</a:t>
-            </a:r>
-          </a:p>
-        </p:txBody>
-      </p:sp>
-      <p:sp>
-        <p:nvSpPr>
-          <p:cNvPr id="17" name="">
-            <a:extLst xmlns:a="http://schemas.openxmlformats.org/drawingml/2006/main">
-              <a:ext uri="{FF2B5EF4-FFF2-40B4-BE49-F238E27FC236}">
-                <a16:creationId xmlns:a16="http://schemas.microsoft.com/office/drawing/2014/main" id="{B3D82283-B912-4544-8C10-6B66DFDADA78}"/>
-              </a:ext>
-            </a:extLst>
-          </p:cNvPr>
-          <p:cNvSpPr>
-            <a:spLocks xmlns:a="http://schemas.openxmlformats.org/drawingml/2006/main" noGrp="1"/>
-          </p:cNvSpPr>
-          <p:nvPr/>
-        </p:nvSpPr>
-        <p:spPr>
-          <a:xfrm xmlns:a="http://schemas.openxmlformats.org/drawingml/2006/main">
-            <a:off x="4095750" y="5105400"/>
-            <a:ext cx="6953250" cy="914400"/>
-          </a:xfrm>
-          <a:prstGeom xmlns:a="http://schemas.openxmlformats.org/drawingml/2006/main" prst="rect">
-            <a:avLst/>
-          </a:prstGeom>
-          <a:noFill xmlns:a="http://schemas.openxmlformats.org/drawingml/2006/main"/>
-          <a:ln xmlns:a="http://schemas.openxmlformats.org/drawingml/2006/main" w="0">
-            <a:noFill/>
-          </a:ln>
-        </p:spPr>
-        <p:txBody>
-          <a:bodyPr xmlns:a="http://schemas.openxmlformats.org/drawingml/2006/main" anchor="ctr">
-            <a:normAutofit fontScale="100000"/>
-          </a:bodyPr>
-          <a:lstStyle xmlns:a="http://schemas.openxmlformats.org/drawingml/2006/main"/>
-          <a:p xmlns:a="http://schemas.openxmlformats.org/drawingml/2006/main">
-            <a:pPr>
-              <a:defRPr sz="1725">
-                <a:solidFill>
-                  <a:srgbClr val="13202C"/>
-                </a:solidFill>
-                <a:latin typeface="Arial"/>
-                <a:ea typeface="Arial"/>
-                <a:cs typeface="Arial"/>
-              </a:defRPr>
-            </a:pPr>
-            <a:r>
-              <a:rPr sz="1725">
-                <a:solidFill>
-                  <a:srgbClr val="13202C"/>
-                </a:solidFill>
-                <a:latin typeface="Arial"/>
-                <a:ea typeface="Arial"/>
-                <a:cs typeface="Arial"/>
-              </a:rPr>
-              <a:t>1. Quantos HIGH aparecem no Semgrep red?</a:t>
-            </a:r>
-          </a:p>
-          <a:p xmlns:a="http://schemas.openxmlformats.org/drawingml/2006/main">
-            <a:pPr>
-              <a:defRPr sz="1725">
-                <a:solidFill>
-                  <a:srgbClr val="13202C"/>
-                </a:solidFill>
-                <a:latin typeface="Arial"/>
-                <a:ea typeface="Arial"/>
-                <a:cs typeface="Arial"/>
-              </a:defRPr>
-            </a:pPr>
-            <a:r>
-              <a:rPr sz="1725">
-                <a:solidFill>
-                  <a:srgbClr val="13202C"/>
-                </a:solidFill>
-                <a:latin typeface="Arial"/>
-                <a:ea typeface="Arial"/>
-                <a:cs typeface="Arial"/>
-              </a:rPr>
-              <a:t>2. Qual plugin do ZAP reporta a SQL Injection e qual é o CWE?</a:t>
+          <p:cNvPr id="19" name="">
+            <a:extLst xmlns:a="http://schemas.openxmlformats.org/drawingml/2006/main">
+              <a:ext uri="{FF2B5EF4-FFF2-40B4-BE49-F238E27FC236}">
+                <a16:creationId xmlns:a16="http://schemas.microsoft.com/office/drawing/2014/main" id="{47450788-72E6-4C54-93DC-760029137161}"/>
+              </a:ext>
+            </a:extLst>
+          </p:cNvPr>
+          <p:cNvSpPr>
+            <a:spLocks xmlns:a="http://schemas.openxmlformats.org/drawingml/2006/main" noGrp="1"/>
+          </p:cNvSpPr>
+          <p:nvPr/>
+        </p:nvSpPr>
+        <p:spPr>
+          <a:xfrm xmlns:a="http://schemas.openxmlformats.org/drawingml/2006/main">
+            <a:off x="1143000" y="5295900"/>
+            <a:ext cx="9906000" cy="590550"/>
+          </a:xfrm>
+          <a:prstGeom xmlns:a="http://schemas.openxmlformats.org/drawingml/2006/main" prst="rect">
+            <a:avLst/>
+          </a:prstGeom>
+          <a:noFill xmlns:a="http://schemas.openxmlformats.org/drawingml/2006/main"/>
+          <a:ln xmlns:a="http://schemas.openxmlformats.org/drawingml/2006/main" w="0">
+            <a:noFill/>
+          </a:ln>
+        </p:spPr>
+        <p:txBody>
+          <a:bodyPr xmlns:a="http://schemas.openxmlformats.org/drawingml/2006/main" anchor="ctr">
+            <a:normAutofit fontScale="82694"/>
+          </a:bodyPr>
+          <a:lstStyle xmlns:a="http://schemas.openxmlformats.org/drawingml/2006/main"/>
+          <a:p xmlns:a="http://schemas.openxmlformats.org/drawingml/2006/main">
+            <a:pPr algn="ctr">
+              <a:defRPr sz="2025" b="1">
+                <a:solidFill>
+                  <a:srgbClr val="071A2F"/>
+                </a:solidFill>
+                <a:latin typeface="Arial"/>
+                <a:ea typeface="Arial"/>
+                <a:cs typeface="Arial"/>
+              </a:defRPr>
+            </a:pPr>
+            <a:r>
+              <a:rPr sz="2025" b="1">
+                <a:solidFill>
+                  <a:srgbClr val="071A2F"/>
+                </a:solidFill>
+                <a:latin typeface="Arial"/>
+                <a:ea typeface="Arial"/>
+                <a:cs typeface="Arial"/>
+              </a:rPr>
+              <a:t>Os comandos completos do scan e do quality gate estão no LAB.md e no apêndice do relatório.</a:t>
             </a:r>
           </a:p>
         </p:txBody>
@@ -13991,7 +14330,7 @@
     </p:spTree>
     <p:extLst>
       <p:ext uri="{BB962C8B-B14F-4D97-AF65-F5344CB8AC3E}">
-        <p14:creationId xmlns:p14="http://schemas.microsoft.com/office/powerpoint/2010/main" val="1739999258"/>
+        <p14:creationId xmlns:p14="http://schemas.microsoft.com/office/powerpoint/2010/main" val="523539341"/>
       </p:ext>
     </p:extLst>
   </p:cSld>
@@ -14022,7 +14361,7 @@
           <p:cNvPr id="15" name="">
             <a:extLst xmlns:a="http://schemas.openxmlformats.org/drawingml/2006/main">
               <a:ext uri="{FF2B5EF4-FFF2-40B4-BE49-F238E27FC236}">
-                <a16:creationId xmlns:a16="http://schemas.microsoft.com/office/drawing/2014/main" id="{25CA2896-6341-4F95-8EA0-D9CA3C3383F2}"/>
+                <a16:creationId xmlns:a16="http://schemas.microsoft.com/office/drawing/2014/main" id="{84BE92F2-9E52-43E7-B18D-E9BE2F297C3A}"/>
               </a:ext>
             </a:extLst>
           </p:cNvPr>
@@ -14054,7 +14393,7 @@
           <p:cNvPr id="2" name="">
             <a:extLst xmlns:a="http://schemas.openxmlformats.org/drawingml/2006/main">
               <a:ext uri="{FF2B5EF4-FFF2-40B4-BE49-F238E27FC236}">
-                <a16:creationId xmlns:a16="http://schemas.microsoft.com/office/drawing/2014/main" id="{E1081A24-6158-43B8-BE6F-8519A08F2965}"/>
+                <a16:creationId xmlns:a16="http://schemas.microsoft.com/office/drawing/2014/main" id="{E6BA9334-2F62-4554-87A7-ECE61CF1AEB0}"/>
               </a:ext>
             </a:extLst>
           </p:cNvPr>
@@ -14111,7 +14450,7 @@
           <p:cNvPr id="3" name="">
             <a:extLst xmlns:a="http://schemas.openxmlformats.org/drawingml/2006/main">
               <a:ext uri="{FF2B5EF4-FFF2-40B4-BE49-F238E27FC236}">
-                <a16:creationId xmlns:a16="http://schemas.microsoft.com/office/drawing/2014/main" id="{DE006AD8-95E6-4AEF-A507-E3E5630B3716}"/>
+                <a16:creationId xmlns:a16="http://schemas.microsoft.com/office/drawing/2014/main" id="{DE3599CA-7027-42BF-BE4C-B9C0E760351F}"/>
               </a:ext>
             </a:extLst>
           </p:cNvPr>
@@ -14168,7 +14507,7 @@
           <p:cNvPr id="4" name="">
             <a:extLst xmlns:a="http://schemas.openxmlformats.org/drawingml/2006/main">
               <a:ext uri="{FF2B5EF4-FFF2-40B4-BE49-F238E27FC236}">
-                <a16:creationId xmlns:a16="http://schemas.microsoft.com/office/drawing/2014/main" id="{ED3BAB6B-A04E-4626-803A-BED1E5BA256E}"/>
+                <a16:creationId xmlns:a16="http://schemas.microsoft.com/office/drawing/2014/main" id="{6BC709A7-7052-4EF9-9F89-69B0C2A335FD}"/>
               </a:ext>
             </a:extLst>
           </p:cNvPr>
@@ -14225,7 +14564,7 @@
           <p:cNvPr id="5" name="">
             <a:extLst xmlns:a="http://schemas.openxmlformats.org/drawingml/2006/main">
               <a:ext uri="{FF2B5EF4-FFF2-40B4-BE49-F238E27FC236}">
-                <a16:creationId xmlns:a16="http://schemas.microsoft.com/office/drawing/2014/main" id="{EC39E094-0764-49BE-9898-4660C22A20EE}"/>
+                <a16:creationId xmlns:a16="http://schemas.microsoft.com/office/drawing/2014/main" id="{ACCAB947-CDAE-40E0-951A-459FC8A1687E}"/>
               </a:ext>
             </a:extLst>
           </p:cNvPr>
@@ -14282,7 +14621,7 @@
           <p:cNvPr id="6" name="">
             <a:extLst xmlns:a="http://schemas.openxmlformats.org/drawingml/2006/main">
               <a:ext uri="{FF2B5EF4-FFF2-40B4-BE49-F238E27FC236}">
-                <a16:creationId xmlns:a16="http://schemas.microsoft.com/office/drawing/2014/main" id="{C6CDE934-7907-4813-B010-857D5A37875D}"/>
+                <a16:creationId xmlns:a16="http://schemas.microsoft.com/office/drawing/2014/main" id="{A40FA56D-9751-4F4C-ADC3-E3916B490203}"/>
               </a:ext>
             </a:extLst>
           </p:cNvPr>
@@ -14339,7 +14678,7 @@
           <p:cNvPr id="7" name="">
             <a:extLst xmlns:a="http://schemas.openxmlformats.org/drawingml/2006/main">
               <a:ext uri="{FF2B5EF4-FFF2-40B4-BE49-F238E27FC236}">
-                <a16:creationId xmlns:a16="http://schemas.microsoft.com/office/drawing/2014/main" id="{10BD82F2-280C-4007-83EA-C0AA08997388}"/>
+                <a16:creationId xmlns:a16="http://schemas.microsoft.com/office/drawing/2014/main" id="{CFA65925-58BC-40C4-8F3E-E515DB7D6073}"/>
               </a:ext>
             </a:extLst>
           </p:cNvPr>
@@ -14454,7 +14793,7 @@
           <p:cNvPr id="8" name="">
             <a:extLst xmlns:a="http://schemas.openxmlformats.org/drawingml/2006/main">
               <a:ext uri="{FF2B5EF4-FFF2-40B4-BE49-F238E27FC236}">
-                <a16:creationId xmlns:a16="http://schemas.microsoft.com/office/drawing/2014/main" id="{78264955-4828-45FD-93A9-9ACC5563B31D}"/>
+                <a16:creationId xmlns:a16="http://schemas.microsoft.com/office/drawing/2014/main" id="{90A1C309-5B8D-4E1E-9C59-32241FF96E84}"/>
               </a:ext>
             </a:extLst>
           </p:cNvPr>
@@ -14511,7 +14850,7 @@
           <p:cNvPr id="9" name="">
             <a:extLst xmlns:a="http://schemas.openxmlformats.org/drawingml/2006/main">
               <a:ext uri="{FF2B5EF4-FFF2-40B4-BE49-F238E27FC236}">
-                <a16:creationId xmlns:a16="http://schemas.microsoft.com/office/drawing/2014/main" id="{DBC5408D-265E-498B-B207-63C3307ABC92}"/>
+                <a16:creationId xmlns:a16="http://schemas.microsoft.com/office/drawing/2014/main" id="{4FAA45B3-C2D8-4034-B9C3-591F387E50B9}"/>
               </a:ext>
             </a:extLst>
           </p:cNvPr>
@@ -14589,7 +14928,7 @@
                 <a:ea typeface="Arial"/>
                 <a:cs typeface="Arial"/>
               </a:rPr>
-              <a:t>Repete a mesma regra</a:t>
+              <a:t>Repete o mesmo --config auto</a:t>
             </a:r>
           </a:p>
           <a:p xmlns:a="http://schemas.openxmlformats.org/drawingml/2006/main">
@@ -14626,7 +14965,7 @@
           <p:cNvPr id="10" name="">
             <a:extLst xmlns:a="http://schemas.openxmlformats.org/drawingml/2006/main">
               <a:ext uri="{FF2B5EF4-FFF2-40B4-BE49-F238E27FC236}">
-                <a16:creationId xmlns:a16="http://schemas.microsoft.com/office/drawing/2014/main" id="{9669E15D-9B7A-441C-AD66-1D8EDF249A16}"/>
+                <a16:creationId xmlns:a16="http://schemas.microsoft.com/office/drawing/2014/main" id="{52EF0F50-E9AB-4A29-BE4E-46E65670EAC1}"/>
               </a:ext>
             </a:extLst>
           </p:cNvPr>
@@ -14658,7 +14997,7 @@
           <p:cNvPr id="11" name="">
             <a:extLst xmlns:a="http://schemas.openxmlformats.org/drawingml/2006/main">
               <a:ext uri="{FF2B5EF4-FFF2-40B4-BE49-F238E27FC236}">
-                <a16:creationId xmlns:a16="http://schemas.microsoft.com/office/drawing/2014/main" id="{2DF4B8D2-8744-4DCA-A65B-45AA3A14E74B}"/>
+                <a16:creationId xmlns:a16="http://schemas.microsoft.com/office/drawing/2014/main" id="{28BE4EA1-6960-4C1F-B1DE-9463E0B1666A}"/>
               </a:ext>
             </a:extLst>
           </p:cNvPr>
@@ -14715,7 +15054,7 @@
           <p:cNvPr id="12" name="">
             <a:extLst xmlns:a="http://schemas.openxmlformats.org/drawingml/2006/main">
               <a:ext uri="{FF2B5EF4-FFF2-40B4-BE49-F238E27FC236}">
-                <a16:creationId xmlns:a16="http://schemas.microsoft.com/office/drawing/2014/main" id="{D7311E80-0359-46E9-841D-294591A75685}"/>
+                <a16:creationId xmlns:a16="http://schemas.microsoft.com/office/drawing/2014/main" id="{819ED77C-1CA8-4DF2-B7A9-3E3F3844801D}"/>
               </a:ext>
             </a:extLst>
           </p:cNvPr>
@@ -14772,7 +15111,7 @@
           <p:cNvPr id="13" name="">
             <a:extLst xmlns:a="http://schemas.openxmlformats.org/drawingml/2006/main">
               <a:ext uri="{FF2B5EF4-FFF2-40B4-BE49-F238E27FC236}">
-                <a16:creationId xmlns:a16="http://schemas.microsoft.com/office/drawing/2014/main" id="{06580A89-A821-4A27-B73A-8E7E222BC1B2}"/>
+                <a16:creationId xmlns:a16="http://schemas.microsoft.com/office/drawing/2014/main" id="{72103BC1-1332-4325-A784-3248F9890DF0}"/>
               </a:ext>
             </a:extLst>
           </p:cNvPr>
@@ -14829,7 +15168,7 @@
           <p:cNvPr id="14" name="">
             <a:extLst xmlns:a="http://schemas.openxmlformats.org/drawingml/2006/main">
               <a:ext uri="{FF2B5EF4-FFF2-40B4-BE49-F238E27FC236}">
-                <a16:creationId xmlns:a16="http://schemas.microsoft.com/office/drawing/2014/main" id="{25C51EB0-066D-4B09-87E3-08A4AFC8E80D}"/>
+                <a16:creationId xmlns:a16="http://schemas.microsoft.com/office/drawing/2014/main" id="{AB804C12-5D06-4F02-BEED-89613F0FE325}"/>
               </a:ext>
             </a:extLst>
           </p:cNvPr>
@@ -14884,7 +15223,7 @@
     </p:spTree>
     <p:extLst>
       <p:ext uri="{BB962C8B-B14F-4D97-AF65-F5344CB8AC3E}">
-        <p14:creationId xmlns:p14="http://schemas.microsoft.com/office/powerpoint/2010/main" val="981462723"/>
+        <p14:creationId xmlns:p14="http://schemas.microsoft.com/office/powerpoint/2010/main" val="175026438"/>
       </p:ext>
     </p:extLst>
   </p:cSld>
@@ -14915,7 +15254,7 @@
           <p:cNvPr id="9" name="">
             <a:extLst xmlns:a="http://schemas.openxmlformats.org/drawingml/2006/main">
               <a:ext uri="{FF2B5EF4-FFF2-40B4-BE49-F238E27FC236}">
-                <a16:creationId xmlns:a16="http://schemas.microsoft.com/office/drawing/2014/main" id="{2247E6D8-E31F-4C53-9B51-AA220433CCAA}"/>
+                <a16:creationId xmlns:a16="http://schemas.microsoft.com/office/drawing/2014/main" id="{13117567-122C-4AEF-A01C-82908E5EA288}"/>
               </a:ext>
             </a:extLst>
           </p:cNvPr>
@@ -14947,7 +15286,7 @@
           <p:cNvPr id="2" name="">
             <a:extLst xmlns:a="http://schemas.openxmlformats.org/drawingml/2006/main">
               <a:ext uri="{FF2B5EF4-FFF2-40B4-BE49-F238E27FC236}">
-                <a16:creationId xmlns:a16="http://schemas.microsoft.com/office/drawing/2014/main" id="{0A4FF442-0741-4395-B1DC-3AF565288BFA}"/>
+                <a16:creationId xmlns:a16="http://schemas.microsoft.com/office/drawing/2014/main" id="{2F1B8CD2-CEAE-4B26-A76A-72F4AD05B0F6}"/>
               </a:ext>
             </a:extLst>
           </p:cNvPr>
@@ -15004,7 +15343,7 @@
           <p:cNvPr id="3" name="">
             <a:extLst xmlns:a="http://schemas.openxmlformats.org/drawingml/2006/main">
               <a:ext uri="{FF2B5EF4-FFF2-40B4-BE49-F238E27FC236}">
-                <a16:creationId xmlns:a16="http://schemas.microsoft.com/office/drawing/2014/main" id="{6DBCC3AA-7A02-438B-97DC-50A61C89B017}"/>
+                <a16:creationId xmlns:a16="http://schemas.microsoft.com/office/drawing/2014/main" id="{1744F7BA-0363-4F48-84DE-D2594A08EF9F}"/>
               </a:ext>
             </a:extLst>
           </p:cNvPr>
@@ -15061,7 +15400,7 @@
           <p:cNvPr id="4" name="">
             <a:extLst xmlns:a="http://schemas.openxmlformats.org/drawingml/2006/main">
               <a:ext uri="{FF2B5EF4-FFF2-40B4-BE49-F238E27FC236}">
-                <a16:creationId xmlns:a16="http://schemas.microsoft.com/office/drawing/2014/main" id="{91D8970B-ECE5-4DDD-A201-7FA483419AAE}"/>
+                <a16:creationId xmlns:a16="http://schemas.microsoft.com/office/drawing/2014/main" id="{8380A3CF-AD92-4527-8652-F5A564A45A9C}"/>
               </a:ext>
             </a:extLst>
           </p:cNvPr>
@@ -15118,7 +15457,7 @@
           <p:cNvPr id="5" name="">
             <a:extLst xmlns:a="http://schemas.openxmlformats.org/drawingml/2006/main">
               <a:ext uri="{FF2B5EF4-FFF2-40B4-BE49-F238E27FC236}">
-                <a16:creationId xmlns:a16="http://schemas.microsoft.com/office/drawing/2014/main" id="{AF1240B8-3BEB-48DC-9B06-0C484DDAD8D0}"/>
+                <a16:creationId xmlns:a16="http://schemas.microsoft.com/office/drawing/2014/main" id="{9CD19F9B-45C1-41D0-8752-338E02CC0057}"/>
               </a:ext>
             </a:extLst>
           </p:cNvPr>
@@ -15748,7 +16087,7 @@
           <p:cNvPr id="7" name="">
             <a:extLst xmlns:a="http://schemas.openxmlformats.org/drawingml/2006/main">
               <a:ext uri="{FF2B5EF4-FFF2-40B4-BE49-F238E27FC236}">
-                <a16:creationId xmlns:a16="http://schemas.microsoft.com/office/drawing/2014/main" id="{55C5128F-6C76-4406-BA3E-0B571D07F44E}"/>
+                <a16:creationId xmlns:a16="http://schemas.microsoft.com/office/drawing/2014/main" id="{FE41757C-2BB5-4613-92A6-0FCDB08E7ADF}"/>
               </a:ext>
             </a:extLst>
           </p:cNvPr>
@@ -15805,7 +16144,7 @@
           <p:cNvPr id="8" name="">
             <a:extLst xmlns:a="http://schemas.openxmlformats.org/drawingml/2006/main">
               <a:ext uri="{FF2B5EF4-FFF2-40B4-BE49-F238E27FC236}">
-                <a16:creationId xmlns:a16="http://schemas.microsoft.com/office/drawing/2014/main" id="{BD948327-FB9A-4D52-AB8C-F769F0097630}"/>
+                <a16:creationId xmlns:a16="http://schemas.microsoft.com/office/drawing/2014/main" id="{A3E81541-CF91-4582-B366-525F0BCD9BDB}"/>
               </a:ext>
             </a:extLst>
           </p:cNvPr>
@@ -15860,7 +16199,7 @@
     </p:spTree>
     <p:extLst>
       <p:ext uri="{BB962C8B-B14F-4D97-AF65-F5344CB8AC3E}">
-        <p14:creationId xmlns:p14="http://schemas.microsoft.com/office/powerpoint/2010/main" val="670452724"/>
+        <p14:creationId xmlns:p14="http://schemas.microsoft.com/office/powerpoint/2010/main" val="1029277007"/>
       </p:ext>
     </p:extLst>
   </p:cSld>
@@ -15891,7 +16230,7 @@
           <p:cNvPr id="9" name="">
             <a:extLst xmlns:a="http://schemas.openxmlformats.org/drawingml/2006/main">
               <a:ext uri="{FF2B5EF4-FFF2-40B4-BE49-F238E27FC236}">
-                <a16:creationId xmlns:a16="http://schemas.microsoft.com/office/drawing/2014/main" id="{8AEA43C5-8BC4-437B-9A88-536C3EA87FE7}"/>
+                <a16:creationId xmlns:a16="http://schemas.microsoft.com/office/drawing/2014/main" id="{6F0A3C03-26B0-4F28-875D-2A240938B7A0}"/>
               </a:ext>
             </a:extLst>
           </p:cNvPr>
@@ -15923,7 +16262,7 @@
           <p:cNvPr id="2" name="">
             <a:extLst xmlns:a="http://schemas.openxmlformats.org/drawingml/2006/main">
               <a:ext uri="{FF2B5EF4-FFF2-40B4-BE49-F238E27FC236}">
-                <a16:creationId xmlns:a16="http://schemas.microsoft.com/office/drawing/2014/main" id="{C63D5BFE-7DDC-4170-ABC5-F77DAE6E3530}"/>
+                <a16:creationId xmlns:a16="http://schemas.microsoft.com/office/drawing/2014/main" id="{7706712D-76E6-4CF5-9826-564B8D7FAA3E}"/>
               </a:ext>
             </a:extLst>
           </p:cNvPr>
@@ -15980,7 +16319,7 @@
           <p:cNvPr id="3" name="">
             <a:extLst xmlns:a="http://schemas.openxmlformats.org/drawingml/2006/main">
               <a:ext uri="{FF2B5EF4-FFF2-40B4-BE49-F238E27FC236}">
-                <a16:creationId xmlns:a16="http://schemas.microsoft.com/office/drawing/2014/main" id="{386AB7F4-15C3-4B89-B4B2-ABA4C78BB1D8}"/>
+                <a16:creationId xmlns:a16="http://schemas.microsoft.com/office/drawing/2014/main" id="{E469CE0E-1BE0-439B-A373-1CB805F0C38C}"/>
               </a:ext>
             </a:extLst>
           </p:cNvPr>
@@ -16037,7 +16376,7 @@
           <p:cNvPr id="4" name="">
             <a:extLst xmlns:a="http://schemas.openxmlformats.org/drawingml/2006/main">
               <a:ext uri="{FF2B5EF4-FFF2-40B4-BE49-F238E27FC236}">
-                <a16:creationId xmlns:a16="http://schemas.microsoft.com/office/drawing/2014/main" id="{71EF7128-BCA2-40E9-BBB4-DC64D070345C}"/>
+                <a16:creationId xmlns:a16="http://schemas.microsoft.com/office/drawing/2014/main" id="{8285CC47-DD60-4F18-968B-571ABC7C8EF5}"/>
               </a:ext>
             </a:extLst>
           </p:cNvPr>
@@ -16094,7 +16433,7 @@
           <p:cNvPr id="5" name="">
             <a:extLst xmlns:a="http://schemas.openxmlformats.org/drawingml/2006/main">
               <a:ext uri="{FF2B5EF4-FFF2-40B4-BE49-F238E27FC236}">
-                <a16:creationId xmlns:a16="http://schemas.microsoft.com/office/drawing/2014/main" id="{1B19BF63-7C84-47FE-9DA5-FC753B40976E}"/>
+                <a16:creationId xmlns:a16="http://schemas.microsoft.com/office/drawing/2014/main" id="{E084044F-288C-4B3F-93E2-B3D59AA076DB}"/>
               </a:ext>
             </a:extLst>
           </p:cNvPr>
@@ -16861,7 +17200,7 @@
           <p:cNvPr id="7" name="">
             <a:extLst xmlns:a="http://schemas.openxmlformats.org/drawingml/2006/main">
               <a:ext uri="{FF2B5EF4-FFF2-40B4-BE49-F238E27FC236}">
-                <a16:creationId xmlns:a16="http://schemas.microsoft.com/office/drawing/2014/main" id="{4B450115-DCDC-4AFC-8F93-98D0E009A075}"/>
+                <a16:creationId xmlns:a16="http://schemas.microsoft.com/office/drawing/2014/main" id="{977B0E70-4514-49E1-B40E-D61AEB200EB9}"/>
               </a:ext>
             </a:extLst>
           </p:cNvPr>
@@ -16918,7 +17257,7 @@
           <p:cNvPr id="8" name="">
             <a:extLst xmlns:a="http://schemas.openxmlformats.org/drawingml/2006/main">
               <a:ext uri="{FF2B5EF4-FFF2-40B4-BE49-F238E27FC236}">
-                <a16:creationId xmlns:a16="http://schemas.microsoft.com/office/drawing/2014/main" id="{00E91BF7-8743-4B5F-BDC1-36F721616D39}"/>
+                <a16:creationId xmlns:a16="http://schemas.microsoft.com/office/drawing/2014/main" id="{89604560-C108-465C-8992-AF613011C9A2}"/>
               </a:ext>
             </a:extLst>
           </p:cNvPr>
@@ -16973,7 +17312,7 @@
     </p:spTree>
     <p:extLst>
       <p:ext uri="{BB962C8B-B14F-4D97-AF65-F5344CB8AC3E}">
-        <p14:creationId xmlns:p14="http://schemas.microsoft.com/office/powerpoint/2010/main" val="480354562"/>
+        <p14:creationId xmlns:p14="http://schemas.microsoft.com/office/powerpoint/2010/main" val="12786799"/>
       </p:ext>
     </p:extLst>
   </p:cSld>
@@ -17004,7 +17343,7 @@
           <p:cNvPr id="11" name="">
             <a:extLst xmlns:a="http://schemas.openxmlformats.org/drawingml/2006/main">
               <a:ext uri="{FF2B5EF4-FFF2-40B4-BE49-F238E27FC236}">
-                <a16:creationId xmlns:a16="http://schemas.microsoft.com/office/drawing/2014/main" id="{CCBF39F1-EF03-4A41-A091-9F5935964725}"/>
+                <a16:creationId xmlns:a16="http://schemas.microsoft.com/office/drawing/2014/main" id="{828E2F54-6A0E-4D51-B83C-F336D9EB2F32}"/>
               </a:ext>
             </a:extLst>
           </p:cNvPr>
@@ -17036,7 +17375,7 @@
           <p:cNvPr id="2" name="">
             <a:extLst xmlns:a="http://schemas.openxmlformats.org/drawingml/2006/main">
               <a:ext uri="{FF2B5EF4-FFF2-40B4-BE49-F238E27FC236}">
-                <a16:creationId xmlns:a16="http://schemas.microsoft.com/office/drawing/2014/main" id="{1438F1C1-197A-4300-A8FE-BD197E420B0F}"/>
+                <a16:creationId xmlns:a16="http://schemas.microsoft.com/office/drawing/2014/main" id="{F8261B46-212A-4448-9133-6C16A18783AA}"/>
               </a:ext>
             </a:extLst>
           </p:cNvPr>
@@ -17093,7 +17432,7 @@
           <p:cNvPr id="3" name="">
             <a:extLst xmlns:a="http://schemas.openxmlformats.org/drawingml/2006/main">
               <a:ext uri="{FF2B5EF4-FFF2-40B4-BE49-F238E27FC236}">
-                <a16:creationId xmlns:a16="http://schemas.microsoft.com/office/drawing/2014/main" id="{36142133-8E55-42A4-853B-BA1FC8F2C422}"/>
+                <a16:creationId xmlns:a16="http://schemas.microsoft.com/office/drawing/2014/main" id="{C5AF0FCD-9173-48AA-A3B6-CA6FBC21239E}"/>
               </a:ext>
             </a:extLst>
           </p:cNvPr>
@@ -17150,7 +17489,7 @@
           <p:cNvPr id="4" name="">
             <a:extLst xmlns:a="http://schemas.openxmlformats.org/drawingml/2006/main">
               <a:ext uri="{FF2B5EF4-FFF2-40B4-BE49-F238E27FC236}">
-                <a16:creationId xmlns:a16="http://schemas.microsoft.com/office/drawing/2014/main" id="{195AD5ED-F204-47FD-9076-B357AC16F669}"/>
+                <a16:creationId xmlns:a16="http://schemas.microsoft.com/office/drawing/2014/main" id="{4BE0FABE-7ADA-4BC3-9668-C0AA69A02A4B}"/>
               </a:ext>
             </a:extLst>
           </p:cNvPr>
@@ -17207,7 +17546,7 @@
           <p:cNvPr id="5" name="">
             <a:extLst xmlns:a="http://schemas.openxmlformats.org/drawingml/2006/main">
               <a:ext uri="{FF2B5EF4-FFF2-40B4-BE49-F238E27FC236}">
-                <a16:creationId xmlns:a16="http://schemas.microsoft.com/office/drawing/2014/main" id="{75411CA9-DA11-4BF3-B2EC-4E0DD7BB499E}"/>
+                <a16:creationId xmlns:a16="http://schemas.microsoft.com/office/drawing/2014/main" id="{A7BA6C99-3409-4B9F-BAD6-4C1B59FE9BD5}"/>
               </a:ext>
             </a:extLst>
           </p:cNvPr>
@@ -17264,7 +17603,7 @@
           <p:cNvPr id="6" name="">
             <a:extLst xmlns:a="http://schemas.openxmlformats.org/drawingml/2006/main">
               <a:ext uri="{FF2B5EF4-FFF2-40B4-BE49-F238E27FC236}">
-                <a16:creationId xmlns:a16="http://schemas.microsoft.com/office/drawing/2014/main" id="{F4B9C8E2-21E7-4480-8954-9F7E75138175}"/>
+                <a16:creationId xmlns:a16="http://schemas.microsoft.com/office/drawing/2014/main" id="{704F50CB-02D0-4ABB-9E95-8D9FE1307D04}"/>
               </a:ext>
             </a:extLst>
           </p:cNvPr>
@@ -17406,7 +17745,7 @@
           <p:cNvPr id="7" name="">
             <a:extLst xmlns:a="http://schemas.openxmlformats.org/drawingml/2006/main">
               <a:ext uri="{FF2B5EF4-FFF2-40B4-BE49-F238E27FC236}">
-                <a16:creationId xmlns:a16="http://schemas.microsoft.com/office/drawing/2014/main" id="{307FBF8D-ECD7-42C3-BC96-D596F32FA7C8}"/>
+                <a16:creationId xmlns:a16="http://schemas.microsoft.com/office/drawing/2014/main" id="{F9ABF810-1FB5-4069-9B1C-5EEBACDB9F24}"/>
               </a:ext>
             </a:extLst>
           </p:cNvPr>
@@ -17463,7 +17802,7 @@
           <p:cNvPr id="8" name="">
             <a:extLst xmlns:a="http://schemas.openxmlformats.org/drawingml/2006/main">
               <a:ext uri="{FF2B5EF4-FFF2-40B4-BE49-F238E27FC236}">
-                <a16:creationId xmlns:a16="http://schemas.microsoft.com/office/drawing/2014/main" id="{5559FBB9-D173-4B59-BFEA-910D059C618F}"/>
+                <a16:creationId xmlns:a16="http://schemas.microsoft.com/office/drawing/2014/main" id="{A2B2F4C8-8D12-4698-B286-97D95C55B266}"/>
               </a:ext>
             </a:extLst>
           </p:cNvPr>
@@ -17520,7 +17859,7 @@
           <p:cNvPr id="9" name="">
             <a:extLst xmlns:a="http://schemas.openxmlformats.org/drawingml/2006/main">
               <a:ext uri="{FF2B5EF4-FFF2-40B4-BE49-F238E27FC236}">
-                <a16:creationId xmlns:a16="http://schemas.microsoft.com/office/drawing/2014/main" id="{ABC20CF2-20DF-4041-BDA7-3FAA6EF26656}"/>
+                <a16:creationId xmlns:a16="http://schemas.microsoft.com/office/drawing/2014/main" id="{234E4E14-FE89-46AF-B1C6-9FA93D989E74}"/>
               </a:ext>
             </a:extLst>
           </p:cNvPr>
@@ -17577,7 +17916,7 @@
           <p:cNvPr id="10" name="">
             <a:extLst xmlns:a="http://schemas.openxmlformats.org/drawingml/2006/main">
               <a:ext uri="{FF2B5EF4-FFF2-40B4-BE49-F238E27FC236}">
-                <a16:creationId xmlns:a16="http://schemas.microsoft.com/office/drawing/2014/main" id="{78058B9B-53E4-480A-BB84-2CDCD7F1F655}"/>
+                <a16:creationId xmlns:a16="http://schemas.microsoft.com/office/drawing/2014/main" id="{CC80A07F-2EDD-4CAB-890D-7B0172C4A7F7}"/>
               </a:ext>
             </a:extLst>
           </p:cNvPr>
@@ -17632,7 +17971,7 @@
     </p:spTree>
     <p:extLst>
       <p:ext uri="{BB962C8B-B14F-4D97-AF65-F5344CB8AC3E}">
-        <p14:creationId xmlns:p14="http://schemas.microsoft.com/office/powerpoint/2010/main" val="1184005370"/>
+        <p14:creationId xmlns:p14="http://schemas.microsoft.com/office/powerpoint/2010/main" val="1028433409"/>
       </p:ext>
     </p:extLst>
   </p:cSld>
@@ -17663,7 +18002,7 @@
           <p:cNvPr id="12" name="">
             <a:extLst xmlns:a="http://schemas.openxmlformats.org/drawingml/2006/main">
               <a:ext uri="{FF2B5EF4-FFF2-40B4-BE49-F238E27FC236}">
-                <a16:creationId xmlns:a16="http://schemas.microsoft.com/office/drawing/2014/main" id="{257CC416-406F-47EB-8796-33BAF775F56C}"/>
+                <a16:creationId xmlns:a16="http://schemas.microsoft.com/office/drawing/2014/main" id="{ED7219DD-258F-4BCE-8434-802ACC325305}"/>
               </a:ext>
             </a:extLst>
           </p:cNvPr>
@@ -17695,7 +18034,7 @@
           <p:cNvPr id="2" name="">
             <a:extLst xmlns:a="http://schemas.openxmlformats.org/drawingml/2006/main">
               <a:ext uri="{FF2B5EF4-FFF2-40B4-BE49-F238E27FC236}">
-                <a16:creationId xmlns:a16="http://schemas.microsoft.com/office/drawing/2014/main" id="{467D2BBB-144A-4E05-973C-D96452FCB380}"/>
+                <a16:creationId xmlns:a16="http://schemas.microsoft.com/office/drawing/2014/main" id="{29057EA5-91B1-4149-9E7E-8622F9740D63}"/>
               </a:ext>
             </a:extLst>
           </p:cNvPr>
@@ -17752,7 +18091,7 @@
           <p:cNvPr id="3" name="">
             <a:extLst xmlns:a="http://schemas.openxmlformats.org/drawingml/2006/main">
               <a:ext uri="{FF2B5EF4-FFF2-40B4-BE49-F238E27FC236}">
-                <a16:creationId xmlns:a16="http://schemas.microsoft.com/office/drawing/2014/main" id="{7C3B5EB5-4939-41FD-9717-6540BE0E8C57}"/>
+                <a16:creationId xmlns:a16="http://schemas.microsoft.com/office/drawing/2014/main" id="{E2C810C4-528A-41FE-BCFA-4A28669F6D09}"/>
               </a:ext>
             </a:extLst>
           </p:cNvPr>
@@ -17809,7 +18148,7 @@
           <p:cNvPr id="4" name="">
             <a:extLst xmlns:a="http://schemas.openxmlformats.org/drawingml/2006/main">
               <a:ext uri="{FF2B5EF4-FFF2-40B4-BE49-F238E27FC236}">
-                <a16:creationId xmlns:a16="http://schemas.microsoft.com/office/drawing/2014/main" id="{75AD53AA-FECE-4B83-812C-002998B59E20}"/>
+                <a16:creationId xmlns:a16="http://schemas.microsoft.com/office/drawing/2014/main" id="{C8DABB5A-C6F5-423A-9723-A41A015F4D2A}"/>
               </a:ext>
             </a:extLst>
           </p:cNvPr>
@@ -17866,7 +18205,7 @@
           <p:cNvPr id="5" name="">
             <a:extLst xmlns:a="http://schemas.openxmlformats.org/drawingml/2006/main">
               <a:ext uri="{FF2B5EF4-FFF2-40B4-BE49-F238E27FC236}">
-                <a16:creationId xmlns:a16="http://schemas.microsoft.com/office/drawing/2014/main" id="{47BAF778-A6A7-4623-AE2C-542F5EED3BBD}"/>
+                <a16:creationId xmlns:a16="http://schemas.microsoft.com/office/drawing/2014/main" id="{7DF3949D-1CAC-4F80-A485-8F0B209618B9}"/>
               </a:ext>
             </a:extLst>
           </p:cNvPr>
@@ -17923,7 +18262,7 @@
           <p:cNvPr id="6" name="">
             <a:extLst xmlns:a="http://schemas.openxmlformats.org/drawingml/2006/main">
               <a:ext uri="{FF2B5EF4-FFF2-40B4-BE49-F238E27FC236}">
-                <a16:creationId xmlns:a16="http://schemas.microsoft.com/office/drawing/2014/main" id="{DCF69EE7-A1D7-43E6-868B-C1D7BDCC3D8A}"/>
+                <a16:creationId xmlns:a16="http://schemas.microsoft.com/office/drawing/2014/main" id="{FCE27C40-AC19-4543-9B35-A334E8D47BDE}"/>
               </a:ext>
             </a:extLst>
           </p:cNvPr>
@@ -17980,7 +18319,7 @@
           <p:cNvPr id="7" name="">
             <a:extLst xmlns:a="http://schemas.openxmlformats.org/drawingml/2006/main">
               <a:ext uri="{FF2B5EF4-FFF2-40B4-BE49-F238E27FC236}">
-                <a16:creationId xmlns:a16="http://schemas.microsoft.com/office/drawing/2014/main" id="{2FC589FC-0940-4C46-A71B-8D27A44E6C06}"/>
+                <a16:creationId xmlns:a16="http://schemas.microsoft.com/office/drawing/2014/main" id="{8FC13250-EE09-43C0-B128-70BC636BCEAB}"/>
               </a:ext>
             </a:extLst>
           </p:cNvPr>
@@ -18149,7 +18488,7 @@
           <p:cNvPr id="8" name="">
             <a:extLst xmlns:a="http://schemas.openxmlformats.org/drawingml/2006/main">
               <a:ext uri="{FF2B5EF4-FFF2-40B4-BE49-F238E27FC236}">
-                <a16:creationId xmlns:a16="http://schemas.microsoft.com/office/drawing/2014/main" id="{3527C3AD-6BE5-4C45-9DB3-FF2C560FDF78}"/>
+                <a16:creationId xmlns:a16="http://schemas.microsoft.com/office/drawing/2014/main" id="{845EE404-4BB4-4751-A205-AB5B751701B1}"/>
               </a:ext>
             </a:extLst>
           </p:cNvPr>
@@ -18318,7 +18657,7 @@
           <p:cNvPr id="9" name="">
             <a:extLst xmlns:a="http://schemas.openxmlformats.org/drawingml/2006/main">
               <a:ext uri="{FF2B5EF4-FFF2-40B4-BE49-F238E27FC236}">
-                <a16:creationId xmlns:a16="http://schemas.microsoft.com/office/drawing/2014/main" id="{16CE0245-C5AA-4959-860C-08E83CA54C36}"/>
+                <a16:creationId xmlns:a16="http://schemas.microsoft.com/office/drawing/2014/main" id="{3A6688A4-2982-4559-A4F5-1C384BE44627}"/>
               </a:ext>
             </a:extLst>
           </p:cNvPr>
@@ -18350,7 +18689,7 @@
           <p:cNvPr id="10" name="">
             <a:extLst xmlns:a="http://schemas.openxmlformats.org/drawingml/2006/main">
               <a:ext uri="{FF2B5EF4-FFF2-40B4-BE49-F238E27FC236}">
-                <a16:creationId xmlns:a16="http://schemas.microsoft.com/office/drawing/2014/main" id="{F4CA00CE-C1F1-4F14-A77C-0D1CEB179B84}"/>
+                <a16:creationId xmlns:a16="http://schemas.microsoft.com/office/drawing/2014/main" id="{557FC49F-0BAD-4996-A54E-045E06E4AED0}"/>
               </a:ext>
             </a:extLst>
           </p:cNvPr>
@@ -18407,7 +18746,7 @@
           <p:cNvPr id="11" name="">
             <a:extLst xmlns:a="http://schemas.openxmlformats.org/drawingml/2006/main">
               <a:ext uri="{FF2B5EF4-FFF2-40B4-BE49-F238E27FC236}">
-                <a16:creationId xmlns:a16="http://schemas.microsoft.com/office/drawing/2014/main" id="{C6CAE0CC-951D-440A-838A-97EA84A97602}"/>
+                <a16:creationId xmlns:a16="http://schemas.microsoft.com/office/drawing/2014/main" id="{AC74A29E-45A0-4B31-8CB6-32F3B2F33ABA}"/>
               </a:ext>
             </a:extLst>
           </p:cNvPr>
@@ -18462,7 +18801,7 @@
     </p:spTree>
     <p:extLst>
       <p:ext uri="{BB962C8B-B14F-4D97-AF65-F5344CB8AC3E}">
-        <p14:creationId xmlns:p14="http://schemas.microsoft.com/office/powerpoint/2010/main" val="1903116885"/>
+        <p14:creationId xmlns:p14="http://schemas.microsoft.com/office/powerpoint/2010/main" val="2034068360"/>
       </p:ext>
     </p:extLst>
   </p:cSld>
@@ -18493,7 +18832,7 @@
           <p:cNvPr id="20" name="">
             <a:extLst xmlns:a="http://schemas.openxmlformats.org/drawingml/2006/main">
               <a:ext uri="{FF2B5EF4-FFF2-40B4-BE49-F238E27FC236}">
-                <a16:creationId xmlns:a16="http://schemas.microsoft.com/office/drawing/2014/main" id="{9C217474-7611-45DD-8915-C75B8A39DBFE}"/>
+                <a16:creationId xmlns:a16="http://schemas.microsoft.com/office/drawing/2014/main" id="{38D378CD-AE42-4557-8D27-1AB23D5775B5}"/>
               </a:ext>
             </a:extLst>
           </p:cNvPr>
@@ -18525,7 +18864,7 @@
           <p:cNvPr id="2" name="">
             <a:extLst xmlns:a="http://schemas.openxmlformats.org/drawingml/2006/main">
               <a:ext uri="{FF2B5EF4-FFF2-40B4-BE49-F238E27FC236}">
-                <a16:creationId xmlns:a16="http://schemas.microsoft.com/office/drawing/2014/main" id="{B8E4B683-8D7E-42AE-BFFF-BCD5809B43AE}"/>
+                <a16:creationId xmlns:a16="http://schemas.microsoft.com/office/drawing/2014/main" id="{5E85909F-DC83-4CA9-B3A7-9FD23A74106D}"/>
               </a:ext>
             </a:extLst>
           </p:cNvPr>
@@ -18582,7 +18921,7 @@
           <p:cNvPr id="3" name="">
             <a:extLst xmlns:a="http://schemas.openxmlformats.org/drawingml/2006/main">
               <a:ext uri="{FF2B5EF4-FFF2-40B4-BE49-F238E27FC236}">
-                <a16:creationId xmlns:a16="http://schemas.microsoft.com/office/drawing/2014/main" id="{048D7E7E-49F8-442B-A5B6-DF672D3F1EE0}"/>
+                <a16:creationId xmlns:a16="http://schemas.microsoft.com/office/drawing/2014/main" id="{D27A1526-8A38-403B-B5CD-60BAFD7E2214}"/>
               </a:ext>
             </a:extLst>
           </p:cNvPr>
@@ -18639,7 +18978,7 @@
           <p:cNvPr id="4" name="">
             <a:extLst xmlns:a="http://schemas.openxmlformats.org/drawingml/2006/main">
               <a:ext uri="{FF2B5EF4-FFF2-40B4-BE49-F238E27FC236}">
-                <a16:creationId xmlns:a16="http://schemas.microsoft.com/office/drawing/2014/main" id="{E8A73943-CD8A-4F64-8BA7-25B00B43EB39}"/>
+                <a16:creationId xmlns:a16="http://schemas.microsoft.com/office/drawing/2014/main" id="{C1C45D9A-42A2-4751-A924-940C6AB58E9A}"/>
               </a:ext>
             </a:extLst>
           </p:cNvPr>
@@ -18696,7 +19035,7 @@
           <p:cNvPr id="5" name="">
             <a:extLst xmlns:a="http://schemas.openxmlformats.org/drawingml/2006/main">
               <a:ext uri="{FF2B5EF4-FFF2-40B4-BE49-F238E27FC236}">
-                <a16:creationId xmlns:a16="http://schemas.microsoft.com/office/drawing/2014/main" id="{6FBE1B2B-F932-4990-AF04-CED498F732BA}"/>
+                <a16:creationId xmlns:a16="http://schemas.microsoft.com/office/drawing/2014/main" id="{7F14D557-664F-4150-9994-C00C6339F151}"/>
               </a:ext>
             </a:extLst>
           </p:cNvPr>
@@ -18753,7 +19092,7 @@
           <p:cNvPr id="6" name="">
             <a:extLst xmlns:a="http://schemas.openxmlformats.org/drawingml/2006/main">
               <a:ext uri="{FF2B5EF4-FFF2-40B4-BE49-F238E27FC236}">
-                <a16:creationId xmlns:a16="http://schemas.microsoft.com/office/drawing/2014/main" id="{65545A0C-A640-4820-A358-40066F7AF27C}"/>
+                <a16:creationId xmlns:a16="http://schemas.microsoft.com/office/drawing/2014/main" id="{26A2ED6B-61CB-4B47-8DC4-F25E3AC95886}"/>
               </a:ext>
             </a:extLst>
           </p:cNvPr>
@@ -18810,7 +19149,7 @@
           <p:cNvPr id="7" name="">
             <a:extLst xmlns:a="http://schemas.openxmlformats.org/drawingml/2006/main">
               <a:ext uri="{FF2B5EF4-FFF2-40B4-BE49-F238E27FC236}">
-                <a16:creationId xmlns:a16="http://schemas.microsoft.com/office/drawing/2014/main" id="{DA42D5C2-3D76-4ABA-91B1-F2709FA63F97}"/>
+                <a16:creationId xmlns:a16="http://schemas.microsoft.com/office/drawing/2014/main" id="{E2B87259-84E2-4B26-A61B-C2907A564239}"/>
               </a:ext>
             </a:extLst>
           </p:cNvPr>
@@ -18867,7 +19206,7 @@
           <p:cNvPr id="8" name="">
             <a:extLst xmlns:a="http://schemas.openxmlformats.org/drawingml/2006/main">
               <a:ext uri="{FF2B5EF4-FFF2-40B4-BE49-F238E27FC236}">
-                <a16:creationId xmlns:a16="http://schemas.microsoft.com/office/drawing/2014/main" id="{9DCFF479-F553-41CC-AF08-C57F86C9E347}"/>
+                <a16:creationId xmlns:a16="http://schemas.microsoft.com/office/drawing/2014/main" id="{D45D7790-FA79-4C6D-BDA6-28141F468DEC}"/>
               </a:ext>
             </a:extLst>
           </p:cNvPr>
@@ -18899,7 +19238,7 @@
           <p:cNvPr id="9" name="">
             <a:extLst xmlns:a="http://schemas.openxmlformats.org/drawingml/2006/main">
               <a:ext uri="{FF2B5EF4-FFF2-40B4-BE49-F238E27FC236}">
-                <a16:creationId xmlns:a16="http://schemas.microsoft.com/office/drawing/2014/main" id="{D71CA89D-3D4F-4BCE-8665-735E3D3EB8EA}"/>
+                <a16:creationId xmlns:a16="http://schemas.microsoft.com/office/drawing/2014/main" id="{FECE6FA2-806A-43EB-80AA-5B90904BA48F}"/>
               </a:ext>
             </a:extLst>
           </p:cNvPr>
@@ -18956,7 +19295,7 @@
           <p:cNvPr id="10" name="">
             <a:extLst xmlns:a="http://schemas.openxmlformats.org/drawingml/2006/main">
               <a:ext uri="{FF2B5EF4-FFF2-40B4-BE49-F238E27FC236}">
-                <a16:creationId xmlns:a16="http://schemas.microsoft.com/office/drawing/2014/main" id="{96250D4B-6561-4FFF-84BF-637BFEB7EB99}"/>
+                <a16:creationId xmlns:a16="http://schemas.microsoft.com/office/drawing/2014/main" id="{2F7E9D51-0C7A-43F6-B63F-96D3C19EBFDA}"/>
               </a:ext>
             </a:extLst>
           </p:cNvPr>
@@ -19013,7 +19352,7 @@
           <p:cNvPr id="11" name="">
             <a:extLst xmlns:a="http://schemas.openxmlformats.org/drawingml/2006/main">
               <a:ext uri="{FF2B5EF4-FFF2-40B4-BE49-F238E27FC236}">
-                <a16:creationId xmlns:a16="http://schemas.microsoft.com/office/drawing/2014/main" id="{D4F4C37F-A39A-4D41-A956-79F77EB5039D}"/>
+                <a16:creationId xmlns:a16="http://schemas.microsoft.com/office/drawing/2014/main" id="{DAF2FC57-C846-479F-B879-3A647D4CF6C4}"/>
               </a:ext>
             </a:extLst>
           </p:cNvPr>
@@ -19045,7 +19384,7 @@
           <p:cNvPr id="12" name="">
             <a:extLst xmlns:a="http://schemas.openxmlformats.org/drawingml/2006/main">
               <a:ext uri="{FF2B5EF4-FFF2-40B4-BE49-F238E27FC236}">
-                <a16:creationId xmlns:a16="http://schemas.microsoft.com/office/drawing/2014/main" id="{A2BE86D8-13AF-41FE-8F10-396C96946B74}"/>
+                <a16:creationId xmlns:a16="http://schemas.microsoft.com/office/drawing/2014/main" id="{553DC096-7A6A-4DC7-BC81-0E693A60F9DD}"/>
               </a:ext>
             </a:extLst>
           </p:cNvPr>
@@ -19102,7 +19441,7 @@
           <p:cNvPr id="13" name="">
             <a:extLst xmlns:a="http://schemas.openxmlformats.org/drawingml/2006/main">
               <a:ext uri="{FF2B5EF4-FFF2-40B4-BE49-F238E27FC236}">
-                <a16:creationId xmlns:a16="http://schemas.microsoft.com/office/drawing/2014/main" id="{42B014DA-60F7-4348-A17E-F9F4AE03C246}"/>
+                <a16:creationId xmlns:a16="http://schemas.microsoft.com/office/drawing/2014/main" id="{B3722D04-18D8-4A6F-A8EC-AAE895812D84}"/>
               </a:ext>
             </a:extLst>
           </p:cNvPr>
@@ -19159,7 +19498,7 @@
           <p:cNvPr id="14" name="">
             <a:extLst xmlns:a="http://schemas.openxmlformats.org/drawingml/2006/main">
               <a:ext uri="{FF2B5EF4-FFF2-40B4-BE49-F238E27FC236}">
-                <a16:creationId xmlns:a16="http://schemas.microsoft.com/office/drawing/2014/main" id="{B298EA0B-35BF-4D25-BD6C-3B71670C238F}"/>
+                <a16:creationId xmlns:a16="http://schemas.microsoft.com/office/drawing/2014/main" id="{49D3937E-0A7B-4FBE-9F70-987BD5E8C0E2}"/>
               </a:ext>
             </a:extLst>
           </p:cNvPr>
@@ -19191,7 +19530,7 @@
           <p:cNvPr id="15" name="">
             <a:extLst xmlns:a="http://schemas.openxmlformats.org/drawingml/2006/main">
               <a:ext uri="{FF2B5EF4-FFF2-40B4-BE49-F238E27FC236}">
-                <a16:creationId xmlns:a16="http://schemas.microsoft.com/office/drawing/2014/main" id="{A0FC6424-FB8F-4A26-982F-9C8BB94D1AC5}"/>
+                <a16:creationId xmlns:a16="http://schemas.microsoft.com/office/drawing/2014/main" id="{0568598C-C305-44CE-935E-D34CE6E4F7D0}"/>
               </a:ext>
             </a:extLst>
           </p:cNvPr>
@@ -19248,7 +19587,7 @@
           <p:cNvPr id="16" name="">
             <a:extLst xmlns:a="http://schemas.openxmlformats.org/drawingml/2006/main">
               <a:ext uri="{FF2B5EF4-FFF2-40B4-BE49-F238E27FC236}">
-                <a16:creationId xmlns:a16="http://schemas.microsoft.com/office/drawing/2014/main" id="{E4FFF991-5232-4E54-832F-91EA928B2422}"/>
+                <a16:creationId xmlns:a16="http://schemas.microsoft.com/office/drawing/2014/main" id="{8A64D52F-4F35-4433-AE67-FB4ECE99896A}"/>
               </a:ext>
             </a:extLst>
           </p:cNvPr>
@@ -19305,7 +19644,7 @@
           <p:cNvPr id="17" name="">
             <a:extLst xmlns:a="http://schemas.openxmlformats.org/drawingml/2006/main">
               <a:ext uri="{FF2B5EF4-FFF2-40B4-BE49-F238E27FC236}">
-                <a16:creationId xmlns:a16="http://schemas.microsoft.com/office/drawing/2014/main" id="{8592A0D1-1357-4E77-BBA7-131D79EF6AFA}"/>
+                <a16:creationId xmlns:a16="http://schemas.microsoft.com/office/drawing/2014/main" id="{9CC5AF5D-FEE9-456F-8562-F60F90623DDD}"/>
               </a:ext>
             </a:extLst>
           </p:cNvPr>
@@ -19337,7 +19676,7 @@
           <p:cNvPr id="18" name="">
             <a:extLst xmlns:a="http://schemas.openxmlformats.org/drawingml/2006/main">
               <a:ext uri="{FF2B5EF4-FFF2-40B4-BE49-F238E27FC236}">
-                <a16:creationId xmlns:a16="http://schemas.microsoft.com/office/drawing/2014/main" id="{0F3E51B5-7959-4AB1-8A29-8DD44ED42F3C}"/>
+                <a16:creationId xmlns:a16="http://schemas.microsoft.com/office/drawing/2014/main" id="{E2A15897-33BE-4951-858A-85D0259B698E}"/>
               </a:ext>
             </a:extLst>
           </p:cNvPr>
@@ -19394,7 +19733,7 @@
           <p:cNvPr id="19" name="">
             <a:extLst xmlns:a="http://schemas.openxmlformats.org/drawingml/2006/main">
               <a:ext uri="{FF2B5EF4-FFF2-40B4-BE49-F238E27FC236}">
-                <a16:creationId xmlns:a16="http://schemas.microsoft.com/office/drawing/2014/main" id="{B90224B8-F930-4CB2-A5B0-1EEF215BBFF0}"/>
+                <a16:creationId xmlns:a16="http://schemas.microsoft.com/office/drawing/2014/main" id="{CD0E8373-7DCD-48CA-9B75-EABA97470ACD}"/>
               </a:ext>
             </a:extLst>
           </p:cNvPr>
@@ -19449,7 +19788,7 @@
     </p:spTree>
     <p:extLst>
       <p:ext uri="{BB962C8B-B14F-4D97-AF65-F5344CB8AC3E}">
-        <p14:creationId xmlns:p14="http://schemas.microsoft.com/office/powerpoint/2010/main" val="1248758246"/>
+        <p14:creationId xmlns:p14="http://schemas.microsoft.com/office/powerpoint/2010/main" val="1596826599"/>
       </p:ext>
     </p:extLst>
   </p:cSld>
@@ -19480,7 +19819,7 @@
           <p:cNvPr id="27" name="">
             <a:extLst xmlns:a="http://schemas.openxmlformats.org/drawingml/2006/main">
               <a:ext uri="{FF2B5EF4-FFF2-40B4-BE49-F238E27FC236}">
-                <a16:creationId xmlns:a16="http://schemas.microsoft.com/office/drawing/2014/main" id="{9D5F19DB-708F-46F9-8235-DF3B144E8D46}"/>
+                <a16:creationId xmlns:a16="http://schemas.microsoft.com/office/drawing/2014/main" id="{B34E6AE4-85DE-45E4-BF73-B9002159EBB2}"/>
               </a:ext>
             </a:extLst>
           </p:cNvPr>
@@ -19512,7 +19851,7 @@
           <p:cNvPr id="2" name="">
             <a:extLst xmlns:a="http://schemas.openxmlformats.org/drawingml/2006/main">
               <a:ext uri="{FF2B5EF4-FFF2-40B4-BE49-F238E27FC236}">
-                <a16:creationId xmlns:a16="http://schemas.microsoft.com/office/drawing/2014/main" id="{89EA318A-501E-4C95-9CD5-D12EB94FE7E0}"/>
+                <a16:creationId xmlns:a16="http://schemas.microsoft.com/office/drawing/2014/main" id="{4398BA12-8560-4A7E-81C9-2649AB62844B}"/>
               </a:ext>
             </a:extLst>
           </p:cNvPr>
@@ -19569,7 +19908,7 @@
           <p:cNvPr id="3" name="">
             <a:extLst xmlns:a="http://schemas.openxmlformats.org/drawingml/2006/main">
               <a:ext uri="{FF2B5EF4-FFF2-40B4-BE49-F238E27FC236}">
-                <a16:creationId xmlns:a16="http://schemas.microsoft.com/office/drawing/2014/main" id="{C4509536-3F0F-4E12-A330-F9718B476882}"/>
+                <a16:creationId xmlns:a16="http://schemas.microsoft.com/office/drawing/2014/main" id="{BD344C6C-053A-4374-9421-365E35D8713E}"/>
               </a:ext>
             </a:extLst>
           </p:cNvPr>
@@ -19626,7 +19965,7 @@
           <p:cNvPr id="4" name="">
             <a:extLst xmlns:a="http://schemas.openxmlformats.org/drawingml/2006/main">
               <a:ext uri="{FF2B5EF4-FFF2-40B4-BE49-F238E27FC236}">
-                <a16:creationId xmlns:a16="http://schemas.microsoft.com/office/drawing/2014/main" id="{50A9FDDB-FB31-4D69-95E4-496C36584225}"/>
+                <a16:creationId xmlns:a16="http://schemas.microsoft.com/office/drawing/2014/main" id="{4B8B3B6A-EA7B-4220-B5D9-50193748017E}"/>
               </a:ext>
             </a:extLst>
           </p:cNvPr>
@@ -19683,7 +20022,7 @@
           <p:cNvPr id="5" name="">
             <a:extLst xmlns:a="http://schemas.openxmlformats.org/drawingml/2006/main">
               <a:ext uri="{FF2B5EF4-FFF2-40B4-BE49-F238E27FC236}">
-                <a16:creationId xmlns:a16="http://schemas.microsoft.com/office/drawing/2014/main" id="{6E07B8DE-02C9-47FE-812B-D7F00D75B24D}"/>
+                <a16:creationId xmlns:a16="http://schemas.microsoft.com/office/drawing/2014/main" id="{00CFD28A-0848-4703-A2BB-4559B0D1256A}"/>
               </a:ext>
             </a:extLst>
           </p:cNvPr>
@@ -19740,7 +20079,7 @@
           <p:cNvPr id="6" name="">
             <a:extLst xmlns:a="http://schemas.openxmlformats.org/drawingml/2006/main">
               <a:ext uri="{FF2B5EF4-FFF2-40B4-BE49-F238E27FC236}">
-                <a16:creationId xmlns:a16="http://schemas.microsoft.com/office/drawing/2014/main" id="{C28CD5E3-93D8-44AA-9A2D-76CEC06EAF66}"/>
+                <a16:creationId xmlns:a16="http://schemas.microsoft.com/office/drawing/2014/main" id="{3AE9149D-9ABE-489D-ABA6-62A4F8B5BBD2}"/>
               </a:ext>
             </a:extLst>
           </p:cNvPr>
@@ -19772,7 +20111,7 @@
           <p:cNvPr id="7" name="">
             <a:extLst xmlns:a="http://schemas.openxmlformats.org/drawingml/2006/main">
               <a:ext uri="{FF2B5EF4-FFF2-40B4-BE49-F238E27FC236}">
-                <a16:creationId xmlns:a16="http://schemas.microsoft.com/office/drawing/2014/main" id="{5ACC07AD-A846-4130-ADA5-4E6AEB3BFEFD}"/>
+                <a16:creationId xmlns:a16="http://schemas.microsoft.com/office/drawing/2014/main" id="{4A17076A-BBEB-4182-A2EB-A705E3C9D057}"/>
               </a:ext>
             </a:extLst>
           </p:cNvPr>
@@ -19829,7 +20168,7 @@
           <p:cNvPr id="8" name="">
             <a:extLst xmlns:a="http://schemas.openxmlformats.org/drawingml/2006/main">
               <a:ext uri="{FF2B5EF4-FFF2-40B4-BE49-F238E27FC236}">
-                <a16:creationId xmlns:a16="http://schemas.microsoft.com/office/drawing/2014/main" id="{5AE4B9F5-C936-47F8-95F1-69D28C6339A5}"/>
+                <a16:creationId xmlns:a16="http://schemas.microsoft.com/office/drawing/2014/main" id="{056CBB47-CD82-4F07-8BC9-3EF7CFC31D4E}"/>
               </a:ext>
             </a:extLst>
           </p:cNvPr>
@@ -19886,7 +20225,7 @@
           <p:cNvPr id="9" name="">
             <a:extLst xmlns:a="http://schemas.openxmlformats.org/drawingml/2006/main">
               <a:ext uri="{FF2B5EF4-FFF2-40B4-BE49-F238E27FC236}">
-                <a16:creationId xmlns:a16="http://schemas.microsoft.com/office/drawing/2014/main" id="{19DB5CA0-0DD0-4866-8698-393C72B20749}"/>
+                <a16:creationId xmlns:a16="http://schemas.microsoft.com/office/drawing/2014/main" id="{41B9D6BE-97BA-46AD-9AFB-553B026BC07A}"/>
               </a:ext>
             </a:extLst>
           </p:cNvPr>
@@ -19943,7 +20282,7 @@
           <p:cNvPr id="10" name="">
             <a:extLst xmlns:a="http://schemas.openxmlformats.org/drawingml/2006/main">
               <a:ext uri="{FF2B5EF4-FFF2-40B4-BE49-F238E27FC236}">
-                <a16:creationId xmlns:a16="http://schemas.microsoft.com/office/drawing/2014/main" id="{72529AC4-2E9D-41DF-BB82-7DADE9298421}"/>
+                <a16:creationId xmlns:a16="http://schemas.microsoft.com/office/drawing/2014/main" id="{D5FB3757-B8CE-4725-913C-57EB50F0E29E}"/>
               </a:ext>
             </a:extLst>
           </p:cNvPr>
@@ -20000,7 +20339,7 @@
           <p:cNvPr id="11" name="">
             <a:extLst xmlns:a="http://schemas.openxmlformats.org/drawingml/2006/main">
               <a:ext uri="{FF2B5EF4-FFF2-40B4-BE49-F238E27FC236}">
-                <a16:creationId xmlns:a16="http://schemas.microsoft.com/office/drawing/2014/main" id="{B59DA04A-45BB-4B45-A276-AE3E650F08BC}"/>
+                <a16:creationId xmlns:a16="http://schemas.microsoft.com/office/drawing/2014/main" id="{A247B0BB-C305-41DA-B45A-D43958F9D7F8}"/>
               </a:ext>
             </a:extLst>
           </p:cNvPr>
@@ -20032,7 +20371,7 @@
           <p:cNvPr id="12" name="">
             <a:extLst xmlns:a="http://schemas.openxmlformats.org/drawingml/2006/main">
               <a:ext uri="{FF2B5EF4-FFF2-40B4-BE49-F238E27FC236}">
-                <a16:creationId xmlns:a16="http://schemas.microsoft.com/office/drawing/2014/main" id="{52AE34BF-AC2C-4840-B4F8-C380EFE546A9}"/>
+                <a16:creationId xmlns:a16="http://schemas.microsoft.com/office/drawing/2014/main" id="{9B203C9F-2434-4401-9A9F-D58C0F6D9B1D}"/>
               </a:ext>
             </a:extLst>
           </p:cNvPr>
@@ -20089,7 +20428,7 @@
           <p:cNvPr id="13" name="">
             <a:extLst xmlns:a="http://schemas.openxmlformats.org/drawingml/2006/main">
               <a:ext uri="{FF2B5EF4-FFF2-40B4-BE49-F238E27FC236}">
-                <a16:creationId xmlns:a16="http://schemas.microsoft.com/office/drawing/2014/main" id="{1144F991-00C4-4685-83AF-074C27D497A7}"/>
+                <a16:creationId xmlns:a16="http://schemas.microsoft.com/office/drawing/2014/main" id="{8187EEDA-30CB-44A0-B323-387DA0AC2AE3}"/>
               </a:ext>
             </a:extLst>
           </p:cNvPr>
@@ -20146,7 +20485,7 @@
           <p:cNvPr id="14" name="">
             <a:extLst xmlns:a="http://schemas.openxmlformats.org/drawingml/2006/main">
               <a:ext uri="{FF2B5EF4-FFF2-40B4-BE49-F238E27FC236}">
-                <a16:creationId xmlns:a16="http://schemas.microsoft.com/office/drawing/2014/main" id="{56CE823D-04C2-4696-93F1-F96FDCA19FFA}"/>
+                <a16:creationId xmlns:a16="http://schemas.microsoft.com/office/drawing/2014/main" id="{5D8AB5AA-3208-412E-9CB0-0737A9FC6A95}"/>
               </a:ext>
             </a:extLst>
           </p:cNvPr>
@@ -20203,7 +20542,7 @@
           <p:cNvPr id="15" name="">
             <a:extLst xmlns:a="http://schemas.openxmlformats.org/drawingml/2006/main">
               <a:ext uri="{FF2B5EF4-FFF2-40B4-BE49-F238E27FC236}">
-                <a16:creationId xmlns:a16="http://schemas.microsoft.com/office/drawing/2014/main" id="{2F8F71DE-BC8E-498F-A715-CCF46F756A60}"/>
+                <a16:creationId xmlns:a16="http://schemas.microsoft.com/office/drawing/2014/main" id="{9698045F-3464-4D4A-8A29-4A9B36ED63D5}"/>
               </a:ext>
             </a:extLst>
           </p:cNvPr>
@@ -20260,7 +20599,7 @@
           <p:cNvPr id="16" name="">
             <a:extLst xmlns:a="http://schemas.openxmlformats.org/drawingml/2006/main">
               <a:ext uri="{FF2B5EF4-FFF2-40B4-BE49-F238E27FC236}">
-                <a16:creationId xmlns:a16="http://schemas.microsoft.com/office/drawing/2014/main" id="{CD55CD17-27ED-44C3-BED5-0DFB1DDBF696}"/>
+                <a16:creationId xmlns:a16="http://schemas.microsoft.com/office/drawing/2014/main" id="{4507580C-2A37-4525-A0AA-D30C6E447CF8}"/>
               </a:ext>
             </a:extLst>
           </p:cNvPr>
@@ -20292,7 +20631,7 @@
           <p:cNvPr id="17" name="">
             <a:extLst xmlns:a="http://schemas.openxmlformats.org/drawingml/2006/main">
               <a:ext uri="{FF2B5EF4-FFF2-40B4-BE49-F238E27FC236}">
-                <a16:creationId xmlns:a16="http://schemas.microsoft.com/office/drawing/2014/main" id="{86774DB2-18FB-4EC2-BCFD-E2D93F1CEFF3}"/>
+                <a16:creationId xmlns:a16="http://schemas.microsoft.com/office/drawing/2014/main" id="{ED396A5C-E1CE-457E-A56A-0D1BB819CDE1}"/>
               </a:ext>
             </a:extLst>
           </p:cNvPr>
@@ -20349,7 +20688,7 @@
           <p:cNvPr id="18" name="">
             <a:extLst xmlns:a="http://schemas.openxmlformats.org/drawingml/2006/main">
               <a:ext uri="{FF2B5EF4-FFF2-40B4-BE49-F238E27FC236}">
-                <a16:creationId xmlns:a16="http://schemas.microsoft.com/office/drawing/2014/main" id="{5E4E48CB-FC45-4030-89CB-8F3315E316A6}"/>
+                <a16:creationId xmlns:a16="http://schemas.microsoft.com/office/drawing/2014/main" id="{DB4C3A1B-8723-48EB-B33D-FF84CF00F35B}"/>
               </a:ext>
             </a:extLst>
           </p:cNvPr>
@@ -20406,7 +20745,7 @@
           <p:cNvPr id="19" name="">
             <a:extLst xmlns:a="http://schemas.openxmlformats.org/drawingml/2006/main">
               <a:ext uri="{FF2B5EF4-FFF2-40B4-BE49-F238E27FC236}">
-                <a16:creationId xmlns:a16="http://schemas.microsoft.com/office/drawing/2014/main" id="{66249CA7-16A0-447C-A492-270D4DD16E5D}"/>
+                <a16:creationId xmlns:a16="http://schemas.microsoft.com/office/drawing/2014/main" id="{453633E8-274D-453F-8897-BADB69C9DB22}"/>
               </a:ext>
             </a:extLst>
           </p:cNvPr>
@@ -20463,7 +20802,7 @@
           <p:cNvPr id="20" name="">
             <a:extLst xmlns:a="http://schemas.openxmlformats.org/drawingml/2006/main">
               <a:ext uri="{FF2B5EF4-FFF2-40B4-BE49-F238E27FC236}">
-                <a16:creationId xmlns:a16="http://schemas.microsoft.com/office/drawing/2014/main" id="{36DAF70D-681B-40E3-92E7-F6B71B7AF685}"/>
+                <a16:creationId xmlns:a16="http://schemas.microsoft.com/office/drawing/2014/main" id="{3E5DCAF4-3457-43D2-9DBF-B9AFC7C169BF}"/>
               </a:ext>
             </a:extLst>
           </p:cNvPr>
@@ -20520,7 +20859,7 @@
           <p:cNvPr id="21" name="">
             <a:extLst xmlns:a="http://schemas.openxmlformats.org/drawingml/2006/main">
               <a:ext uri="{FF2B5EF4-FFF2-40B4-BE49-F238E27FC236}">
-                <a16:creationId xmlns:a16="http://schemas.microsoft.com/office/drawing/2014/main" id="{E34D83DD-3A47-495C-A06C-6FEC17B9D017}"/>
+                <a16:creationId xmlns:a16="http://schemas.microsoft.com/office/drawing/2014/main" id="{7D1E9C30-DA1B-477D-96C0-0931D620DA7A}"/>
               </a:ext>
             </a:extLst>
           </p:cNvPr>
@@ -20552,7 +20891,7 @@
           <p:cNvPr id="22" name="">
             <a:extLst xmlns:a="http://schemas.openxmlformats.org/drawingml/2006/main">
               <a:ext uri="{FF2B5EF4-FFF2-40B4-BE49-F238E27FC236}">
-                <a16:creationId xmlns:a16="http://schemas.microsoft.com/office/drawing/2014/main" id="{3F4A7F18-DA66-4765-A881-7357D4AA9BA1}"/>
+                <a16:creationId xmlns:a16="http://schemas.microsoft.com/office/drawing/2014/main" id="{EB29FF60-5F9E-4C4A-94DD-6DEE7AF3D779}"/>
               </a:ext>
             </a:extLst>
           </p:cNvPr>
@@ -20609,7 +20948,7 @@
           <p:cNvPr id="23" name="">
             <a:extLst xmlns:a="http://schemas.openxmlformats.org/drawingml/2006/main">
               <a:ext uri="{FF2B5EF4-FFF2-40B4-BE49-F238E27FC236}">
-                <a16:creationId xmlns:a16="http://schemas.microsoft.com/office/drawing/2014/main" id="{745BD45F-7C93-49F8-80DD-0DD621C13BDB}"/>
+                <a16:creationId xmlns:a16="http://schemas.microsoft.com/office/drawing/2014/main" id="{18CE2542-CEF7-476D-A6CE-C12D9B970D39}"/>
               </a:ext>
             </a:extLst>
           </p:cNvPr>
@@ -20666,7 +21005,7 @@
           <p:cNvPr id="24" name="">
             <a:extLst xmlns:a="http://schemas.openxmlformats.org/drawingml/2006/main">
               <a:ext uri="{FF2B5EF4-FFF2-40B4-BE49-F238E27FC236}">
-                <a16:creationId xmlns:a16="http://schemas.microsoft.com/office/drawing/2014/main" id="{6BD38834-6916-4EE2-83F8-F796EFACC195}"/>
+                <a16:creationId xmlns:a16="http://schemas.microsoft.com/office/drawing/2014/main" id="{16D84A09-874C-4C61-A933-C637CB677A45}"/>
               </a:ext>
             </a:extLst>
           </p:cNvPr>
@@ -20723,7 +21062,7 @@
           <p:cNvPr id="25" name="">
             <a:extLst xmlns:a="http://schemas.openxmlformats.org/drawingml/2006/main">
               <a:ext uri="{FF2B5EF4-FFF2-40B4-BE49-F238E27FC236}">
-                <a16:creationId xmlns:a16="http://schemas.microsoft.com/office/drawing/2014/main" id="{A7DE42C5-ED89-4AFF-8877-811D709FAC06}"/>
+                <a16:creationId xmlns:a16="http://schemas.microsoft.com/office/drawing/2014/main" id="{DE4EA39D-089E-4151-98AB-5D24BD45E470}"/>
               </a:ext>
             </a:extLst>
           </p:cNvPr>
@@ -20780,7 +21119,7 @@
           <p:cNvPr id="26" name="">
             <a:extLst xmlns:a="http://schemas.openxmlformats.org/drawingml/2006/main">
               <a:ext uri="{FF2B5EF4-FFF2-40B4-BE49-F238E27FC236}">
-                <a16:creationId xmlns:a16="http://schemas.microsoft.com/office/drawing/2014/main" id="{FB0983F7-B066-478A-BDC9-F03992588007}"/>
+                <a16:creationId xmlns:a16="http://schemas.microsoft.com/office/drawing/2014/main" id="{9AF795AF-9CCF-4EAC-A307-CEF8D5F7982A}"/>
               </a:ext>
             </a:extLst>
           </p:cNvPr>
@@ -20835,7 +21174,7 @@
     </p:spTree>
     <p:extLst>
       <p:ext uri="{BB962C8B-B14F-4D97-AF65-F5344CB8AC3E}">
-        <p14:creationId xmlns:p14="http://schemas.microsoft.com/office/powerpoint/2010/main" val="1838291705"/>
+        <p14:creationId xmlns:p14="http://schemas.microsoft.com/office/powerpoint/2010/main" val="801965427"/>
       </p:ext>
     </p:extLst>
   </p:cSld>
@@ -20866,7 +21205,7 @@
           <p:cNvPr id="15" name="">
             <a:extLst xmlns:a="http://schemas.openxmlformats.org/drawingml/2006/main">
               <a:ext uri="{FF2B5EF4-FFF2-40B4-BE49-F238E27FC236}">
-                <a16:creationId xmlns:a16="http://schemas.microsoft.com/office/drawing/2014/main" id="{3DAA640D-202B-4F03-B92A-D133E6998DAE}"/>
+                <a16:creationId xmlns:a16="http://schemas.microsoft.com/office/drawing/2014/main" id="{ADA27B83-1D30-449E-8121-0D04CFD44823}"/>
               </a:ext>
             </a:extLst>
           </p:cNvPr>
@@ -20898,7 +21237,7 @@
           <p:cNvPr id="2" name="">
             <a:extLst xmlns:a="http://schemas.openxmlformats.org/drawingml/2006/main">
               <a:ext uri="{FF2B5EF4-FFF2-40B4-BE49-F238E27FC236}">
-                <a16:creationId xmlns:a16="http://schemas.microsoft.com/office/drawing/2014/main" id="{B3194928-D85F-46FB-9A4D-6D23C1138FCC}"/>
+                <a16:creationId xmlns:a16="http://schemas.microsoft.com/office/drawing/2014/main" id="{90DEB117-1580-4607-9145-8BD69C17A0F6}"/>
               </a:ext>
             </a:extLst>
           </p:cNvPr>
@@ -20955,7 +21294,7 @@
           <p:cNvPr id="3" name="">
             <a:extLst xmlns:a="http://schemas.openxmlformats.org/drawingml/2006/main">
               <a:ext uri="{FF2B5EF4-FFF2-40B4-BE49-F238E27FC236}">
-                <a16:creationId xmlns:a16="http://schemas.microsoft.com/office/drawing/2014/main" id="{846C4EE4-7CF7-43EC-94E3-ADEC203F0410}"/>
+                <a16:creationId xmlns:a16="http://schemas.microsoft.com/office/drawing/2014/main" id="{FC4D2405-631F-4598-9D68-CDE0D67B8344}"/>
               </a:ext>
             </a:extLst>
           </p:cNvPr>
@@ -21012,7 +21351,7 @@
           <p:cNvPr id="4" name="">
             <a:extLst xmlns:a="http://schemas.openxmlformats.org/drawingml/2006/main">
               <a:ext uri="{FF2B5EF4-FFF2-40B4-BE49-F238E27FC236}">
-                <a16:creationId xmlns:a16="http://schemas.microsoft.com/office/drawing/2014/main" id="{CB1CC7C9-8CDF-4DBA-A7C9-1AC787AA44DE}"/>
+                <a16:creationId xmlns:a16="http://schemas.microsoft.com/office/drawing/2014/main" id="{1F70FBC5-C1AE-4422-ACE2-26B0DC067A04}"/>
               </a:ext>
             </a:extLst>
           </p:cNvPr>
@@ -21069,7 +21408,7 @@
           <p:cNvPr id="5" name="">
             <a:extLst xmlns:a="http://schemas.openxmlformats.org/drawingml/2006/main">
               <a:ext uri="{FF2B5EF4-FFF2-40B4-BE49-F238E27FC236}">
-                <a16:creationId xmlns:a16="http://schemas.microsoft.com/office/drawing/2014/main" id="{7346C690-83C4-4989-91CB-D68A8C0780BF}"/>
+                <a16:creationId xmlns:a16="http://schemas.microsoft.com/office/drawing/2014/main" id="{0AE2CAB9-09B2-488A-80F6-44E30EFB8B54}"/>
               </a:ext>
             </a:extLst>
           </p:cNvPr>
@@ -21126,7 +21465,7 @@
           <p:cNvPr id="6" name="">
             <a:extLst xmlns:a="http://schemas.openxmlformats.org/drawingml/2006/main">
               <a:ext uri="{FF2B5EF4-FFF2-40B4-BE49-F238E27FC236}">
-                <a16:creationId xmlns:a16="http://schemas.microsoft.com/office/drawing/2014/main" id="{8BE81D9B-529A-4A10-AD81-E059AC0175DA}"/>
+                <a16:creationId xmlns:a16="http://schemas.microsoft.com/office/drawing/2014/main" id="{4FEED139-4EA7-41EF-8F25-7EA381E3CCF8}"/>
               </a:ext>
             </a:extLst>
           </p:cNvPr>
@@ -21183,7 +21522,7 @@
           <p:cNvPr id="7" name="">
             <a:extLst xmlns:a="http://schemas.openxmlformats.org/drawingml/2006/main">
               <a:ext uri="{FF2B5EF4-FFF2-40B4-BE49-F238E27FC236}">
-                <a16:creationId xmlns:a16="http://schemas.microsoft.com/office/drawing/2014/main" id="{91F180AD-2133-46EE-9299-615CDBF682B7}"/>
+                <a16:creationId xmlns:a16="http://schemas.microsoft.com/office/drawing/2014/main" id="{3F77748A-D517-45F6-9D12-89A95EC65506}"/>
               </a:ext>
             </a:extLst>
           </p:cNvPr>
@@ -21240,7 +21579,7 @@
           <p:cNvPr id="8" name="">
             <a:extLst xmlns:a="http://schemas.openxmlformats.org/drawingml/2006/main">
               <a:ext uri="{FF2B5EF4-FFF2-40B4-BE49-F238E27FC236}">
-                <a16:creationId xmlns:a16="http://schemas.microsoft.com/office/drawing/2014/main" id="{860FF441-18FC-4DDD-97BF-4D1B54737992}"/>
+                <a16:creationId xmlns:a16="http://schemas.microsoft.com/office/drawing/2014/main" id="{BCFCC041-92F3-4A5C-AC0C-0A3AF227B24C}"/>
               </a:ext>
             </a:extLst>
           </p:cNvPr>
@@ -21297,7 +21636,7 @@
           <p:cNvPr id="9" name="">
             <a:extLst xmlns:a="http://schemas.openxmlformats.org/drawingml/2006/main">
               <a:ext uri="{FF2B5EF4-FFF2-40B4-BE49-F238E27FC236}">
-                <a16:creationId xmlns:a16="http://schemas.microsoft.com/office/drawing/2014/main" id="{47338275-F74B-4F42-AA97-42D1FADEB3BF}"/>
+                <a16:creationId xmlns:a16="http://schemas.microsoft.com/office/drawing/2014/main" id="{AA6EAB71-6EC7-460B-B241-08FDFA69D6C6}"/>
               </a:ext>
             </a:extLst>
           </p:cNvPr>
@@ -21354,7 +21693,7 @@
           <p:cNvPr id="10" name="">
             <a:extLst xmlns:a="http://schemas.openxmlformats.org/drawingml/2006/main">
               <a:ext uri="{FF2B5EF4-FFF2-40B4-BE49-F238E27FC236}">
-                <a16:creationId xmlns:a16="http://schemas.microsoft.com/office/drawing/2014/main" id="{B4C82C54-3986-4283-A2A8-774662FF81B3}"/>
+                <a16:creationId xmlns:a16="http://schemas.microsoft.com/office/drawing/2014/main" id="{1E07A86E-C1CD-45AF-B601-B70A57BDDC48}"/>
               </a:ext>
             </a:extLst>
           </p:cNvPr>
@@ -21411,7 +21750,7 @@
           <p:cNvPr id="11" name="">
             <a:extLst xmlns:a="http://schemas.openxmlformats.org/drawingml/2006/main">
               <a:ext uri="{FF2B5EF4-FFF2-40B4-BE49-F238E27FC236}">
-                <a16:creationId xmlns:a16="http://schemas.microsoft.com/office/drawing/2014/main" id="{140CD19E-D254-4AFB-A0D5-085B76F97BBB}"/>
+                <a16:creationId xmlns:a16="http://schemas.microsoft.com/office/drawing/2014/main" id="{06B59177-37AB-456A-94CA-2B86DC57662C}"/>
               </a:ext>
             </a:extLst>
           </p:cNvPr>
@@ -21468,7 +21807,7 @@
           <p:cNvPr id="12" name="">
             <a:extLst xmlns:a="http://schemas.openxmlformats.org/drawingml/2006/main">
               <a:ext uri="{FF2B5EF4-FFF2-40B4-BE49-F238E27FC236}">
-                <a16:creationId xmlns:a16="http://schemas.microsoft.com/office/drawing/2014/main" id="{C07C1745-0FC4-4A78-93DD-B885B15B8015}"/>
+                <a16:creationId xmlns:a16="http://schemas.microsoft.com/office/drawing/2014/main" id="{CF8A8BD4-5610-4023-8F64-6C21D42E4E91}"/>
               </a:ext>
             </a:extLst>
           </p:cNvPr>
@@ -21500,7 +21839,7 @@
           <p:cNvPr id="13" name="">
             <a:extLst xmlns:a="http://schemas.openxmlformats.org/drawingml/2006/main">
               <a:ext uri="{FF2B5EF4-FFF2-40B4-BE49-F238E27FC236}">
-                <a16:creationId xmlns:a16="http://schemas.microsoft.com/office/drawing/2014/main" id="{3F6DD9DC-5174-4203-8FFD-92EBA87FB3AA}"/>
+                <a16:creationId xmlns:a16="http://schemas.microsoft.com/office/drawing/2014/main" id="{0C6B27AC-A0DF-4D22-B9CA-F0E15C2B63D5}"/>
               </a:ext>
             </a:extLst>
           </p:cNvPr>
@@ -21557,7 +21896,7 @@
           <p:cNvPr id="14" name="">
             <a:extLst xmlns:a="http://schemas.openxmlformats.org/drawingml/2006/main">
               <a:ext uri="{FF2B5EF4-FFF2-40B4-BE49-F238E27FC236}">
-                <a16:creationId xmlns:a16="http://schemas.microsoft.com/office/drawing/2014/main" id="{99E515B9-1927-4C30-B5BB-7957B1153922}"/>
+                <a16:creationId xmlns:a16="http://schemas.microsoft.com/office/drawing/2014/main" id="{AEA53982-3181-4E0D-9D81-1D462A2A4F04}"/>
               </a:ext>
             </a:extLst>
           </p:cNvPr>
@@ -21612,7 +21951,7 @@
     </p:spTree>
     <p:extLst>
       <p:ext uri="{BB962C8B-B14F-4D97-AF65-F5344CB8AC3E}">
-        <p14:creationId xmlns:p14="http://schemas.microsoft.com/office/powerpoint/2010/main" val="1899774380"/>
+        <p14:creationId xmlns:p14="http://schemas.microsoft.com/office/powerpoint/2010/main" val="1812065336"/>
       </p:ext>
     </p:extLst>
   </p:cSld>
@@ -21643,7 +21982,7 @@
           <p:cNvPr id="11" name="">
             <a:extLst xmlns:a="http://schemas.openxmlformats.org/drawingml/2006/main">
               <a:ext uri="{FF2B5EF4-FFF2-40B4-BE49-F238E27FC236}">
-                <a16:creationId xmlns:a16="http://schemas.microsoft.com/office/drawing/2014/main" id="{8C9E71E7-14E4-4DFA-B239-30C652CB7BF2}"/>
+                <a16:creationId xmlns:a16="http://schemas.microsoft.com/office/drawing/2014/main" id="{F389D5DC-1F31-4BFD-A607-A05929C563DF}"/>
               </a:ext>
             </a:extLst>
           </p:cNvPr>
@@ -21675,7 +22014,7 @@
           <p:cNvPr id="2" name="">
             <a:extLst xmlns:a="http://schemas.openxmlformats.org/drawingml/2006/main">
               <a:ext uri="{FF2B5EF4-FFF2-40B4-BE49-F238E27FC236}">
-                <a16:creationId xmlns:a16="http://schemas.microsoft.com/office/drawing/2014/main" id="{79F6BCE1-508C-4B6B-9A8A-3C448997C64C}"/>
+                <a16:creationId xmlns:a16="http://schemas.microsoft.com/office/drawing/2014/main" id="{9F18BC81-E518-49C1-8287-C831D9DF3F0D}"/>
               </a:ext>
             </a:extLst>
           </p:cNvPr>
@@ -21732,7 +22071,7 @@
           <p:cNvPr id="3" name="">
             <a:extLst xmlns:a="http://schemas.openxmlformats.org/drawingml/2006/main">
               <a:ext uri="{FF2B5EF4-FFF2-40B4-BE49-F238E27FC236}">
-                <a16:creationId xmlns:a16="http://schemas.microsoft.com/office/drawing/2014/main" id="{45214B21-2E99-4CA2-8C79-A8779B62D16C}"/>
+                <a16:creationId xmlns:a16="http://schemas.microsoft.com/office/drawing/2014/main" id="{BBE1BE54-4283-456C-A0AE-207997BA813B}"/>
               </a:ext>
             </a:extLst>
           </p:cNvPr>
@@ -21789,7 +22128,7 @@
           <p:cNvPr id="4" name="">
             <a:extLst xmlns:a="http://schemas.openxmlformats.org/drawingml/2006/main">
               <a:ext uri="{FF2B5EF4-FFF2-40B4-BE49-F238E27FC236}">
-                <a16:creationId xmlns:a16="http://schemas.microsoft.com/office/drawing/2014/main" id="{07DF4FAF-7AEA-4AC6-A139-3F57B5E21FD4}"/>
+                <a16:creationId xmlns:a16="http://schemas.microsoft.com/office/drawing/2014/main" id="{126C8204-0CE2-4463-AC3C-EBD608282DC8}"/>
               </a:ext>
             </a:extLst>
           </p:cNvPr>
@@ -21846,7 +22185,7 @@
           <p:cNvPr id="5" name="">
             <a:extLst xmlns:a="http://schemas.openxmlformats.org/drawingml/2006/main">
               <a:ext uri="{FF2B5EF4-FFF2-40B4-BE49-F238E27FC236}">
-                <a16:creationId xmlns:a16="http://schemas.microsoft.com/office/drawing/2014/main" id="{06383712-7B82-4F6C-909C-54F3B219BDBF}"/>
+                <a16:creationId xmlns:a16="http://schemas.microsoft.com/office/drawing/2014/main" id="{430F8590-A42A-413F-88DF-D9825F08DAFA}"/>
               </a:ext>
             </a:extLst>
           </p:cNvPr>
@@ -21903,7 +22242,7 @@
           <p:cNvPr id="6" name="">
             <a:extLst xmlns:a="http://schemas.openxmlformats.org/drawingml/2006/main">
               <a:ext uri="{FF2B5EF4-FFF2-40B4-BE49-F238E27FC236}">
-                <a16:creationId xmlns:a16="http://schemas.microsoft.com/office/drawing/2014/main" id="{6D62CD11-F349-4029-9D1A-AF1A7623E1A7}"/>
+                <a16:creationId xmlns:a16="http://schemas.microsoft.com/office/drawing/2014/main" id="{E69A4C42-1F83-42B6-ABC4-FBA412C54D4B}"/>
               </a:ext>
             </a:extLst>
           </p:cNvPr>
@@ -21960,7 +22299,7 @@
           <p:cNvPr id="7" name="">
             <a:extLst xmlns:a="http://schemas.openxmlformats.org/drawingml/2006/main">
               <a:ext uri="{FF2B5EF4-FFF2-40B4-BE49-F238E27FC236}">
-                <a16:creationId xmlns:a16="http://schemas.microsoft.com/office/drawing/2014/main" id="{7DB31BC6-FC3D-405D-A77E-C69CFB0D6CEE}"/>
+                <a16:creationId xmlns:a16="http://schemas.microsoft.com/office/drawing/2014/main" id="{612C3E09-7F9C-494B-A771-83AE3DC0694B}"/>
               </a:ext>
             </a:extLst>
           </p:cNvPr>
@@ -22102,7 +22441,7 @@
           <p:cNvPr id="8" name="">
             <a:extLst xmlns:a="http://schemas.openxmlformats.org/drawingml/2006/main">
               <a:ext uri="{FF2B5EF4-FFF2-40B4-BE49-F238E27FC236}">
-                <a16:creationId xmlns:a16="http://schemas.microsoft.com/office/drawing/2014/main" id="{08EE69E7-6543-4390-9D5D-B18FFA5BFA06}"/>
+                <a16:creationId xmlns:a16="http://schemas.microsoft.com/office/drawing/2014/main" id="{2B7008E0-8647-491D-AE35-5653A0642815}"/>
               </a:ext>
             </a:extLst>
           </p:cNvPr>
@@ -22159,7 +22498,7 @@
           <p:cNvPr id="9" name="">
             <a:extLst xmlns:a="http://schemas.openxmlformats.org/drawingml/2006/main">
               <a:ext uri="{FF2B5EF4-FFF2-40B4-BE49-F238E27FC236}">
-                <a16:creationId xmlns:a16="http://schemas.microsoft.com/office/drawing/2014/main" id="{B6A58B3A-0567-41BD-B3FC-420199718ED6}"/>
+                <a16:creationId xmlns:a16="http://schemas.microsoft.com/office/drawing/2014/main" id="{95AEB576-05A6-4B15-A017-2BB6E3124A06}"/>
               </a:ext>
             </a:extLst>
           </p:cNvPr>
@@ -22301,7 +22640,7 @@
           <p:cNvPr id="10" name="">
             <a:extLst xmlns:a="http://schemas.openxmlformats.org/drawingml/2006/main">
               <a:ext uri="{FF2B5EF4-FFF2-40B4-BE49-F238E27FC236}">
-                <a16:creationId xmlns:a16="http://schemas.microsoft.com/office/drawing/2014/main" id="{F12031E3-79DF-42B2-BEAC-E7D199870BDC}"/>
+                <a16:creationId xmlns:a16="http://schemas.microsoft.com/office/drawing/2014/main" id="{528CEF40-9E86-479D-B153-4397DB248BD0}"/>
               </a:ext>
             </a:extLst>
           </p:cNvPr>
@@ -22356,7 +22695,7 @@
     </p:spTree>
     <p:extLst>
       <p:ext uri="{BB962C8B-B14F-4D97-AF65-F5344CB8AC3E}">
-        <p14:creationId xmlns:p14="http://schemas.microsoft.com/office/powerpoint/2010/main" val="958572106"/>
+        <p14:creationId xmlns:p14="http://schemas.microsoft.com/office/powerpoint/2010/main" val="2078459503"/>
       </p:ext>
     </p:extLst>
   </p:cSld>
@@ -22387,7 +22726,7 @@
           <p:cNvPr id="15" name="">
             <a:extLst xmlns:a="http://schemas.openxmlformats.org/drawingml/2006/main">
               <a:ext uri="{FF2B5EF4-FFF2-40B4-BE49-F238E27FC236}">
-                <a16:creationId xmlns:a16="http://schemas.microsoft.com/office/drawing/2014/main" id="{6F552BFC-2818-4E01-91A5-B52DB22364C9}"/>
+                <a16:creationId xmlns:a16="http://schemas.microsoft.com/office/drawing/2014/main" id="{31F38DF3-542F-4A8D-AB70-F2D967052B8E}"/>
               </a:ext>
             </a:extLst>
           </p:cNvPr>
@@ -22419,7 +22758,7 @@
           <p:cNvPr id="2" name="">
             <a:extLst xmlns:a="http://schemas.openxmlformats.org/drawingml/2006/main">
               <a:ext uri="{FF2B5EF4-FFF2-40B4-BE49-F238E27FC236}">
-                <a16:creationId xmlns:a16="http://schemas.microsoft.com/office/drawing/2014/main" id="{EFE7D2CB-F34D-45E0-ABDD-B03B15AFA4BD}"/>
+                <a16:creationId xmlns:a16="http://schemas.microsoft.com/office/drawing/2014/main" id="{711452FA-74B4-4881-88AB-4973C6420F9F}"/>
               </a:ext>
             </a:extLst>
           </p:cNvPr>
@@ -22476,7 +22815,7 @@
           <p:cNvPr id="3" name="">
             <a:extLst xmlns:a="http://schemas.openxmlformats.org/drawingml/2006/main">
               <a:ext uri="{FF2B5EF4-FFF2-40B4-BE49-F238E27FC236}">
-                <a16:creationId xmlns:a16="http://schemas.microsoft.com/office/drawing/2014/main" id="{2C97D205-7AB2-4302-8DBA-603C53399473}"/>
+                <a16:creationId xmlns:a16="http://schemas.microsoft.com/office/drawing/2014/main" id="{13CE9888-D1F2-49FD-9654-909DA626858A}"/>
               </a:ext>
             </a:extLst>
           </p:cNvPr>
@@ -22533,7 +22872,7 @@
           <p:cNvPr id="4" name="">
             <a:extLst xmlns:a="http://schemas.openxmlformats.org/drawingml/2006/main">
               <a:ext uri="{FF2B5EF4-FFF2-40B4-BE49-F238E27FC236}">
-                <a16:creationId xmlns:a16="http://schemas.microsoft.com/office/drawing/2014/main" id="{9FAB431E-19E1-43C3-B9DF-B4BD0286FA6D}"/>
+                <a16:creationId xmlns:a16="http://schemas.microsoft.com/office/drawing/2014/main" id="{80B67286-A2E7-43BC-AA65-3C4AE3E9F4D5}"/>
               </a:ext>
             </a:extLst>
           </p:cNvPr>
@@ -22590,7 +22929,7 @@
           <p:cNvPr id="5" name="">
             <a:extLst xmlns:a="http://schemas.openxmlformats.org/drawingml/2006/main">
               <a:ext uri="{FF2B5EF4-FFF2-40B4-BE49-F238E27FC236}">
-                <a16:creationId xmlns:a16="http://schemas.microsoft.com/office/drawing/2014/main" id="{61471D92-59A4-4AD0-B6DE-AD5CD33DAF30}"/>
+                <a16:creationId xmlns:a16="http://schemas.microsoft.com/office/drawing/2014/main" id="{A06A464C-A61A-4B82-9A20-1CA6055B99A1}"/>
               </a:ext>
             </a:extLst>
           </p:cNvPr>
@@ -22647,7 +22986,7 @@
           <p:cNvPr id="6" name="">
             <a:extLst xmlns:a="http://schemas.openxmlformats.org/drawingml/2006/main">
               <a:ext uri="{FF2B5EF4-FFF2-40B4-BE49-F238E27FC236}">
-                <a16:creationId xmlns:a16="http://schemas.microsoft.com/office/drawing/2014/main" id="{A2740DC0-51FD-4E09-93FE-9F0B22391020}"/>
+                <a16:creationId xmlns:a16="http://schemas.microsoft.com/office/drawing/2014/main" id="{F3B80394-FF35-4E1A-A7DF-15F42CC55BB9}"/>
               </a:ext>
             </a:extLst>
           </p:cNvPr>
@@ -22704,7 +23043,7 @@
           <p:cNvPr id="7" name="">
             <a:extLst xmlns:a="http://schemas.openxmlformats.org/drawingml/2006/main">
               <a:ext uri="{FF2B5EF4-FFF2-40B4-BE49-F238E27FC236}">
-                <a16:creationId xmlns:a16="http://schemas.microsoft.com/office/drawing/2014/main" id="{D528C2CA-7E96-41C1-A56F-A6801DD3E21A}"/>
+                <a16:creationId xmlns:a16="http://schemas.microsoft.com/office/drawing/2014/main" id="{0A0255AE-2AC9-44BD-82F0-70DC68697E33}"/>
               </a:ext>
             </a:extLst>
           </p:cNvPr>
@@ -22819,7 +23158,7 @@
           <p:cNvPr id="8" name="">
             <a:extLst xmlns:a="http://schemas.openxmlformats.org/drawingml/2006/main">
               <a:ext uri="{FF2B5EF4-FFF2-40B4-BE49-F238E27FC236}">
-                <a16:creationId xmlns:a16="http://schemas.microsoft.com/office/drawing/2014/main" id="{331DF808-05BB-47C9-8EC5-9DFB8A06C473}"/>
+                <a16:creationId xmlns:a16="http://schemas.microsoft.com/office/drawing/2014/main" id="{A343E61C-285A-4560-9E1A-FCB803619914}"/>
               </a:ext>
             </a:extLst>
           </p:cNvPr>
@@ -22876,7 +23215,7 @@
           <p:cNvPr id="9" name="">
             <a:extLst xmlns:a="http://schemas.openxmlformats.org/drawingml/2006/main">
               <a:ext uri="{FF2B5EF4-FFF2-40B4-BE49-F238E27FC236}">
-                <a16:creationId xmlns:a16="http://schemas.microsoft.com/office/drawing/2014/main" id="{544BD392-5252-41DD-85FC-D0196151852D}"/>
+                <a16:creationId xmlns:a16="http://schemas.microsoft.com/office/drawing/2014/main" id="{A35B8A64-4D6E-4649-BED0-0FC8A463EBA0}"/>
               </a:ext>
             </a:extLst>
           </p:cNvPr>
@@ -22927,7 +23266,7 @@
                 <a:ea typeface="Arial"/>
                 <a:cs typeface="Arial"/>
               </a:rPr>
-              <a:t>Scan geral com --config auto</a:t>
+              <a:t>Regras comunitárias com --config auto</a:t>
             </a:r>
           </a:p>
           <a:p xmlns:a="http://schemas.openxmlformats.org/drawingml/2006/main">
@@ -22954,7 +23293,7 @@
                 <a:ea typeface="Arial"/>
                 <a:cs typeface="Arial"/>
               </a:rPr>
-              <a:t>Regra local para o red e green</a:t>
+              <a:t>Mesmo conjunto no red e green</a:t>
             </a:r>
           </a:p>
           <a:p xmlns:a="http://schemas.openxmlformats.org/drawingml/2006/main">
@@ -22991,7 +23330,7 @@
           <p:cNvPr id="10" name="">
             <a:extLst xmlns:a="http://schemas.openxmlformats.org/drawingml/2006/main">
               <a:ext uri="{FF2B5EF4-FFF2-40B4-BE49-F238E27FC236}">
-                <a16:creationId xmlns:a16="http://schemas.microsoft.com/office/drawing/2014/main" id="{9D097F02-4ECA-4979-B722-B94758A78509}"/>
+                <a16:creationId xmlns:a16="http://schemas.microsoft.com/office/drawing/2014/main" id="{A12A85A5-9236-4DA3-AAB4-C08B12AC5910}"/>
               </a:ext>
             </a:extLst>
           </p:cNvPr>
@@ -23023,7 +23362,7 @@
           <p:cNvPr id="11" name="">
             <a:extLst xmlns:a="http://schemas.openxmlformats.org/drawingml/2006/main">
               <a:ext uri="{FF2B5EF4-FFF2-40B4-BE49-F238E27FC236}">
-                <a16:creationId xmlns:a16="http://schemas.microsoft.com/office/drawing/2014/main" id="{A149B554-741C-4938-A4B1-E137283E6FF4}"/>
+                <a16:creationId xmlns:a16="http://schemas.microsoft.com/office/drawing/2014/main" id="{50CE9BDF-B08E-4771-9ED9-D8F20EB27BE9}"/>
               </a:ext>
             </a:extLst>
           </p:cNvPr>
@@ -23080,7 +23419,7 @@
           <p:cNvPr id="12" name="">
             <a:extLst xmlns:a="http://schemas.openxmlformats.org/drawingml/2006/main">
               <a:ext uri="{FF2B5EF4-FFF2-40B4-BE49-F238E27FC236}">
-                <a16:creationId xmlns:a16="http://schemas.microsoft.com/office/drawing/2014/main" id="{4F890C99-D355-40B1-967A-14F0F7644CEA}"/>
+                <a16:creationId xmlns:a16="http://schemas.microsoft.com/office/drawing/2014/main" id="{D6DC8DB7-54A8-4E8D-9748-2E0DF21602FC}"/>
               </a:ext>
             </a:extLst>
           </p:cNvPr>
@@ -23137,7 +23476,7 @@
           <p:cNvPr id="13" name="">
             <a:extLst xmlns:a="http://schemas.openxmlformats.org/drawingml/2006/main">
               <a:ext uri="{FF2B5EF4-FFF2-40B4-BE49-F238E27FC236}">
-                <a16:creationId xmlns:a16="http://schemas.microsoft.com/office/drawing/2014/main" id="{9AFF1DF3-7DEE-434D-B4BF-82710956A80F}"/>
+                <a16:creationId xmlns:a16="http://schemas.microsoft.com/office/drawing/2014/main" id="{C04136EE-45C2-4A04-AE49-7A767FDAB3DD}"/>
               </a:ext>
             </a:extLst>
           </p:cNvPr>
@@ -23194,7 +23533,7 @@
           <p:cNvPr id="14" name="">
             <a:extLst xmlns:a="http://schemas.openxmlformats.org/drawingml/2006/main">
               <a:ext uri="{FF2B5EF4-FFF2-40B4-BE49-F238E27FC236}">
-                <a16:creationId xmlns:a16="http://schemas.microsoft.com/office/drawing/2014/main" id="{A2D52CD6-CD17-4DA6-824C-749154772521}"/>
+                <a16:creationId xmlns:a16="http://schemas.microsoft.com/office/drawing/2014/main" id="{17531132-41D1-4401-9C70-52874632B75B}"/>
               </a:ext>
             </a:extLst>
           </p:cNvPr>
@@ -23249,7 +23588,7 @@
     </p:spTree>
     <p:extLst>
       <p:ext uri="{BB962C8B-B14F-4D97-AF65-F5344CB8AC3E}">
-        <p14:creationId xmlns:p14="http://schemas.microsoft.com/office/powerpoint/2010/main" val="682687681"/>
+        <p14:creationId xmlns:p14="http://schemas.microsoft.com/office/powerpoint/2010/main" val="1917930698"/>
       </p:ext>
     </p:extLst>
   </p:cSld>
@@ -23280,7 +23619,7 @@
           <p:cNvPr id="15" name="">
             <a:extLst xmlns:a="http://schemas.openxmlformats.org/drawingml/2006/main">
               <a:ext uri="{FF2B5EF4-FFF2-40B4-BE49-F238E27FC236}">
-                <a16:creationId xmlns:a16="http://schemas.microsoft.com/office/drawing/2014/main" id="{B1EC6B87-CFD8-4697-A1A6-800D48873280}"/>
+                <a16:creationId xmlns:a16="http://schemas.microsoft.com/office/drawing/2014/main" id="{CA9F4931-8E63-4664-8567-4C767DEC19D8}"/>
               </a:ext>
             </a:extLst>
           </p:cNvPr>
@@ -23312,7 +23651,7 @@
           <p:cNvPr id="2" name="">
             <a:extLst xmlns:a="http://schemas.openxmlformats.org/drawingml/2006/main">
               <a:ext uri="{FF2B5EF4-FFF2-40B4-BE49-F238E27FC236}">
-                <a16:creationId xmlns:a16="http://schemas.microsoft.com/office/drawing/2014/main" id="{CC817E41-FC11-4D04-9444-CBB4DB654E33}"/>
+                <a16:creationId xmlns:a16="http://schemas.microsoft.com/office/drawing/2014/main" id="{8ED59AB7-9FE0-4DE4-9899-25D3F5E434E7}"/>
               </a:ext>
             </a:extLst>
           </p:cNvPr>
@@ -23369,7 +23708,7 @@
           <p:cNvPr id="3" name="">
             <a:extLst xmlns:a="http://schemas.openxmlformats.org/drawingml/2006/main">
               <a:ext uri="{FF2B5EF4-FFF2-40B4-BE49-F238E27FC236}">
-                <a16:creationId xmlns:a16="http://schemas.microsoft.com/office/drawing/2014/main" id="{F83B8F0A-3891-4B58-993B-69223AD7B887}"/>
+                <a16:creationId xmlns:a16="http://schemas.microsoft.com/office/drawing/2014/main" id="{FEDEED93-9F9F-444F-ABCA-5797821DBE25}"/>
               </a:ext>
             </a:extLst>
           </p:cNvPr>
@@ -23426,7 +23765,7 @@
           <p:cNvPr id="4" name="">
             <a:extLst xmlns:a="http://schemas.openxmlformats.org/drawingml/2006/main">
               <a:ext uri="{FF2B5EF4-FFF2-40B4-BE49-F238E27FC236}">
-                <a16:creationId xmlns:a16="http://schemas.microsoft.com/office/drawing/2014/main" id="{4819861B-2FC7-4B75-BCB4-FBDBEA98A41F}"/>
+                <a16:creationId xmlns:a16="http://schemas.microsoft.com/office/drawing/2014/main" id="{8822E2B1-6066-49AF-8A57-124DDA0FF13B}"/>
               </a:ext>
             </a:extLst>
           </p:cNvPr>
@@ -23483,7 +23822,7 @@
           <p:cNvPr id="5" name="">
             <a:extLst xmlns:a="http://schemas.openxmlformats.org/drawingml/2006/main">
               <a:ext uri="{FF2B5EF4-FFF2-40B4-BE49-F238E27FC236}">
-                <a16:creationId xmlns:a16="http://schemas.microsoft.com/office/drawing/2014/main" id="{A99E3194-7381-46F0-BBD7-6F0972A2C7EC}"/>
+                <a16:creationId xmlns:a16="http://schemas.microsoft.com/office/drawing/2014/main" id="{95F145F0-E29E-42D2-9870-3C16D209C6EA}"/>
               </a:ext>
             </a:extLst>
           </p:cNvPr>
@@ -23540,7 +23879,7 @@
           <p:cNvPr id="6" name="">
             <a:extLst xmlns:a="http://schemas.openxmlformats.org/drawingml/2006/main">
               <a:ext uri="{FF2B5EF4-FFF2-40B4-BE49-F238E27FC236}">
-                <a16:creationId xmlns:a16="http://schemas.microsoft.com/office/drawing/2014/main" id="{CE57B296-5C01-4B93-9FDE-6D9E3F9C5503}"/>
+                <a16:creationId xmlns:a16="http://schemas.microsoft.com/office/drawing/2014/main" id="{5FAB80F1-5530-49E1-84CA-F27B83029926}"/>
               </a:ext>
             </a:extLst>
           </p:cNvPr>
@@ -23601,7 +23940,7 @@
           <p:nvPr/>
         </p:nvPicPr>
         <p:blipFill>
-          <a:blip xmlns:r="http://schemas.openxmlformats.org/officeDocument/2006/relationships" xmlns:a="http://schemas.openxmlformats.org/drawingml/2006/main" r:embed="R9a1796b89dc24d1f"/>
+          <a:blip xmlns:r="http://schemas.openxmlformats.org/officeDocument/2006/relationships" xmlns:a="http://schemas.openxmlformats.org/drawingml/2006/main" r:embed="R30f6f9ae53d541fd"/>
           <a:stretch xmlns:a="http://schemas.openxmlformats.org/drawingml/2006/main"/>
         </p:blipFill>
         <p:spPr>
@@ -23619,7 +23958,7 @@
           <p:cNvPr id="8" name="">
             <a:extLst xmlns:a="http://schemas.openxmlformats.org/drawingml/2006/main">
               <a:ext uri="{FF2B5EF4-FFF2-40B4-BE49-F238E27FC236}">
-                <a16:creationId xmlns:a16="http://schemas.microsoft.com/office/drawing/2014/main" id="{28AC6570-1D33-4AFC-9AF8-D41A37AC2DB0}"/>
+                <a16:creationId xmlns:a16="http://schemas.microsoft.com/office/drawing/2014/main" id="{9D22E3AF-703A-4E1D-963E-4EDBE5CD073D}"/>
               </a:ext>
             </a:extLst>
           </p:cNvPr>
@@ -23676,7 +24015,7 @@
           <p:cNvPr id="9" name="">
             <a:extLst xmlns:a="http://schemas.openxmlformats.org/drawingml/2006/main">
               <a:ext uri="{FF2B5EF4-FFF2-40B4-BE49-F238E27FC236}">
-                <a16:creationId xmlns:a16="http://schemas.microsoft.com/office/drawing/2014/main" id="{D63D14BF-E7B9-4831-AF03-34F09C2F21C4}"/>
+                <a16:creationId xmlns:a16="http://schemas.microsoft.com/office/drawing/2014/main" id="{C913A3B7-F5E9-49F0-AA53-A55CEA1E6CBB}"/>
               </a:ext>
             </a:extLst>
           </p:cNvPr>
@@ -23733,7 +24072,7 @@
           <p:cNvPr id="10" name="">
             <a:extLst xmlns:a="http://schemas.openxmlformats.org/drawingml/2006/main">
               <a:ext uri="{FF2B5EF4-FFF2-40B4-BE49-F238E27FC236}">
-                <a16:creationId xmlns:a16="http://schemas.microsoft.com/office/drawing/2014/main" id="{F7C05569-F0A0-4378-8AFE-637E815924E8}"/>
+                <a16:creationId xmlns:a16="http://schemas.microsoft.com/office/drawing/2014/main" id="{78921F0E-2144-4B31-9B49-E855273AEF5B}"/>
               </a:ext>
             </a:extLst>
           </p:cNvPr>
@@ -23790,7 +24129,7 @@
           <p:cNvPr id="11" name="">
             <a:extLst xmlns:a="http://schemas.openxmlformats.org/drawingml/2006/main">
               <a:ext uri="{FF2B5EF4-FFF2-40B4-BE49-F238E27FC236}">
-                <a16:creationId xmlns:a16="http://schemas.microsoft.com/office/drawing/2014/main" id="{09481ACA-523C-40CB-A491-ABAFAF68DD71}"/>
+                <a16:creationId xmlns:a16="http://schemas.microsoft.com/office/drawing/2014/main" id="{23C1A818-72E7-48E4-998E-736E9BD5F09F}"/>
               </a:ext>
             </a:extLst>
           </p:cNvPr>
@@ -23847,7 +24186,7 @@
           <p:cNvPr id="12" name="">
             <a:extLst xmlns:a="http://schemas.openxmlformats.org/drawingml/2006/main">
               <a:ext uri="{FF2B5EF4-FFF2-40B4-BE49-F238E27FC236}">
-                <a16:creationId xmlns:a16="http://schemas.microsoft.com/office/drawing/2014/main" id="{5C945047-01FB-4C35-9822-8BA80E69A757}"/>
+                <a16:creationId xmlns:a16="http://schemas.microsoft.com/office/drawing/2014/main" id="{917A2C98-ABC8-47B9-8801-FE4D7560B224}"/>
               </a:ext>
             </a:extLst>
           </p:cNvPr>
@@ -23904,7 +24243,7 @@
           <p:cNvPr id="13" name="">
             <a:extLst xmlns:a="http://schemas.openxmlformats.org/drawingml/2006/main">
               <a:ext uri="{FF2B5EF4-FFF2-40B4-BE49-F238E27FC236}">
-                <a16:creationId xmlns:a16="http://schemas.microsoft.com/office/drawing/2014/main" id="{A79036BC-BE09-4220-B6A2-23450F3BA8DA}"/>
+                <a16:creationId xmlns:a16="http://schemas.microsoft.com/office/drawing/2014/main" id="{559BB07E-0C63-4645-BFAE-B43DA36961D6}"/>
               </a:ext>
             </a:extLst>
           </p:cNvPr>
@@ -23961,7 +24300,7 @@
           <p:cNvPr id="14" name="">
             <a:extLst xmlns:a="http://schemas.openxmlformats.org/drawingml/2006/main">
               <a:ext uri="{FF2B5EF4-FFF2-40B4-BE49-F238E27FC236}">
-                <a16:creationId xmlns:a16="http://schemas.microsoft.com/office/drawing/2014/main" id="{86C0BB27-511F-440E-9D42-7FB57E3D33FF}"/>
+                <a16:creationId xmlns:a16="http://schemas.microsoft.com/office/drawing/2014/main" id="{A2C8CFC6-E90C-43AE-9FA7-79C61DB20BC0}"/>
               </a:ext>
             </a:extLst>
           </p:cNvPr>
@@ -24016,7 +24355,7 @@
     </p:spTree>
     <p:extLst>
       <p:ext uri="{BB962C8B-B14F-4D97-AF65-F5344CB8AC3E}">
-        <p14:creationId xmlns:p14="http://schemas.microsoft.com/office/powerpoint/2010/main" val="1770640367"/>
+        <p14:creationId xmlns:p14="http://schemas.microsoft.com/office/powerpoint/2010/main" val="1645321174"/>
       </p:ext>
     </p:extLst>
   </p:cSld>
@@ -24044,10 +24383,10 @@
       </p:grpSpPr>
       <p:sp>
         <p:nvSpPr>
-          <p:cNvPr id="12" name="">
-            <a:extLst xmlns:a="http://schemas.openxmlformats.org/drawingml/2006/main">
-              <a:ext uri="{FF2B5EF4-FFF2-40B4-BE49-F238E27FC236}">
-                <a16:creationId xmlns:a16="http://schemas.microsoft.com/office/drawing/2014/main" id="{C6428EF5-8EC0-4A1A-846B-90115E680D8F}"/>
+          <p:cNvPr id="16" name="">
+            <a:extLst xmlns:a="http://schemas.openxmlformats.org/drawingml/2006/main">
+              <a:ext uri="{FF2B5EF4-FFF2-40B4-BE49-F238E27FC236}">
+                <a16:creationId xmlns:a16="http://schemas.microsoft.com/office/drawing/2014/main" id="{A9984A22-EC19-43B3-BC3E-CE9A963BFC62}"/>
               </a:ext>
             </a:extLst>
           </p:cNvPr>
@@ -24079,7 +24418,7 @@
           <p:cNvPr id="2" name="">
             <a:extLst xmlns:a="http://schemas.openxmlformats.org/drawingml/2006/main">
               <a:ext uri="{FF2B5EF4-FFF2-40B4-BE49-F238E27FC236}">
-                <a16:creationId xmlns:a16="http://schemas.microsoft.com/office/drawing/2014/main" id="{30DAF756-367F-476B-812E-CE99E8C3BC59}"/>
+                <a16:creationId xmlns:a16="http://schemas.microsoft.com/office/drawing/2014/main" id="{42FF5C24-044C-4C8A-9382-B01A17759B6C}"/>
               </a:ext>
             </a:extLst>
           </p:cNvPr>
@@ -24126,7 +24465,7 @@
                 <a:ea typeface="Arial"/>
                 <a:cs typeface="Arial"/>
               </a:rPr>
-              <a:t>QUALITY GATE</a:t>
+              <a:t>REGRAS COMUNITÁRIAS</a:t>
             </a:r>
           </a:p>
         </p:txBody>
@@ -24136,7 +24475,7 @@
           <p:cNvPr id="3" name="">
             <a:extLst xmlns:a="http://schemas.openxmlformats.org/drawingml/2006/main">
               <a:ext uri="{FF2B5EF4-FFF2-40B4-BE49-F238E27FC236}">
-                <a16:creationId xmlns:a16="http://schemas.microsoft.com/office/drawing/2014/main" id="{180294CE-19E1-4CDE-9378-351FE1E69CA2}"/>
+                <a16:creationId xmlns:a16="http://schemas.microsoft.com/office/drawing/2014/main" id="{D69D0F9C-90C9-40CC-8C90-5152028FED5D}"/>
               </a:ext>
             </a:extLst>
           </p:cNvPr>
@@ -24193,7 +24532,7 @@
           <p:cNvPr id="4" name="">
             <a:extLst xmlns:a="http://schemas.openxmlformats.org/drawingml/2006/main">
               <a:ext uri="{FF2B5EF4-FFF2-40B4-BE49-F238E27FC236}">
-                <a16:creationId xmlns:a16="http://schemas.microsoft.com/office/drawing/2014/main" id="{B48F8EA3-0C23-4180-92E1-817595BF7336}"/>
+                <a16:creationId xmlns:a16="http://schemas.microsoft.com/office/drawing/2014/main" id="{28F79748-F513-4739-A519-C0B21A1E5EF7}"/>
               </a:ext>
             </a:extLst>
           </p:cNvPr>
@@ -24250,64 +24589,7 @@
           <p:cNvPr id="5" name="">
             <a:extLst xmlns:a="http://schemas.openxmlformats.org/drawingml/2006/main">
               <a:ext uri="{FF2B5EF4-FFF2-40B4-BE49-F238E27FC236}">
-                <a16:creationId xmlns:a16="http://schemas.microsoft.com/office/drawing/2014/main" id="{A02FD702-022B-4E9C-A71A-9617DA52FBF6}"/>
-              </a:ext>
-            </a:extLst>
-          </p:cNvPr>
-          <p:cNvSpPr>
-            <a:spLocks xmlns:a="http://schemas.openxmlformats.org/drawingml/2006/main" noGrp="1"/>
-          </p:cNvSpPr>
-          <p:nvPr/>
-        </p:nvSpPr>
-        <p:spPr>
-          <a:xfrm xmlns:a="http://schemas.openxmlformats.org/drawingml/2006/main">
-            <a:off x="4095750" y="6419850"/>
-            <a:ext cx="6858000" cy="228600"/>
-          </a:xfrm>
-          <a:prstGeom xmlns:a="http://schemas.openxmlformats.org/drawingml/2006/main" prst="rect">
-            <a:avLst/>
-          </a:prstGeom>
-          <a:noFill xmlns:a="http://schemas.openxmlformats.org/drawingml/2006/main"/>
-          <a:ln xmlns:a="http://schemas.openxmlformats.org/drawingml/2006/main" w="0">
-            <a:noFill/>
-          </a:ln>
-        </p:spPr>
-        <p:txBody>
-          <a:bodyPr xmlns:a="http://schemas.openxmlformats.org/drawingml/2006/main" anchor="ctr">
-            <a:normAutofit fontScale="85714"/>
-          </a:bodyPr>
-          <a:lstStyle xmlns:a="http://schemas.openxmlformats.org/drawingml/2006/main"/>
-          <a:p xmlns:a="http://schemas.openxmlformats.org/drawingml/2006/main">
-            <a:pPr algn="r">
-              <a:defRPr sz="1050">
-                <a:solidFill>
-                  <a:srgbClr val="637383"/>
-                </a:solidFill>
-                <a:latin typeface="Arial"/>
-                <a:ea typeface="Arial"/>
-                <a:cs typeface="Arial"/>
-              </a:defRPr>
-            </a:pPr>
-            <a:r>
-              <a:rPr sz="1050">
-                <a:solidFill>
-                  <a:srgbClr val="637383"/>
-                </a:solidFill>
-                <a:latin typeface="Arial"/>
-                <a:ea typeface="Arial"/>
-                <a:cs typeface="Arial"/>
-              </a:rPr>
-              <a:t>captura do Grupo 4</a:t>
-            </a:r>
-          </a:p>
-        </p:txBody>
-      </p:sp>
-      <p:sp>
-        <p:nvSpPr>
-          <p:cNvPr id="6" name="">
-            <a:extLst xmlns:a="http://schemas.openxmlformats.org/drawingml/2006/main">
-              <a:ext uri="{FF2B5EF4-FFF2-40B4-BE49-F238E27FC236}">
-                <a16:creationId xmlns:a16="http://schemas.microsoft.com/office/drawing/2014/main" id="{ADD5FA6B-EF4E-49E4-AFF6-36C136561E2F}"/>
+                <a16:creationId xmlns:a16="http://schemas.microsoft.com/office/drawing/2014/main" id="{30BD0B1C-DA51-4A64-957A-6EE3899A97BD}"/>
               </a:ext>
             </a:extLst>
           </p:cNvPr>
@@ -24359,34 +24641,398 @@
           </a:p>
         </p:txBody>
       </p:sp>
-      <p:pic>
-        <p:nvPicPr>
-          <p:cNvPr id="18" name=""/>
-          <p:cNvPicPr>
-            <a:picLocks xmlns:a="http://schemas.openxmlformats.org/drawingml/2006/main" noChangeAspect="1"/>
-          </p:cNvPicPr>
-          <p:nvPr/>
-        </p:nvPicPr>
-        <p:blipFill>
-          <a:blip xmlns:r="http://schemas.openxmlformats.org/officeDocument/2006/relationships" xmlns:a="http://schemas.openxmlformats.org/drawingml/2006/main" r:embed="R4c041cda90204bcd"/>
-          <a:stretch xmlns:a="http://schemas.openxmlformats.org/drawingml/2006/main"/>
-        </p:blipFill>
-        <p:spPr>
-          <a:xfrm xmlns:a="http://schemas.openxmlformats.org/drawingml/2006/main">
-            <a:off x="927742" y="1447800"/>
-            <a:ext cx="6697966" cy="4381500"/>
-          </a:xfrm>
-          <a:prstGeom xmlns:a="http://schemas.openxmlformats.org/drawingml/2006/main" prst="rect">
-            <a:avLst/>
-          </a:prstGeom>
-        </p:spPr>
-      </p:pic>
+      <p:sp>
+        <p:nvSpPr>
+          <p:cNvPr id="6" name="">
+            <a:extLst xmlns:a="http://schemas.openxmlformats.org/drawingml/2006/main">
+              <a:ext uri="{FF2B5EF4-FFF2-40B4-BE49-F238E27FC236}">
+                <a16:creationId xmlns:a16="http://schemas.microsoft.com/office/drawing/2014/main" id="{487F63CB-016B-493B-B234-ACCD83E9901A}"/>
+              </a:ext>
+            </a:extLst>
+          </p:cNvPr>
+          <p:cNvSpPr>
+            <a:spLocks xmlns:a="http://schemas.openxmlformats.org/drawingml/2006/main" noGrp="1"/>
+          </p:cNvSpPr>
+          <p:nvPr/>
+        </p:nvSpPr>
+        <p:spPr>
+          <a:xfrm xmlns:a="http://schemas.openxmlformats.org/drawingml/2006/main">
+            <a:off x="666750" y="1562100"/>
+            <a:ext cx="4191000" cy="381000"/>
+          </a:xfrm>
+          <a:prstGeom xmlns:a="http://schemas.openxmlformats.org/drawingml/2006/main" prst="rect">
+            <a:avLst/>
+          </a:prstGeom>
+          <a:noFill xmlns:a="http://schemas.openxmlformats.org/drawingml/2006/main"/>
+          <a:ln xmlns:a="http://schemas.openxmlformats.org/drawingml/2006/main" w="0">
+            <a:noFill/>
+          </a:ln>
+        </p:spPr>
+        <p:txBody>
+          <a:bodyPr xmlns:a="http://schemas.openxmlformats.org/drawingml/2006/main" anchor="ctr">
+            <a:normAutofit fontScale="93827"/>
+          </a:bodyPr>
+          <a:lstStyle xmlns:a="http://schemas.openxmlformats.org/drawingml/2006/main"/>
+          <a:p xmlns:a="http://schemas.openxmlformats.org/drawingml/2006/main">
+            <a:pPr>
+              <a:defRPr sz="2025" b="1">
+                <a:solidFill>
+                  <a:srgbClr val="00A6C8"/>
+                </a:solidFill>
+                <a:latin typeface="Arial"/>
+                <a:ea typeface="Arial"/>
+                <a:cs typeface="Arial"/>
+              </a:defRPr>
+            </a:pPr>
+            <a:r>
+              <a:rPr sz="2025" b="1">
+                <a:solidFill>
+                  <a:srgbClr val="00A6C8"/>
+                </a:solidFill>
+                <a:latin typeface="Arial"/>
+                <a:ea typeface="Arial"/>
+                <a:cs typeface="Arial"/>
+              </a:rPr>
+              <a:t>Comando executado</a:t>
+            </a:r>
+          </a:p>
+        </p:txBody>
+      </p:sp>
+      <p:sp>
+        <p:nvSpPr>
+          <p:cNvPr id="7" name="">
+            <a:extLst xmlns:a="http://schemas.openxmlformats.org/drawingml/2006/main">
+              <a:ext uri="{FF2B5EF4-FFF2-40B4-BE49-F238E27FC236}">
+                <a16:creationId xmlns:a16="http://schemas.microsoft.com/office/drawing/2014/main" id="{F8A29B0D-95F3-4BD2-940E-BC4993B441F6}"/>
+              </a:ext>
+            </a:extLst>
+          </p:cNvPr>
+          <p:cNvSpPr>
+            <a:spLocks xmlns:a="http://schemas.openxmlformats.org/drawingml/2006/main" noGrp="1"/>
+          </p:cNvSpPr>
+          <p:nvPr/>
+        </p:nvSpPr>
+        <p:spPr>
+          <a:xfrm xmlns:a="http://schemas.openxmlformats.org/drawingml/2006/main">
+            <a:off x="628650" y="2095500"/>
+            <a:ext cx="7143750" cy="2114550"/>
+          </a:xfrm>
+          <a:prstGeom xmlns:a="http://schemas.openxmlformats.org/drawingml/2006/main" prst="rect">
+            <a:avLst/>
+          </a:prstGeom>
+          <a:solidFill xmlns:a="http://schemas.openxmlformats.org/drawingml/2006/main">
+            <a:srgbClr val="F0F3F5"/>
+          </a:solidFill>
+          <a:ln xmlns:a="http://schemas.openxmlformats.org/drawingml/2006/main" w="9525">
+            <a:solidFill>
+              <a:srgbClr val="D4DEE5"/>
+            </a:solidFill>
+          </a:ln>
+        </p:spPr>
+      </p:sp>
       <p:sp>
         <p:nvSpPr>
           <p:cNvPr id="8" name="">
             <a:extLst xmlns:a="http://schemas.openxmlformats.org/drawingml/2006/main">
               <a:ext uri="{FF2B5EF4-FFF2-40B4-BE49-F238E27FC236}">
-                <a16:creationId xmlns:a16="http://schemas.microsoft.com/office/drawing/2014/main" id="{4763CCFF-5572-40B0-ADFF-48CCF433ECB7}"/>
+                <a16:creationId xmlns:a16="http://schemas.microsoft.com/office/drawing/2014/main" id="{6FEBC412-B709-4DF7-867D-C5B28CB42D6C}"/>
+              </a:ext>
+            </a:extLst>
+          </p:cNvPr>
+          <p:cNvSpPr>
+            <a:spLocks xmlns:a="http://schemas.openxmlformats.org/drawingml/2006/main" noGrp="1"/>
+          </p:cNvSpPr>
+          <p:nvPr/>
+        </p:nvSpPr>
+        <p:spPr>
+          <a:xfrm xmlns:a="http://schemas.openxmlformats.org/drawingml/2006/main">
+            <a:off x="876300" y="2286000"/>
+            <a:ext cx="6667500" cy="1733550"/>
+          </a:xfrm>
+          <a:prstGeom xmlns:a="http://schemas.openxmlformats.org/drawingml/2006/main" prst="rect">
+            <a:avLst/>
+          </a:prstGeom>
+          <a:noFill xmlns:a="http://schemas.openxmlformats.org/drawingml/2006/main"/>
+          <a:ln xmlns:a="http://schemas.openxmlformats.org/drawingml/2006/main" w="0">
+            <a:noFill/>
+          </a:ln>
+        </p:spPr>
+        <p:txBody>
+          <a:bodyPr xmlns:a="http://schemas.openxmlformats.org/drawingml/2006/main" anchor="ctr">
+            <a:normAutofit fontScale="100000"/>
+          </a:bodyPr>
+          <a:lstStyle xmlns:a="http://schemas.openxmlformats.org/drawingml/2006/main"/>
+          <a:p xmlns:a="http://schemas.openxmlformats.org/drawingml/2006/main">
+            <a:pPr>
+              <a:defRPr sz="1650">
+                <a:solidFill>
+                  <a:srgbClr val="071A2F"/>
+                </a:solidFill>
+                <a:latin typeface="Consolas"/>
+                <a:ea typeface="Consolas"/>
+                <a:cs typeface="Consolas"/>
+              </a:defRPr>
+            </a:pPr>
+            <a:r>
+              <a:rPr sz="1650">
+                <a:solidFill>
+                  <a:srgbClr val="071A2F"/>
+                </a:solidFill>
+                <a:latin typeface="Consolas"/>
+                <a:ea typeface="Consolas"/>
+                <a:cs typeface="Consolas"/>
+              </a:rPr>
+              <a:t>docker compose --profile tools run --rm semgrep</a:t>
+            </a:r>
+          </a:p>
+          <a:p xmlns:a="http://schemas.openxmlformats.org/drawingml/2006/main">
+            <a:pPr>
+              <a:defRPr sz="1650">
+                <a:solidFill>
+                  <a:srgbClr val="071A2F"/>
+                </a:solidFill>
+                <a:latin typeface="Consolas"/>
+                <a:ea typeface="Consolas"/>
+                <a:cs typeface="Consolas"/>
+              </a:defRPr>
+            </a:pPr>
+            <a:r>
+              <a:rPr sz="1650">
+                <a:solidFill>
+                  <a:srgbClr val="071A2F"/>
+                </a:solidFill>
+                <a:latin typeface="Consolas"/>
+                <a:ea typeface="Consolas"/>
+                <a:cs typeface="Consolas"/>
+              </a:rPr>
+              <a:t>  semgrep scan --config auto --json</a:t>
+            </a:r>
+          </a:p>
+          <a:p xmlns:a="http://schemas.openxmlformats.org/drawingml/2006/main">
+            <a:pPr>
+              <a:defRPr sz="1650">
+                <a:solidFill>
+                  <a:srgbClr val="071A2F"/>
+                </a:solidFill>
+                <a:latin typeface="Consolas"/>
+                <a:ea typeface="Consolas"/>
+                <a:cs typeface="Consolas"/>
+              </a:defRPr>
+            </a:pPr>
+            <a:r>
+              <a:rPr sz="1650">
+                <a:solidFill>
+                  <a:srgbClr val="071A2F"/>
+                </a:solidFill>
+                <a:latin typeface="Consolas"/>
+                <a:ea typeface="Consolas"/>
+                <a:cs typeface="Consolas"/>
+              </a:rPr>
+              <a:t>  --output /workspace/reports/semgrep-red.json</a:t>
+            </a:r>
+          </a:p>
+          <a:p xmlns:a="http://schemas.openxmlformats.org/drawingml/2006/main">
+            <a:pPr>
+              <a:defRPr sz="1650">
+                <a:solidFill>
+                  <a:srgbClr val="071A2F"/>
+                </a:solidFill>
+                <a:latin typeface="Consolas"/>
+                <a:ea typeface="Consolas"/>
+                <a:cs typeface="Consolas"/>
+              </a:defRPr>
+            </a:pPr>
+            <a:r>
+              <a:rPr sz="1650">
+                <a:solidFill>
+                  <a:srgbClr val="071A2F"/>
+                </a:solidFill>
+                <a:latin typeface="Consolas"/>
+                <a:ea typeface="Consolas"/>
+                <a:cs typeface="Consolas"/>
+              </a:rPr>
+              <a:t>  /workspace/target/juice-shop/routes/search.ts</a:t>
+            </a:r>
+          </a:p>
+        </p:txBody>
+      </p:sp>
+      <p:sp>
+        <p:nvSpPr>
+          <p:cNvPr id="9" name="">
+            <a:extLst xmlns:a="http://schemas.openxmlformats.org/drawingml/2006/main">
+              <a:ext uri="{FF2B5EF4-FFF2-40B4-BE49-F238E27FC236}">
+                <a16:creationId xmlns:a16="http://schemas.microsoft.com/office/drawing/2014/main" id="{28EB133E-6372-49CF-AD15-1B69AAB0107B}"/>
+              </a:ext>
+            </a:extLst>
+          </p:cNvPr>
+          <p:cNvSpPr>
+            <a:spLocks xmlns:a="http://schemas.openxmlformats.org/drawingml/2006/main" noGrp="1"/>
+          </p:cNvSpPr>
+          <p:nvPr/>
+        </p:nvSpPr>
+        <p:spPr>
+          <a:xfrm xmlns:a="http://schemas.openxmlformats.org/drawingml/2006/main">
+            <a:off x="666750" y="4533900"/>
+            <a:ext cx="2571750" cy="323850"/>
+          </a:xfrm>
+          <a:prstGeom xmlns:a="http://schemas.openxmlformats.org/drawingml/2006/main" prst="rect">
+            <a:avLst/>
+          </a:prstGeom>
+          <a:noFill xmlns:a="http://schemas.openxmlformats.org/drawingml/2006/main"/>
+          <a:ln xmlns:a="http://schemas.openxmlformats.org/drawingml/2006/main" w="0">
+            <a:noFill/>
+          </a:ln>
+        </p:spPr>
+        <p:txBody>
+          <a:bodyPr xmlns:a="http://schemas.openxmlformats.org/drawingml/2006/main" anchor="ctr">
+            <a:normAutofit fontScale="96825"/>
+          </a:bodyPr>
+          <a:lstStyle xmlns:a="http://schemas.openxmlformats.org/drawingml/2006/main"/>
+          <a:p xmlns:a="http://schemas.openxmlformats.org/drawingml/2006/main">
+            <a:pPr>
+              <a:defRPr sz="1575" b="1">
+                <a:solidFill>
+                  <a:srgbClr val="637383"/>
+                </a:solidFill>
+                <a:latin typeface="Arial"/>
+                <a:ea typeface="Arial"/>
+                <a:cs typeface="Arial"/>
+              </a:defRPr>
+            </a:pPr>
+            <a:r>
+              <a:rPr sz="1575" b="1">
+                <a:solidFill>
+                  <a:srgbClr val="637383"/>
+                </a:solidFill>
+                <a:latin typeface="Arial"/>
+                <a:ea typeface="Arial"/>
+                <a:cs typeface="Arial"/>
+              </a:rPr>
+              <a:t>Regra comunitária</a:t>
+            </a:r>
+          </a:p>
+        </p:txBody>
+      </p:sp>
+      <p:sp>
+        <p:nvSpPr>
+          <p:cNvPr id="10" name="">
+            <a:extLst xmlns:a="http://schemas.openxmlformats.org/drawingml/2006/main">
+              <a:ext uri="{FF2B5EF4-FFF2-40B4-BE49-F238E27FC236}">
+                <a16:creationId xmlns:a16="http://schemas.microsoft.com/office/drawing/2014/main" id="{5FEA8D09-889B-446A-AEB9-AE5E6EDB4481}"/>
+              </a:ext>
+            </a:extLst>
+          </p:cNvPr>
+          <p:cNvSpPr>
+            <a:spLocks xmlns:a="http://schemas.openxmlformats.org/drawingml/2006/main" noGrp="1"/>
+          </p:cNvSpPr>
+          <p:nvPr/>
+        </p:nvSpPr>
+        <p:spPr>
+          <a:xfrm xmlns:a="http://schemas.openxmlformats.org/drawingml/2006/main">
+            <a:off x="666750" y="4914900"/>
+            <a:ext cx="6762750" cy="419100"/>
+          </a:xfrm>
+          <a:prstGeom xmlns:a="http://schemas.openxmlformats.org/drawingml/2006/main" prst="rect">
+            <a:avLst/>
+          </a:prstGeom>
+          <a:noFill xmlns:a="http://schemas.openxmlformats.org/drawingml/2006/main"/>
+          <a:ln xmlns:a="http://schemas.openxmlformats.org/drawingml/2006/main" w="0">
+            <a:noFill/>
+          </a:ln>
+        </p:spPr>
+        <p:txBody>
+          <a:bodyPr xmlns:a="http://schemas.openxmlformats.org/drawingml/2006/main" anchor="ctr">
+            <a:normAutofit fontScale="100000"/>
+          </a:bodyPr>
+          <a:lstStyle xmlns:a="http://schemas.openxmlformats.org/drawingml/2006/main"/>
+          <a:p xmlns:a="http://schemas.openxmlformats.org/drawingml/2006/main">
+            <a:pPr>
+              <a:defRPr sz="2025" b="1">
+                <a:solidFill>
+                  <a:srgbClr val="071A2F"/>
+                </a:solidFill>
+                <a:latin typeface="Consolas"/>
+                <a:ea typeface="Consolas"/>
+                <a:cs typeface="Consolas"/>
+              </a:defRPr>
+            </a:pPr>
+            <a:r>
+              <a:rPr sz="2025" b="1">
+                <a:solidFill>
+                  <a:srgbClr val="071A2F"/>
+                </a:solidFill>
+                <a:latin typeface="Consolas"/>
+                <a:ea typeface="Consolas"/>
+                <a:cs typeface="Consolas"/>
+              </a:rPr>
+              <a:t>express-sequelize-injection</a:t>
+            </a:r>
+          </a:p>
+        </p:txBody>
+      </p:sp>
+      <p:sp>
+        <p:nvSpPr>
+          <p:cNvPr id="11" name="">
+            <a:extLst xmlns:a="http://schemas.openxmlformats.org/drawingml/2006/main">
+              <a:ext uri="{FF2B5EF4-FFF2-40B4-BE49-F238E27FC236}">
+                <a16:creationId xmlns:a16="http://schemas.microsoft.com/office/drawing/2014/main" id="{B2209982-C0D6-48B1-8F8C-8BE233AAEE76}"/>
+              </a:ext>
+            </a:extLst>
+          </p:cNvPr>
+          <p:cNvSpPr>
+            <a:spLocks xmlns:a="http://schemas.openxmlformats.org/drawingml/2006/main" noGrp="1"/>
+          </p:cNvSpPr>
+          <p:nvPr/>
+        </p:nvSpPr>
+        <p:spPr>
+          <a:xfrm xmlns:a="http://schemas.openxmlformats.org/drawingml/2006/main">
+            <a:off x="666750" y="5429250"/>
+            <a:ext cx="6762750" cy="361950"/>
+          </a:xfrm>
+          <a:prstGeom xmlns:a="http://schemas.openxmlformats.org/drawingml/2006/main" prst="rect">
+            <a:avLst/>
+          </a:prstGeom>
+          <a:noFill xmlns:a="http://schemas.openxmlformats.org/drawingml/2006/main"/>
+          <a:ln xmlns:a="http://schemas.openxmlformats.org/drawingml/2006/main" w="0">
+            <a:noFill/>
+          </a:ln>
+        </p:spPr>
+        <p:txBody>
+          <a:bodyPr xmlns:a="http://schemas.openxmlformats.org/drawingml/2006/main" anchor="ctr">
+            <a:normAutofit fontScale="100000"/>
+          </a:bodyPr>
+          <a:lstStyle xmlns:a="http://schemas.openxmlformats.org/drawingml/2006/main"/>
+          <a:p xmlns:a="http://schemas.openxmlformats.org/drawingml/2006/main">
+            <a:pPr>
+              <a:defRPr sz="1725">
+                <a:solidFill>
+                  <a:srgbClr val="13202C"/>
+                </a:solidFill>
+                <a:latin typeface="Consolas"/>
+                <a:ea typeface="Consolas"/>
+                <a:cs typeface="Consolas"/>
+              </a:defRPr>
+            </a:pPr>
+            <a:r>
+              <a:rPr sz="1725">
+                <a:solidFill>
+                  <a:srgbClr val="13202C"/>
+                </a:solidFill>
+                <a:latin typeface="Consolas"/>
+                <a:ea typeface="Consolas"/>
+                <a:cs typeface="Consolas"/>
+              </a:rPr>
+              <a:t>routes/search.ts:23</a:t>
+            </a:r>
+          </a:p>
+        </p:txBody>
+      </p:sp>
+      <p:sp>
+        <p:nvSpPr>
+          <p:cNvPr id="12" name="">
+            <a:extLst xmlns:a="http://schemas.openxmlformats.org/drawingml/2006/main">
+              <a:ext uri="{FF2B5EF4-FFF2-40B4-BE49-F238E27FC236}">
+                <a16:creationId xmlns:a16="http://schemas.microsoft.com/office/drawing/2014/main" id="{CA8B04BF-C9A0-4783-AEC2-EACB3C5C80F9}"/>
               </a:ext>
             </a:extLst>
           </p:cNvPr>
@@ -24440,10 +25086,10 @@
       </p:sp>
       <p:sp>
         <p:nvSpPr>
-          <p:cNvPr id="9" name="">
-            <a:extLst xmlns:a="http://schemas.openxmlformats.org/drawingml/2006/main">
-              <a:ext uri="{FF2B5EF4-FFF2-40B4-BE49-F238E27FC236}">
-                <a16:creationId xmlns:a16="http://schemas.microsoft.com/office/drawing/2014/main" id="{BCE0B48B-E0AB-4ED7-937F-C8EEE358809D}"/>
+          <p:cNvPr id="13" name="">
+            <a:extLst xmlns:a="http://schemas.openxmlformats.org/drawingml/2006/main">
+              <a:ext uri="{FF2B5EF4-FFF2-40B4-BE49-F238E27FC236}">
+                <a16:creationId xmlns:a16="http://schemas.microsoft.com/office/drawing/2014/main" id="{0A80A689-D84B-4D3D-A415-ADB8B2A0484B}"/>
               </a:ext>
             </a:extLst>
           </p:cNvPr>
@@ -24497,10 +25143,10 @@
       </p:sp>
       <p:sp>
         <p:nvSpPr>
-          <p:cNvPr id="10" name="">
-            <a:extLst xmlns:a="http://schemas.openxmlformats.org/drawingml/2006/main">
-              <a:ext uri="{FF2B5EF4-FFF2-40B4-BE49-F238E27FC236}">
-                <a16:creationId xmlns:a16="http://schemas.microsoft.com/office/drawing/2014/main" id="{B94F608D-87FF-414C-8CB6-F71BB5C30388}"/>
+          <p:cNvPr id="14" name="">
+            <a:extLst xmlns:a="http://schemas.openxmlformats.org/drawingml/2006/main">
+              <a:ext uri="{FF2B5EF4-FFF2-40B4-BE49-F238E27FC236}">
+                <a16:creationId xmlns:a16="http://schemas.microsoft.com/office/drawing/2014/main" id="{9A37CBD6-3DA1-40B7-AEEC-A9316E3182DC}"/>
               </a:ext>
             </a:extLst>
           </p:cNvPr>
@@ -24554,10 +25200,10 @@
       </p:sp>
       <p:sp>
         <p:nvSpPr>
-          <p:cNvPr id="11" name="">
-            <a:extLst xmlns:a="http://schemas.openxmlformats.org/drawingml/2006/main">
-              <a:ext uri="{FF2B5EF4-FFF2-40B4-BE49-F238E27FC236}">
-                <a16:creationId xmlns:a16="http://schemas.microsoft.com/office/drawing/2014/main" id="{A057627C-41CA-430E-A346-20A60091E6A8}"/>
+          <p:cNvPr id="15" name="">
+            <a:extLst xmlns:a="http://schemas.openxmlformats.org/drawingml/2006/main">
+              <a:ext uri="{FF2B5EF4-FFF2-40B4-BE49-F238E27FC236}">
+                <a16:creationId xmlns:a16="http://schemas.microsoft.com/office/drawing/2014/main" id="{651D587F-6E7E-4B64-8435-07E71B7A7D68}"/>
               </a:ext>
             </a:extLst>
           </p:cNvPr>
@@ -24612,7 +25258,7 @@
     </p:spTree>
     <p:extLst>
       <p:ext uri="{BB962C8B-B14F-4D97-AF65-F5344CB8AC3E}">
-        <p14:creationId xmlns:p14="http://schemas.microsoft.com/office/powerpoint/2010/main" val="468330165"/>
+        <p14:creationId xmlns:p14="http://schemas.microsoft.com/office/powerpoint/2010/main" val="1148149159"/>
       </p:ext>
     </p:extLst>
   </p:cSld>
